--- a/uas/presentasi_proyek.pptx
+++ b/uas/presentasi_proyek.pptx
@@ -16,8 +16,6 @@
     <p:sldId id="264" r:id="rId15"/>
     <p:sldId id="265" r:id="rId16"/>
     <p:sldId id="266" r:id="rId17"/>
-    <p:sldId id="267" r:id="rId18"/>
-    <p:sldId id="268" r:id="rId19"/>
   </p:sldIdLst>
   <p:sldSz cx="12191695" cy="6858000" type="screen4x3"/>
   <p:notesSz cx="6858000" cy="9144000"/>
@@ -3195,22 +3193,22 @@
         </p:nvSpPr>
         <p:spPr>
           <a:xfrm>
-            <a:off x="914400" y="1097280"/>
-            <a:ext cx="10515600" cy="2286000"/>
-          </a:xfrm>
-          <a:prstGeom prst="rect">
-            <a:avLst/>
-          </a:prstGeom>
-          <a:noFill/>
-        </p:spPr>
-        <p:txBody>
-          <a:bodyPr wrap="square">
-            <a:spAutoFit/>
-          </a:bodyPr>
-          <a:lstStyle/>
-          <a:p>
-            <a:pPr algn="l">
-              <a:defRPr sz="3800" b="1" i="0">
+            <a:off x="914400" y="1188720"/>
+            <a:ext cx="10515600" cy="2011680"/>
+          </a:xfrm>
+          <a:prstGeom prst="rect">
+            <a:avLst/>
+          </a:prstGeom>
+          <a:noFill/>
+        </p:spPr>
+        <p:txBody>
+          <a:bodyPr wrap="square">
+            <a:spAutoFit/>
+          </a:bodyPr>
+          <a:lstStyle/>
+          <a:p>
+            <a:pPr algn="l">
+              <a:defRPr sz="4000" b="1" i="0">
                 <a:solidFill>
                   <a:srgbClr val="FFFFFF"/>
                 </a:solidFill>
@@ -3223,10 +3221,6 @@
             <a:br/>
             <a:r>
               <a:t>Buku Impor Periplus.com</a:t>
-            </a:r>
-            <a:br/>
-            <a:r>
-              <a:t>Dengan Pendekatan Data Science</a:t>
             </a:r>
           </a:p>
         </p:txBody>
@@ -3239,7 +3233,7 @@
         </p:nvSpPr>
         <p:spPr>
           <a:xfrm>
-            <a:off x="731520" y="3474720"/>
+            <a:off x="914400" y="3291840"/>
             <a:ext cx="1828800" cy="54864"/>
           </a:xfrm>
           <a:prstGeom prst="rect">
@@ -3282,7 +3276,7 @@
         </p:nvSpPr>
         <p:spPr>
           <a:xfrm>
-            <a:off x="914400" y="3749039"/>
+            <a:off x="914400" y="3566160"/>
             <a:ext cx="10058400" cy="457200"/>
           </a:xfrm>
           <a:prstGeom prst="rect">
@@ -3305,7 +3299,7 @@
               </a:defRPr>
             </a:pPr>
             <a:r>
-              <a:t>Web Scraping, Data Management, Machine Learning &amp; Business Insights</a:t>
+              <a:t>Web Scraping, Regresi Linier, K-Means Clustering &amp; Business Insights</a:t>
             </a:r>
           </a:p>
         </p:txBody>
@@ -3318,7 +3312,7 @@
         </p:nvSpPr>
         <p:spPr>
           <a:xfrm>
-            <a:off x="914400" y="4754880"/>
+            <a:off x="914400" y="4572000"/>
             <a:ext cx="10058400" cy="457200"/>
           </a:xfrm>
           <a:prstGeom prst="rect">
@@ -3354,8 +3348,8 @@
         </p:nvSpPr>
         <p:spPr>
           <a:xfrm>
-            <a:off x="914400" y="5212080"/>
-            <a:ext cx="10058400" cy="457200"/>
+            <a:off x="914400" y="5029200"/>
+            <a:ext cx="10058400" cy="365760"/>
           </a:xfrm>
           <a:prstGeom prst="rect">
             <a:avLst/>
@@ -3390,8 +3384,8 @@
         </p:nvSpPr>
         <p:spPr>
           <a:xfrm>
-            <a:off x="914400" y="5577840"/>
-            <a:ext cx="10058400" cy="457200"/>
+            <a:off x="914400" y="5394960"/>
+            <a:ext cx="10058400" cy="365760"/>
           </a:xfrm>
           <a:prstGeom prst="rect">
             <a:avLst/>
@@ -3413,7 +3407,7 @@
               </a:defRPr>
             </a:pPr>
             <a:r>
-              <a:t>Data Science (IF404) | Dosen Pengampu: Ir. Ahmad Chusyairi, M.Com., CDS., IPM., ASEAN Eng</a:t>
+              <a:t>Dosen: Ir. Ahmad Chusyairi, M.Com., CDS., IPM., ASEAN Eng</a:t>
             </a:r>
           </a:p>
         </p:txBody>
@@ -3475,7 +3469,7 @@
               </a:defRPr>
             </a:pPr>
             <a:r>
-              <a:t>Detail Kluster</a:t>
+              <a:t>Kesimpulan</a:t>
             </a:r>
           </a:p>
         </p:txBody>
@@ -3488,7 +3482,7 @@
         </p:nvSpPr>
         <p:spPr>
           <a:xfrm>
-            <a:off x="731520" y="1417320"/>
+            <a:off x="731520" y="1051560"/>
             <a:ext cx="1371600" cy="54864"/>
           </a:xfrm>
           <a:prstGeom prst="rect">
@@ -3531,117 +3525,103 @@
         </p:nvSpPr>
         <p:spPr>
           <a:xfrm>
-            <a:off x="731520" y="1097280"/>
-            <a:ext cx="10058400" cy="457200"/>
-          </a:xfrm>
-          <a:prstGeom prst="rect">
-            <a:avLst/>
-          </a:prstGeom>
-          <a:noFill/>
-        </p:spPr>
-        <p:txBody>
-          <a:bodyPr wrap="square">
-            <a:spAutoFit/>
-          </a:bodyPr>
-          <a:lstStyle/>
-          <a:p>
-            <a:pPr algn="l">
-              <a:defRPr sz="1600" b="0" i="1">
-                <a:solidFill>
-                  <a:srgbClr val="CCCCCC"/>
-                </a:solidFill>
-                <a:latin typeface="Calibri"/>
-              </a:defRPr>
-            </a:pPr>
-            <a:r>
-              <a:t>Karakteristik setiap segmen pasar</a:t>
-            </a:r>
-          </a:p>
-        </p:txBody>
-      </p:sp>
-      <p:sp>
-        <p:nvSpPr>
-          <p:cNvPr id="5" name="Rectangle 4"/>
-          <p:cNvSpPr/>
-          <p:nvPr/>
-        </p:nvSpPr>
-        <p:spPr>
-          <a:xfrm>
-            <a:off x="457200" y="1645920"/>
-            <a:ext cx="3474720" cy="4114800"/>
-          </a:xfrm>
-          <a:prstGeom prst="rect">
-            <a:avLst/>
-          </a:prstGeom>
-          <a:solidFill>
-            <a:srgbClr val="22223A"/>
-          </a:solidFill>
-          <a:ln>
-            <a:noFill/>
-          </a:ln>
-        </p:spPr>
-        <p:style>
-          <a:lnRef idx="1">
-            <a:schemeClr val="accent1"/>
-          </a:lnRef>
-          <a:fillRef idx="3">
-            <a:schemeClr val="accent1"/>
-          </a:fillRef>
-          <a:effectRef idx="2">
-            <a:schemeClr val="accent1"/>
-          </a:effectRef>
-          <a:fontRef idx="minor">
-            <a:schemeClr val="lt1"/>
-          </a:fontRef>
-        </p:style>
-        <p:txBody>
-          <a:bodyPr rtlCol="0" anchor="ctr"/>
-          <a:lstStyle/>
-          <a:p>
-            <a:pPr algn="ctr"/>
-          </a:p>
-        </p:txBody>
-      </p:sp>
-      <p:sp>
-        <p:nvSpPr>
-          <p:cNvPr id="6" name="Rectangle 5"/>
-          <p:cNvSpPr/>
-          <p:nvPr/>
-        </p:nvSpPr>
-        <p:spPr>
-          <a:xfrm>
-            <a:off x="457200" y="1645920"/>
-            <a:ext cx="3474720" cy="73152"/>
-          </a:xfrm>
-          <a:prstGeom prst="rect">
-            <a:avLst/>
-          </a:prstGeom>
-          <a:solidFill>
-            <a:srgbClr val="F39424"/>
-          </a:solidFill>
-          <a:ln>
-            <a:noFill/>
-          </a:ln>
-        </p:spPr>
-        <p:style>
-          <a:lnRef idx="1">
-            <a:schemeClr val="accent1"/>
-          </a:lnRef>
-          <a:fillRef idx="3">
-            <a:schemeClr val="accent1"/>
-          </a:fillRef>
-          <a:effectRef idx="2">
-            <a:schemeClr val="accent1"/>
-          </a:effectRef>
-          <a:fontRef idx="minor">
-            <a:schemeClr val="lt1"/>
-          </a:fontRef>
-        </p:style>
-        <p:txBody>
-          <a:bodyPr rtlCol="0" anchor="ctr"/>
-          <a:lstStyle/>
-          <a:p>
-            <a:pPr algn="ctr"/>
+            <a:off x="731520" y="1645920"/>
+            <a:ext cx="10515600" cy="457200"/>
+          </a:xfrm>
+          <a:prstGeom prst="rect">
+            <a:avLst/>
+          </a:prstGeom>
+          <a:noFill/>
+        </p:spPr>
+        <p:txBody>
+          <a:bodyPr wrap="square">
+            <a:spAutoFit/>
+          </a:bodyPr>
+          <a:lstStyle/>
+          <a:p>
+            <a:pPr algn="l">
+              <a:defRPr sz="1800" b="0" i="0">
+                <a:solidFill>
+                  <a:srgbClr val="FFFFFF"/>
+                </a:solidFill>
+                <a:latin typeface="Calibri"/>
+              </a:defRPr>
+            </a:pPr>
+            <a:r>
+              <a:t>•  Pipeline data science end-to-end berhasil diimplementasikan</a:t>
+            </a:r>
+          </a:p>
+        </p:txBody>
+      </p:sp>
+      <p:sp>
+        <p:nvSpPr>
+          <p:cNvPr id="5" name="TextBox 4"/>
+          <p:cNvSpPr txBox="1"/>
+          <p:nvPr/>
+        </p:nvSpPr>
+        <p:spPr>
+          <a:xfrm>
+            <a:off x="731520" y="2286000"/>
+            <a:ext cx="10515600" cy="457200"/>
+          </a:xfrm>
+          <a:prstGeom prst="rect">
+            <a:avLst/>
+          </a:prstGeom>
+          <a:noFill/>
+        </p:spPr>
+        <p:txBody>
+          <a:bodyPr wrap="square">
+            <a:spAutoFit/>
+          </a:bodyPr>
+          <a:lstStyle/>
+          <a:p>
+            <a:pPr algn="l">
+              <a:defRPr sz="1800" b="0" i="0">
+                <a:solidFill>
+                  <a:srgbClr val="FFFFFF"/>
+                </a:solidFill>
+                <a:latin typeface="Calibri"/>
+              </a:defRPr>
+            </a:pPr>
+            <a:r>
+              <a:t>•  1.514 data mentah → 1.322 data bersih dari 8 kategori Periplus</a:t>
+            </a:r>
+          </a:p>
+        </p:txBody>
+      </p:sp>
+      <p:sp>
+        <p:nvSpPr>
+          <p:cNvPr id="6" name="TextBox 5"/>
+          <p:cNvSpPr txBox="1"/>
+          <p:nvPr/>
+        </p:nvSpPr>
+        <p:spPr>
+          <a:xfrm>
+            <a:off x="731520" y="2926080"/>
+            <a:ext cx="10515600" cy="457200"/>
+          </a:xfrm>
+          <a:prstGeom prst="rect">
+            <a:avLst/>
+          </a:prstGeom>
+          <a:noFill/>
+        </p:spPr>
+        <p:txBody>
+          <a:bodyPr wrap="square">
+            <a:spAutoFit/>
+          </a:bodyPr>
+          <a:lstStyle/>
+          <a:p>
+            <a:pPr algn="l">
+              <a:defRPr sz="1800" b="0" i="0">
+                <a:solidFill>
+                  <a:srgbClr val="FFFFFF"/>
+                </a:solidFill>
+                <a:latin typeface="Calibri"/>
+              </a:defRPr>
+            </a:pPr>
+            <a:r>
+              <a:t>•  Regresi linier berganda: R² = 0,990 — prediksi harga sangat akurat</a:t>
+            </a:r>
           </a:p>
         </p:txBody>
       </p:sp>
@@ -3653,30 +3633,30 @@
         </p:nvSpPr>
         <p:spPr>
           <a:xfrm>
-            <a:off x="640080" y="1920240"/>
-            <a:ext cx="3108960" cy="365760"/>
-          </a:xfrm>
-          <a:prstGeom prst="rect">
-            <a:avLst/>
-          </a:prstGeom>
-          <a:noFill/>
-        </p:spPr>
-        <p:txBody>
-          <a:bodyPr wrap="square">
-            <a:spAutoFit/>
-          </a:bodyPr>
-          <a:lstStyle/>
-          <a:p>
-            <a:pPr algn="l">
-              <a:defRPr sz="2000" b="1" i="0">
-                <a:solidFill>
-                  <a:srgbClr val="F39424"/>
-                </a:solidFill>
-                <a:latin typeface="Calibri"/>
-              </a:defRPr>
-            </a:pPr>
-            <a:r>
-              <a:t>Budget &amp; Promo</a:t>
+            <a:off x="731520" y="3566160"/>
+            <a:ext cx="10515600" cy="457200"/>
+          </a:xfrm>
+          <a:prstGeom prst="rect">
+            <a:avLst/>
+          </a:prstGeom>
+          <a:noFill/>
+        </p:spPr>
+        <p:txBody>
+          <a:bodyPr wrap="square">
+            <a:spAutoFit/>
+          </a:bodyPr>
+          <a:lstStyle/>
+          <a:p>
+            <a:pPr algn="l">
+              <a:defRPr sz="1800" b="0" i="0">
+                <a:solidFill>
+                  <a:srgbClr val="FFFFFF"/>
+                </a:solidFill>
+                <a:latin typeface="Calibri"/>
+              </a:defRPr>
+            </a:pPr>
+            <a:r>
+              <a:t>•  K-Means: 3 kluster strategis dengan Silhouette Score 0,63</a:t>
             </a:r>
           </a:p>
         </p:txBody>
@@ -3689,22 +3669,22 @@
         </p:nvSpPr>
         <p:spPr>
           <a:xfrm>
-            <a:off x="640080" y="2377440"/>
-            <a:ext cx="3108960" cy="274320"/>
-          </a:xfrm>
-          <a:prstGeom prst="rect">
-            <a:avLst/>
-          </a:prstGeom>
-          <a:noFill/>
-        </p:spPr>
-        <p:txBody>
-          <a:bodyPr wrap="square">
-            <a:spAutoFit/>
-          </a:bodyPr>
-          <a:lstStyle/>
-          <a:p>
-            <a:pPr algn="l">
-              <a:defRPr sz="1400" b="0" i="0">
+            <a:off x="731520" y="4206240"/>
+            <a:ext cx="10515600" cy="457200"/>
+          </a:xfrm>
+          <a:prstGeom prst="rect">
+            <a:avLst/>
+          </a:prstGeom>
+          <a:noFill/>
+        </p:spPr>
+        <p:txBody>
+          <a:bodyPr wrap="square">
+            <a:spAutoFit/>
+          </a:bodyPr>
+          <a:lstStyle/>
+          <a:p>
+            <a:pPr algn="l">
+              <a:defRPr sz="1800" b="0" i="0">
                 <a:solidFill>
                   <a:srgbClr val="FFFFFF"/>
                 </a:solidFill>
@@ -3712,647 +3692,7 @@
               </a:defRPr>
             </a:pPr>
             <a:r>
-              <a:t>197 item (14,9%)</a:t>
-            </a:r>
-          </a:p>
-        </p:txBody>
-      </p:sp>
-      <p:sp>
-        <p:nvSpPr>
-          <p:cNvPr id="9" name="TextBox 8"/>
-          <p:cNvSpPr txBox="1"/>
-          <p:nvPr/>
-        </p:nvSpPr>
-        <p:spPr>
-          <a:xfrm>
-            <a:off x="640080" y="2743200"/>
-            <a:ext cx="3108960" cy="274320"/>
-          </a:xfrm>
-          <a:prstGeom prst="rect">
-            <a:avLst/>
-          </a:prstGeom>
-          <a:noFill/>
-        </p:spPr>
-        <p:txBody>
-          <a:bodyPr wrap="square">
-            <a:spAutoFit/>
-          </a:bodyPr>
-          <a:lstStyle/>
-          <a:p>
-            <a:pPr algn="l">
-              <a:defRPr sz="1400" b="1" i="0">
-                <a:solidFill>
-                  <a:srgbClr val="FFFFFF"/>
-                </a:solidFill>
-                <a:latin typeface="Calibri"/>
-              </a:defRPr>
-            </a:pPr>
-            <a:r>
-              <a:t>Avg: Rp 196.722</a:t>
-            </a:r>
-          </a:p>
-        </p:txBody>
-      </p:sp>
-      <p:sp>
-        <p:nvSpPr>
-          <p:cNvPr id="10" name="TextBox 9"/>
-          <p:cNvSpPr txBox="1"/>
-          <p:nvPr/>
-        </p:nvSpPr>
-        <p:spPr>
-          <a:xfrm>
-            <a:off x="640080" y="3108960"/>
-            <a:ext cx="3108960" cy="274320"/>
-          </a:xfrm>
-          <a:prstGeom prst="rect">
-            <a:avLst/>
-          </a:prstGeom>
-          <a:noFill/>
-        </p:spPr>
-        <p:txBody>
-          <a:bodyPr wrap="square">
-            <a:spAutoFit/>
-          </a:bodyPr>
-          <a:lstStyle/>
-          <a:p>
-            <a:pPr algn="l">
-              <a:defRPr sz="1400" b="0" i="0">
-                <a:solidFill>
-                  <a:srgbClr val="CCCCCC"/>
-                </a:solidFill>
-                <a:latin typeface="Calibri"/>
-              </a:defRPr>
-            </a:pPr>
-            <a:r>
-              <a:t>Diskon: 44,3%</a:t>
-            </a:r>
-          </a:p>
-        </p:txBody>
-      </p:sp>
-      <p:sp>
-        <p:nvSpPr>
-          <p:cNvPr id="11" name="TextBox 10"/>
-          <p:cNvSpPr txBox="1"/>
-          <p:nvPr/>
-        </p:nvSpPr>
-        <p:spPr>
-          <a:xfrm>
-            <a:off x="640080" y="3657600"/>
-            <a:ext cx="3108960" cy="1371600"/>
-          </a:xfrm>
-          <a:prstGeom prst="rect">
-            <a:avLst/>
-          </a:prstGeom>
-          <a:noFill/>
-        </p:spPr>
-        <p:txBody>
-          <a:bodyPr wrap="square">
-            <a:spAutoFit/>
-          </a:bodyPr>
-          <a:lstStyle/>
-          <a:p>
-            <a:pPr algn="l">
-              <a:defRPr sz="1300" b="0" i="0">
-                <a:solidFill>
-                  <a:srgbClr val="CCCCCC"/>
-                </a:solidFill>
-                <a:latin typeface="Calibri"/>
-              </a:defRPr>
-            </a:pPr>
-            <a:r>
-              <a:t>Buku populer dalam diskon agresif, termasuk anak-anak dan komik</a:t>
-            </a:r>
-          </a:p>
-        </p:txBody>
-      </p:sp>
-      <p:sp>
-        <p:nvSpPr>
-          <p:cNvPr id="12" name="Rectangle 11"/>
-          <p:cNvSpPr/>
-          <p:nvPr/>
-        </p:nvSpPr>
-        <p:spPr>
-          <a:xfrm>
-            <a:off x="4297680" y="1645920"/>
-            <a:ext cx="3474720" cy="4114800"/>
-          </a:xfrm>
-          <a:prstGeom prst="rect">
-            <a:avLst/>
-          </a:prstGeom>
-          <a:solidFill>
-            <a:srgbClr val="22223A"/>
-          </a:solidFill>
-          <a:ln>
-            <a:noFill/>
-          </a:ln>
-        </p:spPr>
-        <p:style>
-          <a:lnRef idx="1">
-            <a:schemeClr val="accent1"/>
-          </a:lnRef>
-          <a:fillRef idx="3">
-            <a:schemeClr val="accent1"/>
-          </a:fillRef>
-          <a:effectRef idx="2">
-            <a:schemeClr val="accent1"/>
-          </a:effectRef>
-          <a:fontRef idx="minor">
-            <a:schemeClr val="lt1"/>
-          </a:fontRef>
-        </p:style>
-        <p:txBody>
-          <a:bodyPr rtlCol="0" anchor="ctr"/>
-          <a:lstStyle/>
-          <a:p>
-            <a:pPr algn="ctr"/>
-          </a:p>
-        </p:txBody>
-      </p:sp>
-      <p:sp>
-        <p:nvSpPr>
-          <p:cNvPr id="13" name="Rectangle 12"/>
-          <p:cNvSpPr/>
-          <p:nvPr/>
-        </p:nvSpPr>
-        <p:spPr>
-          <a:xfrm>
-            <a:off x="4297680" y="1645920"/>
-            <a:ext cx="3474720" cy="73152"/>
-          </a:xfrm>
-          <a:prstGeom prst="rect">
-            <a:avLst/>
-          </a:prstGeom>
-          <a:solidFill>
-            <a:srgbClr val="0096C7"/>
-          </a:solidFill>
-          <a:ln>
-            <a:noFill/>
-          </a:ln>
-        </p:spPr>
-        <p:style>
-          <a:lnRef idx="1">
-            <a:schemeClr val="accent1"/>
-          </a:lnRef>
-          <a:fillRef idx="3">
-            <a:schemeClr val="accent1"/>
-          </a:fillRef>
-          <a:effectRef idx="2">
-            <a:schemeClr val="accent1"/>
-          </a:effectRef>
-          <a:fontRef idx="minor">
-            <a:schemeClr val="lt1"/>
-          </a:fontRef>
-        </p:style>
-        <p:txBody>
-          <a:bodyPr rtlCol="0" anchor="ctr"/>
-          <a:lstStyle/>
-          <a:p>
-            <a:pPr algn="ctr"/>
-          </a:p>
-        </p:txBody>
-      </p:sp>
-      <p:sp>
-        <p:nvSpPr>
-          <p:cNvPr id="14" name="TextBox 13"/>
-          <p:cNvSpPr txBox="1"/>
-          <p:nvPr/>
-        </p:nvSpPr>
-        <p:spPr>
-          <a:xfrm>
-            <a:off x="4480560" y="1920240"/>
-            <a:ext cx="3108960" cy="365760"/>
-          </a:xfrm>
-          <a:prstGeom prst="rect">
-            <a:avLst/>
-          </a:prstGeom>
-          <a:noFill/>
-        </p:spPr>
-        <p:txBody>
-          <a:bodyPr wrap="square">
-            <a:spAutoFit/>
-          </a:bodyPr>
-          <a:lstStyle/>
-          <a:p>
-            <a:pPr algn="l">
-              <a:defRPr sz="2000" b="1" i="0">
-                <a:solidFill>
-                  <a:srgbClr val="0096C7"/>
-                </a:solidFill>
-                <a:latin typeface="Calibri"/>
-              </a:defRPr>
-            </a:pPr>
-            <a:r>
-              <a:t>Standard Regular</a:t>
-            </a:r>
-          </a:p>
-        </p:txBody>
-      </p:sp>
-      <p:sp>
-        <p:nvSpPr>
-          <p:cNvPr id="15" name="TextBox 14"/>
-          <p:cNvSpPr txBox="1"/>
-          <p:nvPr/>
-        </p:nvSpPr>
-        <p:spPr>
-          <a:xfrm>
-            <a:off x="4480560" y="2377440"/>
-            <a:ext cx="3108960" cy="274320"/>
-          </a:xfrm>
-          <a:prstGeom prst="rect">
-            <a:avLst/>
-          </a:prstGeom>
-          <a:noFill/>
-        </p:spPr>
-        <p:txBody>
-          <a:bodyPr wrap="square">
-            <a:spAutoFit/>
-          </a:bodyPr>
-          <a:lstStyle/>
-          <a:p>
-            <a:pPr algn="l">
-              <a:defRPr sz="1400" b="0" i="0">
-                <a:solidFill>
-                  <a:srgbClr val="FFFFFF"/>
-                </a:solidFill>
-                <a:latin typeface="Calibri"/>
-              </a:defRPr>
-            </a:pPr>
-            <a:r>
-              <a:t>1.013 item (76,6%)</a:t>
-            </a:r>
-          </a:p>
-        </p:txBody>
-      </p:sp>
-      <p:sp>
-        <p:nvSpPr>
-          <p:cNvPr id="16" name="TextBox 15"/>
-          <p:cNvSpPr txBox="1"/>
-          <p:nvPr/>
-        </p:nvSpPr>
-        <p:spPr>
-          <a:xfrm>
-            <a:off x="4480560" y="2743200"/>
-            <a:ext cx="3108960" cy="274320"/>
-          </a:xfrm>
-          <a:prstGeom prst="rect">
-            <a:avLst/>
-          </a:prstGeom>
-          <a:noFill/>
-        </p:spPr>
-        <p:txBody>
-          <a:bodyPr wrap="square">
-            <a:spAutoFit/>
-          </a:bodyPr>
-          <a:lstStyle/>
-          <a:p>
-            <a:pPr algn="l">
-              <a:defRPr sz="1400" b="1" i="0">
-                <a:solidFill>
-                  <a:srgbClr val="FFFFFF"/>
-                </a:solidFill>
-                <a:latin typeface="Calibri"/>
-              </a:defRPr>
-            </a:pPr>
-            <a:r>
-              <a:t>Avg: Rp 336.256</a:t>
-            </a:r>
-          </a:p>
-        </p:txBody>
-      </p:sp>
-      <p:sp>
-        <p:nvSpPr>
-          <p:cNvPr id="17" name="TextBox 16"/>
-          <p:cNvSpPr txBox="1"/>
-          <p:nvPr/>
-        </p:nvSpPr>
-        <p:spPr>
-          <a:xfrm>
-            <a:off x="4480560" y="3108960"/>
-            <a:ext cx="3108960" cy="274320"/>
-          </a:xfrm>
-          <a:prstGeom prst="rect">
-            <a:avLst/>
-          </a:prstGeom>
-          <a:noFill/>
-        </p:spPr>
-        <p:txBody>
-          <a:bodyPr wrap="square">
-            <a:spAutoFit/>
-          </a:bodyPr>
-          <a:lstStyle/>
-          <a:p>
-            <a:pPr algn="l">
-              <a:defRPr sz="1400" b="0" i="0">
-                <a:solidFill>
-                  <a:srgbClr val="CCCCCC"/>
-                </a:solidFill>
-                <a:latin typeface="Calibri"/>
-              </a:defRPr>
-            </a:pPr>
-            <a:r>
-              <a:t>Diskon: 1,5%</a:t>
-            </a:r>
-          </a:p>
-        </p:txBody>
-      </p:sp>
-      <p:sp>
-        <p:nvSpPr>
-          <p:cNvPr id="18" name="TextBox 17"/>
-          <p:cNvSpPr txBox="1"/>
-          <p:nvPr/>
-        </p:nvSpPr>
-        <p:spPr>
-          <a:xfrm>
-            <a:off x="4480560" y="3657600"/>
-            <a:ext cx="3108960" cy="1371600"/>
-          </a:xfrm>
-          <a:prstGeom prst="rect">
-            <a:avLst/>
-          </a:prstGeom>
-          <a:noFill/>
-        </p:spPr>
-        <p:txBody>
-          <a:bodyPr wrap="square">
-            <a:spAutoFit/>
-          </a:bodyPr>
-          <a:lstStyle/>
-          <a:p>
-            <a:pPr algn="l">
-              <a:defRPr sz="1300" b="0" i="0">
-                <a:solidFill>
-                  <a:srgbClr val="CCCCCC"/>
-                </a:solidFill>
-                <a:latin typeface="Calibri"/>
-              </a:defRPr>
-            </a:pPr>
-            <a:r>
-              <a:t>Tulang punggung pendapatan — novel, bisnis, referensi reguler</a:t>
-            </a:r>
-          </a:p>
-        </p:txBody>
-      </p:sp>
-      <p:sp>
-        <p:nvSpPr>
-          <p:cNvPr id="19" name="Rectangle 18"/>
-          <p:cNvSpPr/>
-          <p:nvPr/>
-        </p:nvSpPr>
-        <p:spPr>
-          <a:xfrm>
-            <a:off x="8138160" y="1645920"/>
-            <a:ext cx="3474720" cy="4114800"/>
-          </a:xfrm>
-          <a:prstGeom prst="rect">
-            <a:avLst/>
-          </a:prstGeom>
-          <a:solidFill>
-            <a:srgbClr val="22223A"/>
-          </a:solidFill>
-          <a:ln>
-            <a:noFill/>
-          </a:ln>
-        </p:spPr>
-        <p:style>
-          <a:lnRef idx="1">
-            <a:schemeClr val="accent1"/>
-          </a:lnRef>
-          <a:fillRef idx="3">
-            <a:schemeClr val="accent1"/>
-          </a:fillRef>
-          <a:effectRef idx="2">
-            <a:schemeClr val="accent1"/>
-          </a:effectRef>
-          <a:fontRef idx="minor">
-            <a:schemeClr val="lt1"/>
-          </a:fontRef>
-        </p:style>
-        <p:txBody>
-          <a:bodyPr rtlCol="0" anchor="ctr"/>
-          <a:lstStyle/>
-          <a:p>
-            <a:pPr algn="ctr"/>
-          </a:p>
-        </p:txBody>
-      </p:sp>
-      <p:sp>
-        <p:nvSpPr>
-          <p:cNvPr id="20" name="Rectangle 19"/>
-          <p:cNvSpPr/>
-          <p:nvPr/>
-        </p:nvSpPr>
-        <p:spPr>
-          <a:xfrm>
-            <a:off x="8138160" y="1645920"/>
-            <a:ext cx="3474720" cy="73152"/>
-          </a:xfrm>
-          <a:prstGeom prst="rect">
-            <a:avLst/>
-          </a:prstGeom>
-          <a:solidFill>
-            <a:srgbClr val="FFD600"/>
-          </a:solidFill>
-          <a:ln>
-            <a:noFill/>
-          </a:ln>
-        </p:spPr>
-        <p:style>
-          <a:lnRef idx="1">
-            <a:schemeClr val="accent1"/>
-          </a:lnRef>
-          <a:fillRef idx="3">
-            <a:schemeClr val="accent1"/>
-          </a:fillRef>
-          <a:effectRef idx="2">
-            <a:schemeClr val="accent1"/>
-          </a:effectRef>
-          <a:fontRef idx="minor">
-            <a:schemeClr val="lt1"/>
-          </a:fontRef>
-        </p:style>
-        <p:txBody>
-          <a:bodyPr rtlCol="0" anchor="ctr"/>
-          <a:lstStyle/>
-          <a:p>
-            <a:pPr algn="ctr"/>
-          </a:p>
-        </p:txBody>
-      </p:sp>
-      <p:sp>
-        <p:nvSpPr>
-          <p:cNvPr id="21" name="TextBox 20"/>
-          <p:cNvSpPr txBox="1"/>
-          <p:nvPr/>
-        </p:nvSpPr>
-        <p:spPr>
-          <a:xfrm>
-            <a:off x="8321040" y="1920240"/>
-            <a:ext cx="3108960" cy="365760"/>
-          </a:xfrm>
-          <a:prstGeom prst="rect">
-            <a:avLst/>
-          </a:prstGeom>
-          <a:noFill/>
-        </p:spPr>
-        <p:txBody>
-          <a:bodyPr wrap="square">
-            <a:spAutoFit/>
-          </a:bodyPr>
-          <a:lstStyle/>
-          <a:p>
-            <a:pPr algn="l">
-              <a:defRPr sz="2000" b="1" i="0">
-                <a:solidFill>
-                  <a:srgbClr val="FFD600"/>
-                </a:solidFill>
-                <a:latin typeface="Calibri"/>
-              </a:defRPr>
-            </a:pPr>
-            <a:r>
-              <a:t>Premium Collector</a:t>
-            </a:r>
-          </a:p>
-        </p:txBody>
-      </p:sp>
-      <p:sp>
-        <p:nvSpPr>
-          <p:cNvPr id="22" name="TextBox 21"/>
-          <p:cNvSpPr txBox="1"/>
-          <p:nvPr/>
-        </p:nvSpPr>
-        <p:spPr>
-          <a:xfrm>
-            <a:off x="8321040" y="2377440"/>
-            <a:ext cx="3108960" cy="274320"/>
-          </a:xfrm>
-          <a:prstGeom prst="rect">
-            <a:avLst/>
-          </a:prstGeom>
-          <a:noFill/>
-        </p:spPr>
-        <p:txBody>
-          <a:bodyPr wrap="square">
-            <a:spAutoFit/>
-          </a:bodyPr>
-          <a:lstStyle/>
-          <a:p>
-            <a:pPr algn="l">
-              <a:defRPr sz="1400" b="0" i="0">
-                <a:solidFill>
-                  <a:srgbClr val="FFFFFF"/>
-                </a:solidFill>
-                <a:latin typeface="Calibri"/>
-              </a:defRPr>
-            </a:pPr>
-            <a:r>
-              <a:t>112 item (8,5%)</a:t>
-            </a:r>
-          </a:p>
-        </p:txBody>
-      </p:sp>
-      <p:sp>
-        <p:nvSpPr>
-          <p:cNvPr id="23" name="TextBox 22"/>
-          <p:cNvSpPr txBox="1"/>
-          <p:nvPr/>
-        </p:nvSpPr>
-        <p:spPr>
-          <a:xfrm>
-            <a:off x="8321040" y="2743200"/>
-            <a:ext cx="3108960" cy="274320"/>
-          </a:xfrm>
-          <a:prstGeom prst="rect">
-            <a:avLst/>
-          </a:prstGeom>
-          <a:noFill/>
-        </p:spPr>
-        <p:txBody>
-          <a:bodyPr wrap="square">
-            <a:spAutoFit/>
-          </a:bodyPr>
-          <a:lstStyle/>
-          <a:p>
-            <a:pPr algn="l">
-              <a:defRPr sz="1400" b="1" i="0">
-                <a:solidFill>
-                  <a:srgbClr val="FFFFFF"/>
-                </a:solidFill>
-                <a:latin typeface="Calibri"/>
-              </a:defRPr>
-            </a:pPr>
-            <a:r>
-              <a:t>Avg: Rp 1.058.080</a:t>
-            </a:r>
-          </a:p>
-        </p:txBody>
-      </p:sp>
-      <p:sp>
-        <p:nvSpPr>
-          <p:cNvPr id="24" name="TextBox 23"/>
-          <p:cNvSpPr txBox="1"/>
-          <p:nvPr/>
-        </p:nvSpPr>
-        <p:spPr>
-          <a:xfrm>
-            <a:off x="8321040" y="3108960"/>
-            <a:ext cx="3108960" cy="274320"/>
-          </a:xfrm>
-          <a:prstGeom prst="rect">
-            <a:avLst/>
-          </a:prstGeom>
-          <a:noFill/>
-        </p:spPr>
-        <p:txBody>
-          <a:bodyPr wrap="square">
-            <a:spAutoFit/>
-          </a:bodyPr>
-          <a:lstStyle/>
-          <a:p>
-            <a:pPr algn="l">
-              <a:defRPr sz="1400" b="0" i="0">
-                <a:solidFill>
-                  <a:srgbClr val="CCCCCC"/>
-                </a:solidFill>
-                <a:latin typeface="Calibri"/>
-              </a:defRPr>
-            </a:pPr>
-            <a:r>
-              <a:t>Diskon: 0,4%</a:t>
-            </a:r>
-          </a:p>
-        </p:txBody>
-      </p:sp>
-      <p:sp>
-        <p:nvSpPr>
-          <p:cNvPr id="25" name="TextBox 24"/>
-          <p:cNvSpPr txBox="1"/>
-          <p:nvPr/>
-        </p:nvSpPr>
-        <p:spPr>
-          <a:xfrm>
-            <a:off x="8321040" y="3657600"/>
-            <a:ext cx="3108960" cy="1371600"/>
-          </a:xfrm>
-          <a:prstGeom prst="rect">
-            <a:avLst/>
-          </a:prstGeom>
-          <a:noFill/>
-        </p:spPr>
-        <p:txBody>
-          <a:bodyPr wrap="square">
-            <a:spAutoFit/>
-          </a:bodyPr>
-          <a:lstStyle/>
-          <a:p>
-            <a:pPr algn="l">
-              <a:defRPr sz="1300" b="0" i="0">
-                <a:solidFill>
-                  <a:srgbClr val="CCCCCC"/>
-                </a:solidFill>
-                <a:latin typeface="Calibri"/>
-              </a:defRPr>
-            </a:pPr>
-            <a:r>
-              <a:t>Buku referensi premium, ensiklopedia, edisi kolektor langka</a:t>
+              <a:t>•  Hasil analisis siap digunakan untuk optimasi strategi penjualan e-commerce</a:t>
             </a:r>
           </a:p>
         </p:txBody>
@@ -4366,1908 +3706,6 @@
 </file>
 
 <file path=ppt/slides/slide11.xml><?xml version="1.0" encoding="utf-8"?>
-<p:sld xmlns:a="http://schemas.openxmlformats.org/drawingml/2006/main" xmlns:p="http://schemas.openxmlformats.org/presentationml/2006/main" xmlns:r="http://schemas.openxmlformats.org/officeDocument/2006/relationships">
-  <p:cSld>
-    <p:bg>
-      <p:bgPr>
-        <a:solidFill>
-          <a:srgbClr val="1B1B2F"/>
-        </a:solidFill>
-        <a:effectLst/>
-      </p:bgPr>
-    </p:bg>
-    <p:spTree>
-      <p:nvGrpSpPr>
-        <p:cNvPr id="1" name=""/>
-        <p:cNvGrpSpPr/>
-        <p:nvPr/>
-      </p:nvGrpSpPr>
-      <p:grpSpPr/>
-      <p:sp>
-        <p:nvSpPr>
-          <p:cNvPr id="2" name="TextBox 1"/>
-          <p:cNvSpPr txBox="1"/>
-          <p:nvPr/>
-        </p:nvSpPr>
-        <p:spPr>
-          <a:xfrm>
-            <a:off x="731520" y="365760"/>
-            <a:ext cx="10058400" cy="731520"/>
-          </a:xfrm>
-          <a:prstGeom prst="rect">
-            <a:avLst/>
-          </a:prstGeom>
-          <a:noFill/>
-        </p:spPr>
-        <p:txBody>
-          <a:bodyPr wrap="square">
-            <a:spAutoFit/>
-          </a:bodyPr>
-          <a:lstStyle/>
-          <a:p>
-            <a:pPr algn="l">
-              <a:defRPr sz="2800" b="1" i="0">
-                <a:solidFill>
-                  <a:srgbClr val="0096C7"/>
-                </a:solidFill>
-                <a:latin typeface="Calibri"/>
-              </a:defRPr>
-            </a:pPr>
-            <a:r>
-              <a:t>Klasifikasi: Decision Tree &amp; Random Forest</a:t>
-            </a:r>
-          </a:p>
-        </p:txBody>
-      </p:sp>
-      <p:sp>
-        <p:nvSpPr>
-          <p:cNvPr id="3" name="Rectangle 2"/>
-          <p:cNvSpPr/>
-          <p:nvPr/>
-        </p:nvSpPr>
-        <p:spPr>
-          <a:xfrm>
-            <a:off x="731520" y="1417320"/>
-            <a:ext cx="1371600" cy="54864"/>
-          </a:xfrm>
-          <a:prstGeom prst="rect">
-            <a:avLst/>
-          </a:prstGeom>
-          <a:solidFill>
-            <a:srgbClr val="0096C7"/>
-          </a:solidFill>
-          <a:ln>
-            <a:noFill/>
-          </a:ln>
-        </p:spPr>
-        <p:style>
-          <a:lnRef idx="1">
-            <a:schemeClr val="accent1"/>
-          </a:lnRef>
-          <a:fillRef idx="3">
-            <a:schemeClr val="accent1"/>
-          </a:fillRef>
-          <a:effectRef idx="2">
-            <a:schemeClr val="accent1"/>
-          </a:effectRef>
-          <a:fontRef idx="minor">
-            <a:schemeClr val="lt1"/>
-          </a:fontRef>
-        </p:style>
-        <p:txBody>
-          <a:bodyPr rtlCol="0" anchor="ctr"/>
-          <a:lstStyle/>
-          <a:p>
-            <a:pPr algn="ctr"/>
-          </a:p>
-        </p:txBody>
-      </p:sp>
-      <p:sp>
-        <p:nvSpPr>
-          <p:cNvPr id="4" name="TextBox 3"/>
-          <p:cNvSpPr txBox="1"/>
-          <p:nvPr/>
-        </p:nvSpPr>
-        <p:spPr>
-          <a:xfrm>
-            <a:off x="731520" y="1097280"/>
-            <a:ext cx="10058400" cy="457200"/>
-          </a:xfrm>
-          <a:prstGeom prst="rect">
-            <a:avLst/>
-          </a:prstGeom>
-          <a:noFill/>
-        </p:spPr>
-        <p:txBody>
-          <a:bodyPr wrap="square">
-            <a:spAutoFit/>
-          </a:bodyPr>
-          <a:lstStyle/>
-          <a:p>
-            <a:pPr algn="l">
-              <a:defRPr sz="1600" b="0" i="1">
-                <a:solidFill>
-                  <a:srgbClr val="CCCCCC"/>
-                </a:solidFill>
-                <a:latin typeface="Calibri"/>
-              </a:defRPr>
-            </a:pPr>
-            <a:r>
-              <a:t>Prediksi kelas harga produk</a:t>
-            </a:r>
-          </a:p>
-        </p:txBody>
-      </p:sp>
-      <p:pic>
-        <p:nvPicPr>
-          <p:cNvPr id="5" name="Picture 4" descr="klasifikasi_comparison.png"/>
-          <p:cNvPicPr>
-            <a:picLocks noChangeAspect="1"/>
-          </p:cNvPicPr>
-          <p:nvPr/>
-        </p:nvPicPr>
-        <p:blipFill>
-          <a:blip r:embed="rId2"/>
-          <a:stretch>
-            <a:fillRect/>
-          </a:stretch>
-        </p:blipFill>
-        <p:spPr>
-          <a:xfrm>
-            <a:off x="457200" y="1554480"/>
-            <a:ext cx="5303520" cy="1441195"/>
-          </a:xfrm>
-          <a:prstGeom prst="rect">
-            <a:avLst/>
-          </a:prstGeom>
-        </p:spPr>
-      </p:pic>
-      <p:sp>
-        <p:nvSpPr>
-          <p:cNvPr id="6" name="Rectangle 5"/>
-          <p:cNvSpPr/>
-          <p:nvPr/>
-        </p:nvSpPr>
-        <p:spPr>
-          <a:xfrm>
-            <a:off x="6217920" y="1645920"/>
-            <a:ext cx="2286000" cy="1097280"/>
-          </a:xfrm>
-          <a:prstGeom prst="rect">
-            <a:avLst/>
-          </a:prstGeom>
-          <a:solidFill>
-            <a:srgbClr val="22223A"/>
-          </a:solidFill>
-          <a:ln>
-            <a:noFill/>
-          </a:ln>
-        </p:spPr>
-        <p:style>
-          <a:lnRef idx="1">
-            <a:schemeClr val="accent1"/>
-          </a:lnRef>
-          <a:fillRef idx="3">
-            <a:schemeClr val="accent1"/>
-          </a:fillRef>
-          <a:effectRef idx="2">
-            <a:schemeClr val="accent1"/>
-          </a:effectRef>
-          <a:fontRef idx="minor">
-            <a:schemeClr val="lt1"/>
-          </a:fontRef>
-        </p:style>
-        <p:txBody>
-          <a:bodyPr rtlCol="0" anchor="ctr"/>
-          <a:lstStyle/>
-          <a:p>
-            <a:pPr algn="ctr"/>
-          </a:p>
-        </p:txBody>
-      </p:sp>
-      <p:sp>
-        <p:nvSpPr>
-          <p:cNvPr id="7" name="Rectangle 6"/>
-          <p:cNvSpPr/>
-          <p:nvPr/>
-        </p:nvSpPr>
-        <p:spPr>
-          <a:xfrm>
-            <a:off x="6217920" y="1645920"/>
-            <a:ext cx="2286000" cy="45720"/>
-          </a:xfrm>
-          <a:prstGeom prst="rect">
-            <a:avLst/>
-          </a:prstGeom>
-          <a:solidFill>
-            <a:srgbClr val="0096C7"/>
-          </a:solidFill>
-          <a:ln>
-            <a:noFill/>
-          </a:ln>
-        </p:spPr>
-        <p:style>
-          <a:lnRef idx="1">
-            <a:schemeClr val="accent1"/>
-          </a:lnRef>
-          <a:fillRef idx="3">
-            <a:schemeClr val="accent1"/>
-          </a:fillRef>
-          <a:effectRef idx="2">
-            <a:schemeClr val="accent1"/>
-          </a:effectRef>
-          <a:fontRef idx="minor">
-            <a:schemeClr val="lt1"/>
-          </a:fontRef>
-        </p:style>
-        <p:txBody>
-          <a:bodyPr rtlCol="0" anchor="ctr"/>
-          <a:lstStyle/>
-          <a:p>
-            <a:pPr algn="ctr"/>
-          </a:p>
-        </p:txBody>
-      </p:sp>
-      <p:sp>
-        <p:nvSpPr>
-          <p:cNvPr id="8" name="TextBox 7"/>
-          <p:cNvSpPr txBox="1"/>
-          <p:nvPr/>
-        </p:nvSpPr>
-        <p:spPr>
-          <a:xfrm>
-            <a:off x="6355080" y="1783080"/>
-            <a:ext cx="2011680" cy="365760"/>
-          </a:xfrm>
-          <a:prstGeom prst="rect">
-            <a:avLst/>
-          </a:prstGeom>
-          <a:noFill/>
-        </p:spPr>
-        <p:txBody>
-          <a:bodyPr wrap="square">
-            <a:spAutoFit/>
-          </a:bodyPr>
-          <a:lstStyle/>
-          <a:p>
-            <a:pPr algn="l">
-              <a:defRPr sz="1200" b="0" i="0">
-                <a:solidFill>
-                  <a:srgbClr val="CCCCCC"/>
-                </a:solidFill>
-                <a:latin typeface="Calibri"/>
-              </a:defRPr>
-            </a:pPr>
-            <a:r>
-              <a:t>Decision Tree</a:t>
-            </a:r>
-          </a:p>
-        </p:txBody>
-      </p:sp>
-      <p:sp>
-        <p:nvSpPr>
-          <p:cNvPr id="9" name="TextBox 8"/>
-          <p:cNvSpPr txBox="1"/>
-          <p:nvPr/>
-        </p:nvSpPr>
-        <p:spPr>
-          <a:xfrm>
-            <a:off x="6355080" y="2103120"/>
-            <a:ext cx="2011680" cy="548640"/>
-          </a:xfrm>
-          <a:prstGeom prst="rect">
-            <a:avLst/>
-          </a:prstGeom>
-          <a:noFill/>
-        </p:spPr>
-        <p:txBody>
-          <a:bodyPr wrap="square">
-            <a:spAutoFit/>
-          </a:bodyPr>
-          <a:lstStyle/>
-          <a:p>
-            <a:pPr algn="l">
-              <a:defRPr sz="2400" b="1" i="0">
-                <a:solidFill>
-                  <a:srgbClr val="FFFFFF"/>
-                </a:solidFill>
-                <a:latin typeface="Calibri"/>
-              </a:defRPr>
-            </a:pPr>
-            <a:r>
-              <a:t>98,1%</a:t>
-            </a:r>
-          </a:p>
-        </p:txBody>
-      </p:sp>
-      <p:sp>
-        <p:nvSpPr>
-          <p:cNvPr id="10" name="Rectangle 9"/>
-          <p:cNvSpPr/>
-          <p:nvPr/>
-        </p:nvSpPr>
-        <p:spPr>
-          <a:xfrm>
-            <a:off x="8778240" y="1645920"/>
-            <a:ext cx="2286000" cy="1097280"/>
-          </a:xfrm>
-          <a:prstGeom prst="rect">
-            <a:avLst/>
-          </a:prstGeom>
-          <a:solidFill>
-            <a:srgbClr val="22223A"/>
-          </a:solidFill>
-          <a:ln>
-            <a:noFill/>
-          </a:ln>
-        </p:spPr>
-        <p:style>
-          <a:lnRef idx="1">
-            <a:schemeClr val="accent1"/>
-          </a:lnRef>
-          <a:fillRef idx="3">
-            <a:schemeClr val="accent1"/>
-          </a:fillRef>
-          <a:effectRef idx="2">
-            <a:schemeClr val="accent1"/>
-          </a:effectRef>
-          <a:fontRef idx="minor">
-            <a:schemeClr val="lt1"/>
-          </a:fontRef>
-        </p:style>
-        <p:txBody>
-          <a:bodyPr rtlCol="0" anchor="ctr"/>
-          <a:lstStyle/>
-          <a:p>
-            <a:pPr algn="ctr"/>
-          </a:p>
-        </p:txBody>
-      </p:sp>
-      <p:sp>
-        <p:nvSpPr>
-          <p:cNvPr id="11" name="Rectangle 10"/>
-          <p:cNvSpPr/>
-          <p:nvPr/>
-        </p:nvSpPr>
-        <p:spPr>
-          <a:xfrm>
-            <a:off x="8778240" y="1645920"/>
-            <a:ext cx="2286000" cy="45720"/>
-          </a:xfrm>
-          <a:prstGeom prst="rect">
-            <a:avLst/>
-          </a:prstGeom>
-          <a:solidFill>
-            <a:srgbClr val="2ECC71"/>
-          </a:solidFill>
-          <a:ln>
-            <a:noFill/>
-          </a:ln>
-        </p:spPr>
-        <p:style>
-          <a:lnRef idx="1">
-            <a:schemeClr val="accent1"/>
-          </a:lnRef>
-          <a:fillRef idx="3">
-            <a:schemeClr val="accent1"/>
-          </a:fillRef>
-          <a:effectRef idx="2">
-            <a:schemeClr val="accent1"/>
-          </a:effectRef>
-          <a:fontRef idx="minor">
-            <a:schemeClr val="lt1"/>
-          </a:fontRef>
-        </p:style>
-        <p:txBody>
-          <a:bodyPr rtlCol="0" anchor="ctr"/>
-          <a:lstStyle/>
-          <a:p>
-            <a:pPr algn="ctr"/>
-          </a:p>
-        </p:txBody>
-      </p:sp>
-      <p:sp>
-        <p:nvSpPr>
-          <p:cNvPr id="12" name="TextBox 11"/>
-          <p:cNvSpPr txBox="1"/>
-          <p:nvPr/>
-        </p:nvSpPr>
-        <p:spPr>
-          <a:xfrm>
-            <a:off x="8915400" y="1783080"/>
-            <a:ext cx="2011680" cy="365760"/>
-          </a:xfrm>
-          <a:prstGeom prst="rect">
-            <a:avLst/>
-          </a:prstGeom>
-          <a:noFill/>
-        </p:spPr>
-        <p:txBody>
-          <a:bodyPr wrap="square">
-            <a:spAutoFit/>
-          </a:bodyPr>
-          <a:lstStyle/>
-          <a:p>
-            <a:pPr algn="l">
-              <a:defRPr sz="1200" b="0" i="0">
-                <a:solidFill>
-                  <a:srgbClr val="CCCCCC"/>
-                </a:solidFill>
-                <a:latin typeface="Calibri"/>
-              </a:defRPr>
-            </a:pPr>
-            <a:r>
-              <a:t>Random Forest</a:t>
-            </a:r>
-          </a:p>
-        </p:txBody>
-      </p:sp>
-      <p:sp>
-        <p:nvSpPr>
-          <p:cNvPr id="13" name="TextBox 12"/>
-          <p:cNvSpPr txBox="1"/>
-          <p:nvPr/>
-        </p:nvSpPr>
-        <p:spPr>
-          <a:xfrm>
-            <a:off x="8915400" y="2103120"/>
-            <a:ext cx="2011680" cy="548640"/>
-          </a:xfrm>
-          <a:prstGeom prst="rect">
-            <a:avLst/>
-          </a:prstGeom>
-          <a:noFill/>
-        </p:spPr>
-        <p:txBody>
-          <a:bodyPr wrap="square">
-            <a:spAutoFit/>
-          </a:bodyPr>
-          <a:lstStyle/>
-          <a:p>
-            <a:pPr algn="l">
-              <a:defRPr sz="2400" b="1" i="0">
-                <a:solidFill>
-                  <a:srgbClr val="FFFFFF"/>
-                </a:solidFill>
-                <a:latin typeface="Calibri"/>
-              </a:defRPr>
-            </a:pPr>
-            <a:r>
-              <a:t>98,5%</a:t>
-            </a:r>
-          </a:p>
-        </p:txBody>
-      </p:sp>
-      <p:sp>
-        <p:nvSpPr>
-          <p:cNvPr id="14" name="TextBox 13"/>
-          <p:cNvSpPr txBox="1"/>
-          <p:nvPr/>
-        </p:nvSpPr>
-        <p:spPr>
-          <a:xfrm>
-            <a:off x="6217920" y="3017520"/>
-            <a:ext cx="4846320" cy="365760"/>
-          </a:xfrm>
-          <a:prstGeom prst="rect">
-            <a:avLst/>
-          </a:prstGeom>
-          <a:noFill/>
-        </p:spPr>
-        <p:txBody>
-          <a:bodyPr wrap="square">
-            <a:spAutoFit/>
-          </a:bodyPr>
-          <a:lstStyle/>
-          <a:p>
-            <a:pPr algn="l">
-              <a:defRPr sz="1600" b="1" i="0">
-                <a:solidFill>
-                  <a:srgbClr val="0096C7"/>
-                </a:solidFill>
-                <a:latin typeface="Calibri"/>
-              </a:defRPr>
-            </a:pPr>
-            <a:r>
-              <a:t>Feature Importance:</a:t>
-            </a:r>
-          </a:p>
-        </p:txBody>
-      </p:sp>
-      <p:sp>
-        <p:nvSpPr>
-          <p:cNvPr id="15" name="TextBox 14"/>
-          <p:cNvSpPr txBox="1"/>
-          <p:nvPr/>
-        </p:nvSpPr>
-        <p:spPr>
-          <a:xfrm>
-            <a:off x="6217920" y="3566160"/>
-            <a:ext cx="2286000" cy="274320"/>
-          </a:xfrm>
-          <a:prstGeom prst="rect">
-            <a:avLst/>
-          </a:prstGeom>
-          <a:noFill/>
-        </p:spPr>
-        <p:txBody>
-          <a:bodyPr wrap="square">
-            <a:spAutoFit/>
-          </a:bodyPr>
-          <a:lstStyle/>
-          <a:p>
-            <a:pPr algn="l">
-              <a:defRPr sz="1200" b="0" i="1">
-                <a:solidFill>
-                  <a:srgbClr val="FFFFFF"/>
-                </a:solidFill>
-                <a:latin typeface="Calibri"/>
-              </a:defRPr>
-            </a:pPr>
-            <a:r>
-              <a:t>original_price_idr</a:t>
-            </a:r>
-          </a:p>
-        </p:txBody>
-      </p:sp>
-      <p:sp>
-        <p:nvSpPr>
-          <p:cNvPr id="16" name="TextBox 15"/>
-          <p:cNvSpPr txBox="1"/>
-          <p:nvPr/>
-        </p:nvSpPr>
-        <p:spPr>
-          <a:xfrm>
-            <a:off x="10515600" y="3566160"/>
-            <a:ext cx="731520" cy="274320"/>
-          </a:xfrm>
-          <a:prstGeom prst="rect">
-            <a:avLst/>
-          </a:prstGeom>
-          <a:noFill/>
-        </p:spPr>
-        <p:txBody>
-          <a:bodyPr wrap="square">
-            <a:spAutoFit/>
-          </a:bodyPr>
-          <a:lstStyle/>
-          <a:p>
-            <a:pPr algn="l">
-              <a:defRPr sz="1200" b="1" i="0">
-                <a:solidFill>
-                  <a:srgbClr val="FFFFFF"/>
-                </a:solidFill>
-                <a:latin typeface="Calibri"/>
-              </a:defRPr>
-            </a:pPr>
-            <a:r>
-              <a:t>74,8%</a:t>
-            </a:r>
-          </a:p>
-        </p:txBody>
-      </p:sp>
-      <p:sp>
-        <p:nvSpPr>
-          <p:cNvPr id="17" name="Rectangle 16"/>
-          <p:cNvSpPr/>
-          <p:nvPr/>
-        </p:nvSpPr>
-        <p:spPr>
-          <a:xfrm>
-            <a:off x="6217920" y="3840480"/>
-            <a:ext cx="4114800" cy="137160"/>
-          </a:xfrm>
-          <a:prstGeom prst="rect">
-            <a:avLst/>
-          </a:prstGeom>
-          <a:solidFill>
-            <a:srgbClr val="0096C7"/>
-          </a:solidFill>
-          <a:ln>
-            <a:noFill/>
-          </a:ln>
-        </p:spPr>
-        <p:style>
-          <a:lnRef idx="1">
-            <a:schemeClr val="accent1"/>
-          </a:lnRef>
-          <a:fillRef idx="3">
-            <a:schemeClr val="accent1"/>
-          </a:fillRef>
-          <a:effectRef idx="2">
-            <a:schemeClr val="accent1"/>
-          </a:effectRef>
-          <a:fontRef idx="minor">
-            <a:schemeClr val="lt1"/>
-          </a:fontRef>
-        </p:style>
-        <p:txBody>
-          <a:bodyPr rtlCol="0" anchor="ctr"/>
-          <a:lstStyle/>
-          <a:p>
-            <a:pPr algn="ctr"/>
-          </a:p>
-        </p:txBody>
-      </p:sp>
-      <p:sp>
-        <p:nvSpPr>
-          <p:cNvPr id="18" name="TextBox 17"/>
-          <p:cNvSpPr txBox="1"/>
-          <p:nvPr/>
-        </p:nvSpPr>
-        <p:spPr>
-          <a:xfrm>
-            <a:off x="6217920" y="4206240"/>
-            <a:ext cx="2286000" cy="274320"/>
-          </a:xfrm>
-          <a:prstGeom prst="rect">
-            <a:avLst/>
-          </a:prstGeom>
-          <a:noFill/>
-        </p:spPr>
-        <p:txBody>
-          <a:bodyPr wrap="square">
-            <a:spAutoFit/>
-          </a:bodyPr>
-          <a:lstStyle/>
-          <a:p>
-            <a:pPr algn="l">
-              <a:defRPr sz="1200" b="0" i="1">
-                <a:solidFill>
-                  <a:srgbClr val="FFFFFF"/>
-                </a:solidFill>
-                <a:latin typeface="Calibri"/>
-              </a:defRPr>
-            </a:pPr>
-            <a:r>
-              <a:t>discount_percent</a:t>
-            </a:r>
-          </a:p>
-        </p:txBody>
-      </p:sp>
-      <p:sp>
-        <p:nvSpPr>
-          <p:cNvPr id="19" name="TextBox 18"/>
-          <p:cNvSpPr txBox="1"/>
-          <p:nvPr/>
-        </p:nvSpPr>
-        <p:spPr>
-          <a:xfrm>
-            <a:off x="10515600" y="4206240"/>
-            <a:ext cx="731520" cy="274320"/>
-          </a:xfrm>
-          <a:prstGeom prst="rect">
-            <a:avLst/>
-          </a:prstGeom>
-          <a:noFill/>
-        </p:spPr>
-        <p:txBody>
-          <a:bodyPr wrap="square">
-            <a:spAutoFit/>
-          </a:bodyPr>
-          <a:lstStyle/>
-          <a:p>
-            <a:pPr algn="l">
-              <a:defRPr sz="1200" b="1" i="0">
-                <a:solidFill>
-                  <a:srgbClr val="FFFFFF"/>
-                </a:solidFill>
-                <a:latin typeface="Calibri"/>
-              </a:defRPr>
-            </a:pPr>
-            <a:r>
-              <a:t>25,2%</a:t>
-            </a:r>
-          </a:p>
-        </p:txBody>
-      </p:sp>
-      <p:sp>
-        <p:nvSpPr>
-          <p:cNvPr id="20" name="Rectangle 19"/>
-          <p:cNvSpPr/>
-          <p:nvPr/>
-        </p:nvSpPr>
-        <p:spPr>
-          <a:xfrm>
-            <a:off x="6217920" y="4480560"/>
-            <a:ext cx="1828800" cy="137160"/>
-          </a:xfrm>
-          <a:prstGeom prst="rect">
-            <a:avLst/>
-          </a:prstGeom>
-          <a:solidFill>
-            <a:srgbClr val="0096C7"/>
-          </a:solidFill>
-          <a:ln>
-            <a:noFill/>
-          </a:ln>
-        </p:spPr>
-        <p:style>
-          <a:lnRef idx="1">
-            <a:schemeClr val="accent1"/>
-          </a:lnRef>
-          <a:fillRef idx="3">
-            <a:schemeClr val="accent1"/>
-          </a:fillRef>
-          <a:effectRef idx="2">
-            <a:schemeClr val="accent1"/>
-          </a:effectRef>
-          <a:fontRef idx="minor">
-            <a:schemeClr val="lt1"/>
-          </a:fontRef>
-        </p:style>
-        <p:txBody>
-          <a:bodyPr rtlCol="0" anchor="ctr"/>
-          <a:lstStyle/>
-          <a:p>
-            <a:pPr algn="ctr"/>
-          </a:p>
-        </p:txBody>
-      </p:sp>
-      <p:sp>
-        <p:nvSpPr>
-          <p:cNvPr id="21" name="TextBox 20"/>
-          <p:cNvSpPr txBox="1"/>
-          <p:nvPr/>
-        </p:nvSpPr>
-        <p:spPr>
-          <a:xfrm>
-            <a:off x="6217920" y="4846320"/>
-            <a:ext cx="2286000" cy="274320"/>
-          </a:xfrm>
-          <a:prstGeom prst="rect">
-            <a:avLst/>
-          </a:prstGeom>
-          <a:noFill/>
-        </p:spPr>
-        <p:txBody>
-          <a:bodyPr wrap="square">
-            <a:spAutoFit/>
-          </a:bodyPr>
-          <a:lstStyle/>
-          <a:p>
-            <a:pPr algn="l">
-              <a:defRPr sz="1200" b="0" i="1">
-                <a:solidFill>
-                  <a:srgbClr val="FFFFFF"/>
-                </a:solidFill>
-                <a:latin typeface="Calibri"/>
-              </a:defRPr>
-            </a:pPr>
-            <a:r>
-              <a:t>in_stock</a:t>
-            </a:r>
-          </a:p>
-        </p:txBody>
-      </p:sp>
-      <p:sp>
-        <p:nvSpPr>
-          <p:cNvPr id="22" name="TextBox 21"/>
-          <p:cNvSpPr txBox="1"/>
-          <p:nvPr/>
-        </p:nvSpPr>
-        <p:spPr>
-          <a:xfrm>
-            <a:off x="10515600" y="4846320"/>
-            <a:ext cx="731520" cy="274320"/>
-          </a:xfrm>
-          <a:prstGeom prst="rect">
-            <a:avLst/>
-          </a:prstGeom>
-          <a:noFill/>
-        </p:spPr>
-        <p:txBody>
-          <a:bodyPr wrap="square">
-            <a:spAutoFit/>
-          </a:bodyPr>
-          <a:lstStyle/>
-          <a:p>
-            <a:pPr algn="l">
-              <a:defRPr sz="1200" b="1" i="0">
-                <a:solidFill>
-                  <a:srgbClr val="FFFFFF"/>
-                </a:solidFill>
-                <a:latin typeface="Calibri"/>
-              </a:defRPr>
-            </a:pPr>
-            <a:r>
-              <a:t>0,0%</a:t>
-            </a:r>
-          </a:p>
-        </p:txBody>
-      </p:sp>
-      <p:sp>
-        <p:nvSpPr>
-          <p:cNvPr id="23" name="Rectangle 22"/>
-          <p:cNvSpPr/>
-          <p:nvPr/>
-        </p:nvSpPr>
-        <p:spPr>
-          <a:xfrm>
-            <a:off x="6217920" y="5120640"/>
-            <a:ext cx="91440" cy="137160"/>
-          </a:xfrm>
-          <a:prstGeom prst="rect">
-            <a:avLst/>
-          </a:prstGeom>
-          <a:solidFill>
-            <a:srgbClr val="0096C7"/>
-          </a:solidFill>
-          <a:ln>
-            <a:noFill/>
-          </a:ln>
-        </p:spPr>
-        <p:style>
-          <a:lnRef idx="1">
-            <a:schemeClr val="accent1"/>
-          </a:lnRef>
-          <a:fillRef idx="3">
-            <a:schemeClr val="accent1"/>
-          </a:fillRef>
-          <a:effectRef idx="2">
-            <a:schemeClr val="accent1"/>
-          </a:effectRef>
-          <a:fontRef idx="minor">
-            <a:schemeClr val="lt1"/>
-          </a:fontRef>
-        </p:style>
-        <p:txBody>
-          <a:bodyPr rtlCol="0" anchor="ctr"/>
-          <a:lstStyle/>
-          <a:p>
-            <a:pPr algn="ctr"/>
-          </a:p>
-        </p:txBody>
-      </p:sp>
-    </p:spTree>
-  </p:cSld>
-  <p:clrMapOvr>
-    <a:masterClrMapping/>
-  </p:clrMapOvr>
-</p:sld>
-</file>
-
-<file path=ppt/slides/slide12.xml><?xml version="1.0" encoding="utf-8"?>
-<p:sld xmlns:a="http://schemas.openxmlformats.org/drawingml/2006/main" xmlns:p="http://schemas.openxmlformats.org/presentationml/2006/main" xmlns:r="http://schemas.openxmlformats.org/officeDocument/2006/relationships">
-  <p:cSld>
-    <p:bg>
-      <p:bgPr>
-        <a:solidFill>
-          <a:srgbClr val="1B1B2F"/>
-        </a:solidFill>
-        <a:effectLst/>
-      </p:bgPr>
-    </p:bg>
-    <p:spTree>
-      <p:nvGrpSpPr>
-        <p:cNvPr id="1" name=""/>
-        <p:cNvGrpSpPr/>
-        <p:nvPr/>
-      </p:nvGrpSpPr>
-      <p:grpSpPr/>
-      <p:sp>
-        <p:nvSpPr>
-          <p:cNvPr id="2" name="TextBox 1"/>
-          <p:cNvSpPr txBox="1"/>
-          <p:nvPr/>
-        </p:nvSpPr>
-        <p:spPr>
-          <a:xfrm>
-            <a:off x="731520" y="365760"/>
-            <a:ext cx="10058400" cy="731520"/>
-          </a:xfrm>
-          <a:prstGeom prst="rect">
-            <a:avLst/>
-          </a:prstGeom>
-          <a:noFill/>
-        </p:spPr>
-        <p:txBody>
-          <a:bodyPr wrap="square">
-            <a:spAutoFit/>
-          </a:bodyPr>
-          <a:lstStyle/>
-          <a:p>
-            <a:pPr algn="l">
-              <a:defRPr sz="2800" b="1" i="0">
-                <a:solidFill>
-                  <a:srgbClr val="0096C7"/>
-                </a:solidFill>
-                <a:latin typeface="Calibri"/>
-              </a:defRPr>
-            </a:pPr>
-            <a:r>
-              <a:t>Business Insights &amp; Rekomendasi</a:t>
-            </a:r>
-          </a:p>
-        </p:txBody>
-      </p:sp>
-      <p:sp>
-        <p:nvSpPr>
-          <p:cNvPr id="3" name="Rectangle 2"/>
-          <p:cNvSpPr/>
-          <p:nvPr/>
-        </p:nvSpPr>
-        <p:spPr>
-          <a:xfrm>
-            <a:off x="731520" y="1417320"/>
-            <a:ext cx="1371600" cy="54864"/>
-          </a:xfrm>
-          <a:prstGeom prst="rect">
-            <a:avLst/>
-          </a:prstGeom>
-          <a:solidFill>
-            <a:srgbClr val="0096C7"/>
-          </a:solidFill>
-          <a:ln>
-            <a:noFill/>
-          </a:ln>
-        </p:spPr>
-        <p:style>
-          <a:lnRef idx="1">
-            <a:schemeClr val="accent1"/>
-          </a:lnRef>
-          <a:fillRef idx="3">
-            <a:schemeClr val="accent1"/>
-          </a:fillRef>
-          <a:effectRef idx="2">
-            <a:schemeClr val="accent1"/>
-          </a:effectRef>
-          <a:fontRef idx="minor">
-            <a:schemeClr val="lt1"/>
-          </a:fontRef>
-        </p:style>
-        <p:txBody>
-          <a:bodyPr rtlCol="0" anchor="ctr"/>
-          <a:lstStyle/>
-          <a:p>
-            <a:pPr algn="ctr"/>
-          </a:p>
-        </p:txBody>
-      </p:sp>
-      <p:sp>
-        <p:nvSpPr>
-          <p:cNvPr id="4" name="TextBox 3"/>
-          <p:cNvSpPr txBox="1"/>
-          <p:nvPr/>
-        </p:nvSpPr>
-        <p:spPr>
-          <a:xfrm>
-            <a:off x="731520" y="1097280"/>
-            <a:ext cx="10058400" cy="457200"/>
-          </a:xfrm>
-          <a:prstGeom prst="rect">
-            <a:avLst/>
-          </a:prstGeom>
-          <a:noFill/>
-        </p:spPr>
-        <p:txBody>
-          <a:bodyPr wrap="square">
-            <a:spAutoFit/>
-          </a:bodyPr>
-          <a:lstStyle/>
-          <a:p>
-            <a:pPr algn="l">
-              <a:defRPr sz="1600" b="0" i="1">
-                <a:solidFill>
-                  <a:srgbClr val="CCCCCC"/>
-                </a:solidFill>
-                <a:latin typeface="Calibri"/>
-              </a:defRPr>
-            </a:pPr>
-            <a:r>
-              <a:t>Nilai bisnis dari analisis data</a:t>
-            </a:r>
-          </a:p>
-        </p:txBody>
-      </p:sp>
-      <p:sp>
-        <p:nvSpPr>
-          <p:cNvPr id="5" name="TextBox 4"/>
-          <p:cNvSpPr txBox="1"/>
-          <p:nvPr/>
-        </p:nvSpPr>
-        <p:spPr>
-          <a:xfrm>
-            <a:off x="731520" y="1645920"/>
-            <a:ext cx="5029200" cy="365760"/>
-          </a:xfrm>
-          <a:prstGeom prst="rect">
-            <a:avLst/>
-          </a:prstGeom>
-          <a:noFill/>
-        </p:spPr>
-        <p:txBody>
-          <a:bodyPr wrap="square">
-            <a:spAutoFit/>
-          </a:bodyPr>
-          <a:lstStyle/>
-          <a:p>
-            <a:pPr algn="l">
-              <a:defRPr sz="2000" b="1" i="0">
-                <a:solidFill>
-                  <a:srgbClr val="2ECC71"/>
-                </a:solidFill>
-                <a:latin typeface="Calibri"/>
-              </a:defRPr>
-            </a:pPr>
-            <a:r>
-              <a:t>Bagi Konsumen</a:t>
-            </a:r>
-          </a:p>
-        </p:txBody>
-      </p:sp>
-      <p:sp>
-        <p:nvSpPr>
-          <p:cNvPr id="6" name="TextBox 5"/>
-          <p:cNvSpPr txBox="1"/>
-          <p:nvPr/>
-        </p:nvSpPr>
-        <p:spPr>
-          <a:xfrm>
-            <a:off x="731520" y="2194560"/>
-            <a:ext cx="5029200" cy="411480"/>
-          </a:xfrm>
-          <a:prstGeom prst="rect">
-            <a:avLst/>
-          </a:prstGeom>
-          <a:noFill/>
-        </p:spPr>
-        <p:txBody>
-          <a:bodyPr wrap="square">
-            <a:spAutoFit/>
-          </a:bodyPr>
-          <a:lstStyle/>
-          <a:p>
-            <a:pPr algn="l">
-              <a:defRPr sz="1400" b="0" i="0">
-                <a:solidFill>
-                  <a:srgbClr val="FFFFFF"/>
-                </a:solidFill>
-                <a:latin typeface="Calibri"/>
-              </a:defRPr>
-            </a:pPr>
-            <a:r>
-              <a:t>→  Transparansi harga &amp; identifikasi promo terbaik</a:t>
-            </a:r>
-          </a:p>
-        </p:txBody>
-      </p:sp>
-      <p:sp>
-        <p:nvSpPr>
-          <p:cNvPr id="7" name="TextBox 6"/>
-          <p:cNvSpPr txBox="1"/>
-          <p:nvPr/>
-        </p:nvSpPr>
-        <p:spPr>
-          <a:xfrm>
-            <a:off x="731520" y="2651760"/>
-            <a:ext cx="5029200" cy="411480"/>
-          </a:xfrm>
-          <a:prstGeom prst="rect">
-            <a:avLst/>
-          </a:prstGeom>
-          <a:noFill/>
-        </p:spPr>
-        <p:txBody>
-          <a:bodyPr wrap="square">
-            <a:spAutoFit/>
-          </a:bodyPr>
-          <a:lstStyle/>
-          <a:p>
-            <a:pPr algn="l">
-              <a:defRPr sz="1400" b="0" i="0">
-                <a:solidFill>
-                  <a:srgbClr val="FFFFFF"/>
-                </a:solidFill>
-                <a:latin typeface="Calibri"/>
-              </a:defRPr>
-            </a:pPr>
-            <a:r>
-              <a:t>→  Rekomendasi personal berbasis clustering</a:t>
-            </a:r>
-          </a:p>
-        </p:txBody>
-      </p:sp>
-      <p:sp>
-        <p:nvSpPr>
-          <p:cNvPr id="8" name="TextBox 7"/>
-          <p:cNvSpPr txBox="1"/>
-          <p:nvPr/>
-        </p:nvSpPr>
-        <p:spPr>
-          <a:xfrm>
-            <a:off x="731520" y="3108960"/>
-            <a:ext cx="5029200" cy="411480"/>
-          </a:xfrm>
-          <a:prstGeom prst="rect">
-            <a:avLst/>
-          </a:prstGeom>
-          <a:noFill/>
-        </p:spPr>
-        <p:txBody>
-          <a:bodyPr wrap="square">
-            <a:spAutoFit/>
-          </a:bodyPr>
-          <a:lstStyle/>
-          <a:p>
-            <a:pPr algn="l">
-              <a:defRPr sz="1400" b="0" i="0">
-                <a:solidFill>
-                  <a:srgbClr val="FFFFFF"/>
-                </a:solidFill>
-                <a:latin typeface="Calibri"/>
-              </a:defRPr>
-            </a:pPr>
-            <a:r>
-              <a:t>→  Prediksi rentang harga wajar per kategori</a:t>
-            </a:r>
-          </a:p>
-        </p:txBody>
-      </p:sp>
-      <p:sp>
-        <p:nvSpPr>
-          <p:cNvPr id="9" name="TextBox 8"/>
-          <p:cNvSpPr txBox="1"/>
-          <p:nvPr/>
-        </p:nvSpPr>
-        <p:spPr>
-          <a:xfrm>
-            <a:off x="6400800" y="1645920"/>
-            <a:ext cx="5029200" cy="365760"/>
-          </a:xfrm>
-          <a:prstGeom prst="rect">
-            <a:avLst/>
-          </a:prstGeom>
-          <a:noFill/>
-        </p:spPr>
-        <p:txBody>
-          <a:bodyPr wrap="square">
-            <a:spAutoFit/>
-          </a:bodyPr>
-          <a:lstStyle/>
-          <a:p>
-            <a:pPr algn="l">
-              <a:defRPr sz="2000" b="1" i="0">
-                <a:solidFill>
-                  <a:srgbClr val="0096C7"/>
-                </a:solidFill>
-                <a:latin typeface="Calibri"/>
-              </a:defRPr>
-            </a:pPr>
-            <a:r>
-              <a:t>Bagi Pengelola E-Commerce</a:t>
-            </a:r>
-          </a:p>
-        </p:txBody>
-      </p:sp>
-      <p:sp>
-        <p:nvSpPr>
-          <p:cNvPr id="10" name="TextBox 9"/>
-          <p:cNvSpPr txBox="1"/>
-          <p:nvPr/>
-        </p:nvSpPr>
-        <p:spPr>
-          <a:xfrm>
-            <a:off x="6400800" y="2194560"/>
-            <a:ext cx="5029200" cy="411480"/>
-          </a:xfrm>
-          <a:prstGeom prst="rect">
-            <a:avLst/>
-          </a:prstGeom>
-          <a:noFill/>
-        </p:spPr>
-        <p:txBody>
-          <a:bodyPr wrap="square">
-            <a:spAutoFit/>
-          </a:bodyPr>
-          <a:lstStyle/>
-          <a:p>
-            <a:pPr algn="l">
-              <a:defRPr sz="1400" b="0" i="0">
-                <a:solidFill>
-                  <a:srgbClr val="FFFFFF"/>
-                </a:solidFill>
-                <a:latin typeface="Calibri"/>
-              </a:defRPr>
-            </a:pPr>
-            <a:r>
-              <a:t>→  Efisiensi inventaris &amp; optimasi reorder point</a:t>
-            </a:r>
-          </a:p>
-        </p:txBody>
-      </p:sp>
-      <p:sp>
-        <p:nvSpPr>
-          <p:cNvPr id="11" name="TextBox 10"/>
-          <p:cNvSpPr txBox="1"/>
-          <p:nvPr/>
-        </p:nvSpPr>
-        <p:spPr>
-          <a:xfrm>
-            <a:off x="6400800" y="2651760"/>
-            <a:ext cx="5029200" cy="411480"/>
-          </a:xfrm>
-          <a:prstGeom prst="rect">
-            <a:avLst/>
-          </a:prstGeom>
-          <a:noFill/>
-        </p:spPr>
-        <p:txBody>
-          <a:bodyPr wrap="square">
-            <a:spAutoFit/>
-          </a:bodyPr>
-          <a:lstStyle/>
-          <a:p>
-            <a:pPr algn="l">
-              <a:defRPr sz="1400" b="0" i="0">
-                <a:solidFill>
-                  <a:srgbClr val="FFFFFF"/>
-                </a:solidFill>
-                <a:latin typeface="Calibri"/>
-              </a:defRPr>
-            </a:pPr>
-            <a:r>
-              <a:t>→  Dynamic pricing berbasis model regresi</a:t>
-            </a:r>
-          </a:p>
-        </p:txBody>
-      </p:sp>
-      <p:sp>
-        <p:nvSpPr>
-          <p:cNvPr id="12" name="TextBox 11"/>
-          <p:cNvSpPr txBox="1"/>
-          <p:nvPr/>
-        </p:nvSpPr>
-        <p:spPr>
-          <a:xfrm>
-            <a:off x="6400800" y="3108960"/>
-            <a:ext cx="5029200" cy="411480"/>
-          </a:xfrm>
-          <a:prstGeom prst="rect">
-            <a:avLst/>
-          </a:prstGeom>
-          <a:noFill/>
-        </p:spPr>
-        <p:txBody>
-          <a:bodyPr wrap="square">
-            <a:spAutoFit/>
-          </a:bodyPr>
-          <a:lstStyle/>
-          <a:p>
-            <a:pPr algn="l">
-              <a:defRPr sz="1400" b="0" i="0">
-                <a:solidFill>
-                  <a:srgbClr val="FFFFFF"/>
-                </a:solidFill>
-                <a:latin typeface="Calibri"/>
-              </a:defRPr>
-            </a:pPr>
-            <a:r>
-              <a:t>→  Targeted marketing per segmen kluster</a:t>
-            </a:r>
-          </a:p>
-        </p:txBody>
-      </p:sp>
-      <p:sp>
-        <p:nvSpPr>
-          <p:cNvPr id="13" name="TextBox 12"/>
-          <p:cNvSpPr txBox="1"/>
-          <p:nvPr/>
-        </p:nvSpPr>
-        <p:spPr>
-          <a:xfrm>
-            <a:off x="731520" y="4114800"/>
-            <a:ext cx="10058400" cy="365760"/>
-          </a:xfrm>
-          <a:prstGeom prst="rect">
-            <a:avLst/>
-          </a:prstGeom>
-          <a:noFill/>
-        </p:spPr>
-        <p:txBody>
-          <a:bodyPr wrap="square">
-            <a:spAutoFit/>
-          </a:bodyPr>
-          <a:lstStyle/>
-          <a:p>
-            <a:pPr algn="l">
-              <a:defRPr sz="1800" b="1" i="0">
-                <a:solidFill>
-                  <a:srgbClr val="FFD600"/>
-                </a:solidFill>
-                <a:latin typeface="Calibri"/>
-              </a:defRPr>
-            </a:pPr>
-            <a:r>
-              <a:t>Big Data 5V dalam E-Commerce</a:t>
-            </a:r>
-          </a:p>
-        </p:txBody>
-      </p:sp>
-      <p:sp>
-        <p:nvSpPr>
-          <p:cNvPr id="14" name="Rectangle 13"/>
-          <p:cNvSpPr/>
-          <p:nvPr/>
-        </p:nvSpPr>
-        <p:spPr>
-          <a:xfrm>
-            <a:off x="457200" y="4663440"/>
-            <a:ext cx="2011680" cy="1188720"/>
-          </a:xfrm>
-          <a:prstGeom prst="rect">
-            <a:avLst/>
-          </a:prstGeom>
-          <a:solidFill>
-            <a:srgbClr val="22223A"/>
-          </a:solidFill>
-          <a:ln>
-            <a:noFill/>
-          </a:ln>
-        </p:spPr>
-        <p:style>
-          <a:lnRef idx="1">
-            <a:schemeClr val="accent1"/>
-          </a:lnRef>
-          <a:fillRef idx="3">
-            <a:schemeClr val="accent1"/>
-          </a:fillRef>
-          <a:effectRef idx="2">
-            <a:schemeClr val="accent1"/>
-          </a:effectRef>
-          <a:fontRef idx="minor">
-            <a:schemeClr val="lt1"/>
-          </a:fontRef>
-        </p:style>
-        <p:txBody>
-          <a:bodyPr rtlCol="0" anchor="ctr"/>
-          <a:lstStyle/>
-          <a:p>
-            <a:pPr algn="ctr"/>
-          </a:p>
-        </p:txBody>
-      </p:sp>
-      <p:sp>
-        <p:nvSpPr>
-          <p:cNvPr id="15" name="TextBox 14"/>
-          <p:cNvSpPr txBox="1"/>
-          <p:nvPr/>
-        </p:nvSpPr>
-        <p:spPr>
-          <a:xfrm>
-            <a:off x="548640" y="4754880"/>
-            <a:ext cx="1828800" cy="320040"/>
-          </a:xfrm>
-          <a:prstGeom prst="rect">
-            <a:avLst/>
-          </a:prstGeom>
-          <a:noFill/>
-        </p:spPr>
-        <p:txBody>
-          <a:bodyPr wrap="square">
-            <a:spAutoFit/>
-          </a:bodyPr>
-          <a:lstStyle/>
-          <a:p>
-            <a:pPr algn="ctr">
-              <a:defRPr sz="1400" b="1" i="0">
-                <a:solidFill>
-                  <a:srgbClr val="FFD600"/>
-                </a:solidFill>
-                <a:latin typeface="Calibri"/>
-              </a:defRPr>
-            </a:pPr>
-            <a:r>
-              <a:t>Volume</a:t>
-            </a:r>
-          </a:p>
-        </p:txBody>
-      </p:sp>
-      <p:sp>
-        <p:nvSpPr>
-          <p:cNvPr id="16" name="TextBox 15"/>
-          <p:cNvSpPr txBox="1"/>
-          <p:nvPr/>
-        </p:nvSpPr>
-        <p:spPr>
-          <a:xfrm>
-            <a:off x="548640" y="5120640"/>
-            <a:ext cx="1828800" cy="457200"/>
-          </a:xfrm>
-          <a:prstGeom prst="rect">
-            <a:avLst/>
-          </a:prstGeom>
-          <a:noFill/>
-        </p:spPr>
-        <p:txBody>
-          <a:bodyPr wrap="square">
-            <a:spAutoFit/>
-          </a:bodyPr>
-          <a:lstStyle/>
-          <a:p>
-            <a:pPr algn="ctr">
-              <a:defRPr sz="1100" b="0" i="0">
-                <a:solidFill>
-                  <a:srgbClr val="CCCCCC"/>
-                </a:solidFill>
-                <a:latin typeface="Calibri"/>
-              </a:defRPr>
-            </a:pPr>
-            <a:r>
-              <a:t>Ribuan produk &amp; transaksi</a:t>
-            </a:r>
-          </a:p>
-        </p:txBody>
-      </p:sp>
-      <p:sp>
-        <p:nvSpPr>
-          <p:cNvPr id="17" name="Rectangle 16"/>
-          <p:cNvSpPr/>
-          <p:nvPr/>
-        </p:nvSpPr>
-        <p:spPr>
-          <a:xfrm>
-            <a:off x="2743200" y="4663440"/>
-            <a:ext cx="2011680" cy="1188720"/>
-          </a:xfrm>
-          <a:prstGeom prst="rect">
-            <a:avLst/>
-          </a:prstGeom>
-          <a:solidFill>
-            <a:srgbClr val="22223A"/>
-          </a:solidFill>
-          <a:ln>
-            <a:noFill/>
-          </a:ln>
-        </p:spPr>
-        <p:style>
-          <a:lnRef idx="1">
-            <a:schemeClr val="accent1"/>
-          </a:lnRef>
-          <a:fillRef idx="3">
-            <a:schemeClr val="accent1"/>
-          </a:fillRef>
-          <a:effectRef idx="2">
-            <a:schemeClr val="accent1"/>
-          </a:effectRef>
-          <a:fontRef idx="minor">
-            <a:schemeClr val="lt1"/>
-          </a:fontRef>
-        </p:style>
-        <p:txBody>
-          <a:bodyPr rtlCol="0" anchor="ctr"/>
-          <a:lstStyle/>
-          <a:p>
-            <a:pPr algn="ctr"/>
-          </a:p>
-        </p:txBody>
-      </p:sp>
-      <p:sp>
-        <p:nvSpPr>
-          <p:cNvPr id="18" name="TextBox 17"/>
-          <p:cNvSpPr txBox="1"/>
-          <p:nvPr/>
-        </p:nvSpPr>
-        <p:spPr>
-          <a:xfrm>
-            <a:off x="2834640" y="4754880"/>
-            <a:ext cx="1828800" cy="320040"/>
-          </a:xfrm>
-          <a:prstGeom prst="rect">
-            <a:avLst/>
-          </a:prstGeom>
-          <a:noFill/>
-        </p:spPr>
-        <p:txBody>
-          <a:bodyPr wrap="square">
-            <a:spAutoFit/>
-          </a:bodyPr>
-          <a:lstStyle/>
-          <a:p>
-            <a:pPr algn="ctr">
-              <a:defRPr sz="1400" b="1" i="0">
-                <a:solidFill>
-                  <a:srgbClr val="FFD600"/>
-                </a:solidFill>
-                <a:latin typeface="Calibri"/>
-              </a:defRPr>
-            </a:pPr>
-            <a:r>
-              <a:t>Velocity</a:t>
-            </a:r>
-          </a:p>
-        </p:txBody>
-      </p:sp>
-      <p:sp>
-        <p:nvSpPr>
-          <p:cNvPr id="19" name="TextBox 18"/>
-          <p:cNvSpPr txBox="1"/>
-          <p:nvPr/>
-        </p:nvSpPr>
-        <p:spPr>
-          <a:xfrm>
-            <a:off x="2834640" y="5120640"/>
-            <a:ext cx="1828800" cy="457200"/>
-          </a:xfrm>
-          <a:prstGeom prst="rect">
-            <a:avLst/>
-          </a:prstGeom>
-          <a:noFill/>
-        </p:spPr>
-        <p:txBody>
-          <a:bodyPr wrap="square">
-            <a:spAutoFit/>
-          </a:bodyPr>
-          <a:lstStyle/>
-          <a:p>
-            <a:pPr algn="ctr">
-              <a:defRPr sz="1100" b="0" i="0">
-                <a:solidFill>
-                  <a:srgbClr val="CCCCCC"/>
-                </a:solidFill>
-                <a:latin typeface="Calibri"/>
-              </a:defRPr>
-            </a:pPr>
-            <a:r>
-              <a:t>Update real-time</a:t>
-            </a:r>
-          </a:p>
-        </p:txBody>
-      </p:sp>
-      <p:sp>
-        <p:nvSpPr>
-          <p:cNvPr id="20" name="Rectangle 19"/>
-          <p:cNvSpPr/>
-          <p:nvPr/>
-        </p:nvSpPr>
-        <p:spPr>
-          <a:xfrm>
-            <a:off x="5029200" y="4663440"/>
-            <a:ext cx="2011680" cy="1188720"/>
-          </a:xfrm>
-          <a:prstGeom prst="rect">
-            <a:avLst/>
-          </a:prstGeom>
-          <a:solidFill>
-            <a:srgbClr val="22223A"/>
-          </a:solidFill>
-          <a:ln>
-            <a:noFill/>
-          </a:ln>
-        </p:spPr>
-        <p:style>
-          <a:lnRef idx="1">
-            <a:schemeClr val="accent1"/>
-          </a:lnRef>
-          <a:fillRef idx="3">
-            <a:schemeClr val="accent1"/>
-          </a:fillRef>
-          <a:effectRef idx="2">
-            <a:schemeClr val="accent1"/>
-          </a:effectRef>
-          <a:fontRef idx="minor">
-            <a:schemeClr val="lt1"/>
-          </a:fontRef>
-        </p:style>
-        <p:txBody>
-          <a:bodyPr rtlCol="0" anchor="ctr"/>
-          <a:lstStyle/>
-          <a:p>
-            <a:pPr algn="ctr"/>
-          </a:p>
-        </p:txBody>
-      </p:sp>
-      <p:sp>
-        <p:nvSpPr>
-          <p:cNvPr id="21" name="TextBox 20"/>
-          <p:cNvSpPr txBox="1"/>
-          <p:nvPr/>
-        </p:nvSpPr>
-        <p:spPr>
-          <a:xfrm>
-            <a:off x="5120640" y="4754880"/>
-            <a:ext cx="1828800" cy="320040"/>
-          </a:xfrm>
-          <a:prstGeom prst="rect">
-            <a:avLst/>
-          </a:prstGeom>
-          <a:noFill/>
-        </p:spPr>
-        <p:txBody>
-          <a:bodyPr wrap="square">
-            <a:spAutoFit/>
-          </a:bodyPr>
-          <a:lstStyle/>
-          <a:p>
-            <a:pPr algn="ctr">
-              <a:defRPr sz="1400" b="1" i="0">
-                <a:solidFill>
-                  <a:srgbClr val="FFD600"/>
-                </a:solidFill>
-                <a:latin typeface="Calibri"/>
-              </a:defRPr>
-            </a:pPr>
-            <a:r>
-              <a:t>Variety</a:t>
-            </a:r>
-          </a:p>
-        </p:txBody>
-      </p:sp>
-      <p:sp>
-        <p:nvSpPr>
-          <p:cNvPr id="22" name="TextBox 21"/>
-          <p:cNvSpPr txBox="1"/>
-          <p:nvPr/>
-        </p:nvSpPr>
-        <p:spPr>
-          <a:xfrm>
-            <a:off x="5120640" y="5120640"/>
-            <a:ext cx="1828800" cy="457200"/>
-          </a:xfrm>
-          <a:prstGeom prst="rect">
-            <a:avLst/>
-          </a:prstGeom>
-          <a:noFill/>
-        </p:spPr>
-        <p:txBody>
-          <a:bodyPr wrap="square">
-            <a:spAutoFit/>
-          </a:bodyPr>
-          <a:lstStyle/>
-          <a:p>
-            <a:pPr algn="ctr">
-              <a:defRPr sz="1100" b="0" i="0">
-                <a:solidFill>
-                  <a:srgbClr val="CCCCCC"/>
-                </a:solidFill>
-                <a:latin typeface="Calibri"/>
-              </a:defRPr>
-            </a:pPr>
-            <a:r>
-              <a:t>Multi-source data</a:t>
-            </a:r>
-          </a:p>
-        </p:txBody>
-      </p:sp>
-      <p:sp>
-        <p:nvSpPr>
-          <p:cNvPr id="23" name="Rectangle 22"/>
-          <p:cNvSpPr/>
-          <p:nvPr/>
-        </p:nvSpPr>
-        <p:spPr>
-          <a:xfrm>
-            <a:off x="7315200" y="4663440"/>
-            <a:ext cx="2011680" cy="1188720"/>
-          </a:xfrm>
-          <a:prstGeom prst="rect">
-            <a:avLst/>
-          </a:prstGeom>
-          <a:solidFill>
-            <a:srgbClr val="22223A"/>
-          </a:solidFill>
-          <a:ln>
-            <a:noFill/>
-          </a:ln>
-        </p:spPr>
-        <p:style>
-          <a:lnRef idx="1">
-            <a:schemeClr val="accent1"/>
-          </a:lnRef>
-          <a:fillRef idx="3">
-            <a:schemeClr val="accent1"/>
-          </a:fillRef>
-          <a:effectRef idx="2">
-            <a:schemeClr val="accent1"/>
-          </a:effectRef>
-          <a:fontRef idx="minor">
-            <a:schemeClr val="lt1"/>
-          </a:fontRef>
-        </p:style>
-        <p:txBody>
-          <a:bodyPr rtlCol="0" anchor="ctr"/>
-          <a:lstStyle/>
-          <a:p>
-            <a:pPr algn="ctr"/>
-          </a:p>
-        </p:txBody>
-      </p:sp>
-      <p:sp>
-        <p:nvSpPr>
-          <p:cNvPr id="24" name="TextBox 23"/>
-          <p:cNvSpPr txBox="1"/>
-          <p:nvPr/>
-        </p:nvSpPr>
-        <p:spPr>
-          <a:xfrm>
-            <a:off x="7406640" y="4754880"/>
-            <a:ext cx="1828800" cy="320040"/>
-          </a:xfrm>
-          <a:prstGeom prst="rect">
-            <a:avLst/>
-          </a:prstGeom>
-          <a:noFill/>
-        </p:spPr>
-        <p:txBody>
-          <a:bodyPr wrap="square">
-            <a:spAutoFit/>
-          </a:bodyPr>
-          <a:lstStyle/>
-          <a:p>
-            <a:pPr algn="ctr">
-              <a:defRPr sz="1400" b="1" i="0">
-                <a:solidFill>
-                  <a:srgbClr val="FFD600"/>
-                </a:solidFill>
-                <a:latin typeface="Calibri"/>
-              </a:defRPr>
-            </a:pPr>
-            <a:r>
-              <a:t>Veracity</a:t>
-            </a:r>
-          </a:p>
-        </p:txBody>
-      </p:sp>
-      <p:sp>
-        <p:nvSpPr>
-          <p:cNvPr id="25" name="TextBox 24"/>
-          <p:cNvSpPr txBox="1"/>
-          <p:nvPr/>
-        </p:nvSpPr>
-        <p:spPr>
-          <a:xfrm>
-            <a:off x="7406640" y="5120640"/>
-            <a:ext cx="1828800" cy="457200"/>
-          </a:xfrm>
-          <a:prstGeom prst="rect">
-            <a:avLst/>
-          </a:prstGeom>
-          <a:noFill/>
-        </p:spPr>
-        <p:txBody>
-          <a:bodyPr wrap="square">
-            <a:spAutoFit/>
-          </a:bodyPr>
-          <a:lstStyle/>
-          <a:p>
-            <a:pPr algn="ctr">
-              <a:defRPr sz="1100" b="0" i="0">
-                <a:solidFill>
-                  <a:srgbClr val="CCCCCC"/>
-                </a:solidFill>
-                <a:latin typeface="Calibri"/>
-              </a:defRPr>
-            </a:pPr>
-            <a:r>
-              <a:t>Data quality assurance</a:t>
-            </a:r>
-          </a:p>
-        </p:txBody>
-      </p:sp>
-      <p:sp>
-        <p:nvSpPr>
-          <p:cNvPr id="26" name="Rectangle 25"/>
-          <p:cNvSpPr/>
-          <p:nvPr/>
-        </p:nvSpPr>
-        <p:spPr>
-          <a:xfrm>
-            <a:off x="9601200" y="4663440"/>
-            <a:ext cx="2011680" cy="1188720"/>
-          </a:xfrm>
-          <a:prstGeom prst="rect">
-            <a:avLst/>
-          </a:prstGeom>
-          <a:solidFill>
-            <a:srgbClr val="22223A"/>
-          </a:solidFill>
-          <a:ln>
-            <a:noFill/>
-          </a:ln>
-        </p:spPr>
-        <p:style>
-          <a:lnRef idx="1">
-            <a:schemeClr val="accent1"/>
-          </a:lnRef>
-          <a:fillRef idx="3">
-            <a:schemeClr val="accent1"/>
-          </a:fillRef>
-          <a:effectRef idx="2">
-            <a:schemeClr val="accent1"/>
-          </a:effectRef>
-          <a:fontRef idx="minor">
-            <a:schemeClr val="lt1"/>
-          </a:fontRef>
-        </p:style>
-        <p:txBody>
-          <a:bodyPr rtlCol="0" anchor="ctr"/>
-          <a:lstStyle/>
-          <a:p>
-            <a:pPr algn="ctr"/>
-          </a:p>
-        </p:txBody>
-      </p:sp>
-      <p:sp>
-        <p:nvSpPr>
-          <p:cNvPr id="27" name="TextBox 26"/>
-          <p:cNvSpPr txBox="1"/>
-          <p:nvPr/>
-        </p:nvSpPr>
-        <p:spPr>
-          <a:xfrm>
-            <a:off x="9692640" y="4754880"/>
-            <a:ext cx="1828800" cy="320040"/>
-          </a:xfrm>
-          <a:prstGeom prst="rect">
-            <a:avLst/>
-          </a:prstGeom>
-          <a:noFill/>
-        </p:spPr>
-        <p:txBody>
-          <a:bodyPr wrap="square">
-            <a:spAutoFit/>
-          </a:bodyPr>
-          <a:lstStyle/>
-          <a:p>
-            <a:pPr algn="ctr">
-              <a:defRPr sz="1400" b="1" i="0">
-                <a:solidFill>
-                  <a:srgbClr val="FFD600"/>
-                </a:solidFill>
-                <a:latin typeface="Calibri"/>
-              </a:defRPr>
-            </a:pPr>
-            <a:r>
-              <a:t>Value</a:t>
-            </a:r>
-          </a:p>
-        </p:txBody>
-      </p:sp>
-      <p:sp>
-        <p:nvSpPr>
-          <p:cNvPr id="28" name="TextBox 27"/>
-          <p:cNvSpPr txBox="1"/>
-          <p:nvPr/>
-        </p:nvSpPr>
-        <p:spPr>
-          <a:xfrm>
-            <a:off x="9692640" y="5120640"/>
-            <a:ext cx="1828800" cy="457200"/>
-          </a:xfrm>
-          <a:prstGeom prst="rect">
-            <a:avLst/>
-          </a:prstGeom>
-          <a:noFill/>
-        </p:spPr>
-        <p:txBody>
-          <a:bodyPr wrap="square">
-            <a:spAutoFit/>
-          </a:bodyPr>
-          <a:lstStyle/>
-          <a:p>
-            <a:pPr algn="ctr">
-              <a:defRPr sz="1100" b="0" i="0">
-                <a:solidFill>
-                  <a:srgbClr val="CCCCCC"/>
-                </a:solidFill>
-                <a:latin typeface="Calibri"/>
-              </a:defRPr>
-            </a:pPr>
-            <a:r>
-              <a:t>Actionable insights</a:t>
-            </a:r>
-          </a:p>
-        </p:txBody>
-      </p:sp>
-    </p:spTree>
-  </p:cSld>
-  <p:clrMapOvr>
-    <a:masterClrMapping/>
-  </p:clrMapOvr>
-</p:sld>
-</file>
-
-<file path=ppt/slides/slide13.xml><?xml version="1.0" encoding="utf-8"?>
 <p:sld xmlns:a="http://schemas.openxmlformats.org/drawingml/2006/main" xmlns:p="http://schemas.openxmlformats.org/presentationml/2006/main" xmlns:r="http://schemas.openxmlformats.org/officeDocument/2006/relationships">
   <p:cSld>
     <p:bg>
@@ -6372,7 +3810,7 @@
         </p:nvSpPr>
         <p:spPr>
           <a:xfrm>
-            <a:off x="731520" y="3200400"/>
+            <a:off x="914400" y="3200400"/>
             <a:ext cx="1828800" cy="54864"/>
           </a:xfrm>
           <a:prstGeom prst="rect">
@@ -6585,7 +4023,7 @@
         </p:nvSpPr>
         <p:spPr>
           <a:xfrm>
-            <a:off x="731520" y="1417320"/>
+            <a:off x="731520" y="1051560"/>
             <a:ext cx="1371600" cy="54864"/>
           </a:xfrm>
           <a:prstGeom prst="rect">
@@ -6628,22 +4066,22 @@
         </p:nvSpPr>
         <p:spPr>
           <a:xfrm>
-            <a:off x="731520" y="1097280"/>
-            <a:ext cx="10058400" cy="457200"/>
-          </a:xfrm>
-          <a:prstGeom prst="rect">
-            <a:avLst/>
-          </a:prstGeom>
-          <a:noFill/>
-        </p:spPr>
-        <p:txBody>
-          <a:bodyPr wrap="square">
-            <a:spAutoFit/>
-          </a:bodyPr>
-          <a:lstStyle/>
-          <a:p>
-            <a:pPr algn="l">
-              <a:defRPr sz="1600" b="0" i="1">
+            <a:off x="731520" y="1143000"/>
+            <a:ext cx="10058400" cy="365760"/>
+          </a:xfrm>
+          <a:prstGeom prst="rect">
+            <a:avLst/>
+          </a:prstGeom>
+          <a:noFill/>
+        </p:spPr>
+        <p:txBody>
+          <a:bodyPr wrap="square">
+            <a:spAutoFit/>
+          </a:bodyPr>
+          <a:lstStyle/>
+          <a:p>
+            <a:pPr algn="l">
+              <a:defRPr sz="1500" b="0" i="1">
                 <a:solidFill>
                   <a:srgbClr val="CCCCCC"/>
                 </a:solidFill>
@@ -6687,7 +4125,7 @@
               </a:defRPr>
             </a:pPr>
             <a:r>
-              <a:t>•  Studi kasus: platform e-commerce buku impor Periplus.com</a:t>
+              <a:t>•  Studi kasus: e-commerce buku impor Periplus.com</a:t>
             </a:r>
           </a:p>
         </p:txBody>
@@ -6723,7 +4161,7 @@
               </a:defRPr>
             </a:pPr>
             <a:r>
-              <a:t>•  Tujuan: ekstraksi insights bisnis dari data katalog produk</a:t>
+              <a:t>•  Pipeline end-to-end: scraping → cleaning → analisis → modeling → insights</a:t>
             </a:r>
           </a:p>
         </p:txBody>
@@ -6759,7 +4197,7 @@
               </a:defRPr>
             </a:pPr>
             <a:r>
-              <a:t>•  Pipeline end-to-end: scraping → cleaning → analisis → modeling → insights</a:t>
+              <a:t>•  Fokus presentasi ini: web scraping, regresi linier, k-Means clustering</a:t>
             </a:r>
           </a:p>
         </p:txBody>
@@ -6795,7 +4233,7 @@
               </a:defRPr>
             </a:pPr>
             <a:r>
-              <a:t>•  Tech stack: Python, Pandas, Scikit-learn, Matplotlib, BeautifulSoup</a:t>
+              <a:t>•  Partner: Rina Mardiana — mempresentasikan korelasi, klasifikasi, &amp; big data</a:t>
             </a:r>
           </a:p>
         </p:txBody>
@@ -6831,7 +4269,7 @@
               </a:defRPr>
             </a:pPr>
             <a:r>
-              <a:t>•  Output: artikel ilmiah JTIIK, Jupyter notebook, visualisasi interaktif</a:t>
+              <a:t>•  Tech stack: Python, Pandas, Scikit-learn, Matplotlib, BeautifulSoup</a:t>
             </a:r>
           </a:p>
         </p:txBody>
@@ -6893,7 +4331,7 @@
               </a:defRPr>
             </a:pPr>
             <a:r>
-              <a:t>Pipeline Data Science</a:t>
+              <a:t>Data Acquisition: Web Scraping</a:t>
             </a:r>
           </a:p>
         </p:txBody>
@@ -6906,7 +4344,7 @@
         </p:nvSpPr>
         <p:spPr>
           <a:xfrm>
-            <a:off x="731520" y="1417320"/>
+            <a:off x="731520" y="1051560"/>
             <a:ext cx="1371600" cy="54864"/>
           </a:xfrm>
           <a:prstGeom prst="rect">
@@ -6949,22 +4387,22 @@
         </p:nvSpPr>
         <p:spPr>
           <a:xfrm>
-            <a:off x="731520" y="1097280"/>
-            <a:ext cx="10058400" cy="457200"/>
-          </a:xfrm>
-          <a:prstGeom prst="rect">
-            <a:avLst/>
-          </a:prstGeom>
-          <a:noFill/>
-        </p:spPr>
-        <p:txBody>
-          <a:bodyPr wrap="square">
-            <a:spAutoFit/>
-          </a:bodyPr>
-          <a:lstStyle/>
-          <a:p>
-            <a:pPr algn="l">
-              <a:defRPr sz="1600" b="0" i="1">
+            <a:off x="731520" y="1143000"/>
+            <a:ext cx="10058400" cy="365760"/>
+          </a:xfrm>
+          <a:prstGeom prst="rect">
+            <a:avLst/>
+          </a:prstGeom>
+          <a:noFill/>
+        </p:spPr>
+        <p:txBody>
+          <a:bodyPr wrap="square">
+            <a:spAutoFit/>
+          </a:bodyPr>
+          <a:lstStyle/>
+          <a:p>
+            <a:pPr algn="l">
+              <a:defRPr sz="1500" b="0" i="1">
                 <a:solidFill>
                   <a:srgbClr val="CCCCCC"/>
                 </a:solidFill>
@@ -6972,35 +4410,823 @@
               </a:defRPr>
             </a:pPr>
             <a:r>
-              <a:t>Alur kerja proyek berbasis CRISP-DM</a:t>
-            </a:r>
-          </a:p>
-        </p:txBody>
-      </p:sp>
-      <p:pic>
-        <p:nvPicPr>
-          <p:cNvPr id="5" name="Picture 4" descr="crisp_dm.png"/>
-          <p:cNvPicPr>
-            <a:picLocks noChangeAspect="1"/>
-          </p:cNvPicPr>
-          <p:nvPr/>
-        </p:nvPicPr>
-        <p:blipFill>
-          <a:blip r:embed="rId2"/>
-          <a:stretch>
-            <a:fillRect/>
-          </a:stretch>
-        </p:blipFill>
-        <p:spPr>
-          <a:xfrm>
-            <a:off x="3200400" y="1463040"/>
-            <a:ext cx="5943600" cy="4754880"/>
-          </a:xfrm>
-          <a:prstGeom prst="rect">
-            <a:avLst/>
-          </a:prstGeom>
-        </p:spPr>
-      </p:pic>
+              <a:t>Mengumpulkan data dari Periplus.com</a:t>
+            </a:r>
+          </a:p>
+        </p:txBody>
+      </p:sp>
+      <p:sp>
+        <p:nvSpPr>
+          <p:cNvPr id="5" name="Rectangle 4"/>
+          <p:cNvSpPr/>
+          <p:nvPr/>
+        </p:nvSpPr>
+        <p:spPr>
+          <a:xfrm>
+            <a:off x="731520" y="1645920"/>
+            <a:ext cx="2286000" cy="1097280"/>
+          </a:xfrm>
+          <a:prstGeom prst="rect">
+            <a:avLst/>
+          </a:prstGeom>
+          <a:solidFill>
+            <a:srgbClr val="22223A"/>
+          </a:solidFill>
+          <a:ln>
+            <a:noFill/>
+          </a:ln>
+        </p:spPr>
+        <p:style>
+          <a:lnRef idx="1">
+            <a:schemeClr val="accent1"/>
+          </a:lnRef>
+          <a:fillRef idx="3">
+            <a:schemeClr val="accent1"/>
+          </a:fillRef>
+          <a:effectRef idx="2">
+            <a:schemeClr val="accent1"/>
+          </a:effectRef>
+          <a:fontRef idx="minor">
+            <a:schemeClr val="lt1"/>
+          </a:fontRef>
+        </p:style>
+        <p:txBody>
+          <a:bodyPr rtlCol="0" anchor="ctr"/>
+          <a:lstStyle/>
+          <a:p>
+            <a:pPr algn="ctr"/>
+          </a:p>
+        </p:txBody>
+      </p:sp>
+      <p:sp>
+        <p:nvSpPr>
+          <p:cNvPr id="6" name="Rectangle 5"/>
+          <p:cNvSpPr/>
+          <p:nvPr/>
+        </p:nvSpPr>
+        <p:spPr>
+          <a:xfrm>
+            <a:off x="731520" y="1645920"/>
+            <a:ext cx="2286000" cy="45720"/>
+          </a:xfrm>
+          <a:prstGeom prst="rect">
+            <a:avLst/>
+          </a:prstGeom>
+          <a:solidFill>
+            <a:srgbClr val="0096C7"/>
+          </a:solidFill>
+          <a:ln>
+            <a:noFill/>
+          </a:ln>
+        </p:spPr>
+        <p:style>
+          <a:lnRef idx="1">
+            <a:schemeClr val="accent1"/>
+          </a:lnRef>
+          <a:fillRef idx="3">
+            <a:schemeClr val="accent1"/>
+          </a:fillRef>
+          <a:effectRef idx="2">
+            <a:schemeClr val="accent1"/>
+          </a:effectRef>
+          <a:fontRef idx="minor">
+            <a:schemeClr val="lt1"/>
+          </a:fontRef>
+        </p:style>
+        <p:txBody>
+          <a:bodyPr rtlCol="0" anchor="ctr"/>
+          <a:lstStyle/>
+          <a:p>
+            <a:pPr algn="ctr"/>
+          </a:p>
+        </p:txBody>
+      </p:sp>
+      <p:sp>
+        <p:nvSpPr>
+          <p:cNvPr id="7" name="TextBox 6"/>
+          <p:cNvSpPr txBox="1"/>
+          <p:nvPr/>
+        </p:nvSpPr>
+        <p:spPr>
+          <a:xfrm>
+            <a:off x="868680" y="1783080"/>
+            <a:ext cx="2011680" cy="320040"/>
+          </a:xfrm>
+          <a:prstGeom prst="rect">
+            <a:avLst/>
+          </a:prstGeom>
+          <a:noFill/>
+        </p:spPr>
+        <p:txBody>
+          <a:bodyPr wrap="square">
+            <a:spAutoFit/>
+          </a:bodyPr>
+          <a:lstStyle/>
+          <a:p>
+            <a:pPr algn="l">
+              <a:defRPr sz="1200" b="0" i="0">
+                <a:solidFill>
+                  <a:srgbClr val="CCCCCC"/>
+                </a:solidFill>
+                <a:latin typeface="Calibri"/>
+              </a:defRPr>
+            </a:pPr>
+            <a:r>
+              <a:t>Halaman</a:t>
+            </a:r>
+          </a:p>
+        </p:txBody>
+      </p:sp>
+      <p:sp>
+        <p:nvSpPr>
+          <p:cNvPr id="8" name="TextBox 7"/>
+          <p:cNvSpPr txBox="1"/>
+          <p:nvPr/>
+        </p:nvSpPr>
+        <p:spPr>
+          <a:xfrm>
+            <a:off x="868680" y="2103120"/>
+            <a:ext cx="2011680" cy="548640"/>
+          </a:xfrm>
+          <a:prstGeom prst="rect">
+            <a:avLst/>
+          </a:prstGeom>
+          <a:noFill/>
+        </p:spPr>
+        <p:txBody>
+          <a:bodyPr wrap="square">
+            <a:spAutoFit/>
+          </a:bodyPr>
+          <a:lstStyle/>
+          <a:p>
+            <a:pPr algn="l">
+              <a:defRPr sz="2400" b="1" i="0">
+                <a:solidFill>
+                  <a:srgbClr val="FFFFFF"/>
+                </a:solidFill>
+                <a:latin typeface="Calibri"/>
+              </a:defRPr>
+            </a:pPr>
+            <a:r>
+              <a:t>8 Kategori</a:t>
+            </a:r>
+          </a:p>
+        </p:txBody>
+      </p:sp>
+      <p:sp>
+        <p:nvSpPr>
+          <p:cNvPr id="9" name="Rectangle 8"/>
+          <p:cNvSpPr/>
+          <p:nvPr/>
+        </p:nvSpPr>
+        <p:spPr>
+          <a:xfrm>
+            <a:off x="3291840" y="1645920"/>
+            <a:ext cx="2286000" cy="1097280"/>
+          </a:xfrm>
+          <a:prstGeom prst="rect">
+            <a:avLst/>
+          </a:prstGeom>
+          <a:solidFill>
+            <a:srgbClr val="22223A"/>
+          </a:solidFill>
+          <a:ln>
+            <a:noFill/>
+          </a:ln>
+        </p:spPr>
+        <p:style>
+          <a:lnRef idx="1">
+            <a:schemeClr val="accent1"/>
+          </a:lnRef>
+          <a:fillRef idx="3">
+            <a:schemeClr val="accent1"/>
+          </a:fillRef>
+          <a:effectRef idx="2">
+            <a:schemeClr val="accent1"/>
+          </a:effectRef>
+          <a:fontRef idx="minor">
+            <a:schemeClr val="lt1"/>
+          </a:fontRef>
+        </p:style>
+        <p:txBody>
+          <a:bodyPr rtlCol="0" anchor="ctr"/>
+          <a:lstStyle/>
+          <a:p>
+            <a:pPr algn="ctr"/>
+          </a:p>
+        </p:txBody>
+      </p:sp>
+      <p:sp>
+        <p:nvSpPr>
+          <p:cNvPr id="10" name="Rectangle 9"/>
+          <p:cNvSpPr/>
+          <p:nvPr/>
+        </p:nvSpPr>
+        <p:spPr>
+          <a:xfrm>
+            <a:off x="3291840" y="1645920"/>
+            <a:ext cx="2286000" cy="45720"/>
+          </a:xfrm>
+          <a:prstGeom prst="rect">
+            <a:avLst/>
+          </a:prstGeom>
+          <a:solidFill>
+            <a:srgbClr val="F39424"/>
+          </a:solidFill>
+          <a:ln>
+            <a:noFill/>
+          </a:ln>
+        </p:spPr>
+        <p:style>
+          <a:lnRef idx="1">
+            <a:schemeClr val="accent1"/>
+          </a:lnRef>
+          <a:fillRef idx="3">
+            <a:schemeClr val="accent1"/>
+          </a:fillRef>
+          <a:effectRef idx="2">
+            <a:schemeClr val="accent1"/>
+          </a:effectRef>
+          <a:fontRef idx="minor">
+            <a:schemeClr val="lt1"/>
+          </a:fontRef>
+        </p:style>
+        <p:txBody>
+          <a:bodyPr rtlCol="0" anchor="ctr"/>
+          <a:lstStyle/>
+          <a:p>
+            <a:pPr algn="ctr"/>
+          </a:p>
+        </p:txBody>
+      </p:sp>
+      <p:sp>
+        <p:nvSpPr>
+          <p:cNvPr id="11" name="TextBox 10"/>
+          <p:cNvSpPr txBox="1"/>
+          <p:nvPr/>
+        </p:nvSpPr>
+        <p:spPr>
+          <a:xfrm>
+            <a:off x="3429000" y="1783080"/>
+            <a:ext cx="2011680" cy="320040"/>
+          </a:xfrm>
+          <a:prstGeom prst="rect">
+            <a:avLst/>
+          </a:prstGeom>
+          <a:noFill/>
+        </p:spPr>
+        <p:txBody>
+          <a:bodyPr wrap="square">
+            <a:spAutoFit/>
+          </a:bodyPr>
+          <a:lstStyle/>
+          <a:p>
+            <a:pPr algn="l">
+              <a:defRPr sz="1200" b="0" i="0">
+                <a:solidFill>
+                  <a:srgbClr val="CCCCCC"/>
+                </a:solidFill>
+                <a:latin typeface="Calibri"/>
+              </a:defRPr>
+            </a:pPr>
+            <a:r>
+              <a:t>Data Mentah</a:t>
+            </a:r>
+          </a:p>
+        </p:txBody>
+      </p:sp>
+      <p:sp>
+        <p:nvSpPr>
+          <p:cNvPr id="12" name="TextBox 11"/>
+          <p:cNvSpPr txBox="1"/>
+          <p:nvPr/>
+        </p:nvSpPr>
+        <p:spPr>
+          <a:xfrm>
+            <a:off x="3429000" y="2103120"/>
+            <a:ext cx="2011680" cy="548640"/>
+          </a:xfrm>
+          <a:prstGeom prst="rect">
+            <a:avLst/>
+          </a:prstGeom>
+          <a:noFill/>
+        </p:spPr>
+        <p:txBody>
+          <a:bodyPr wrap="square">
+            <a:spAutoFit/>
+          </a:bodyPr>
+          <a:lstStyle/>
+          <a:p>
+            <a:pPr algn="l">
+              <a:defRPr sz="2400" b="1" i="0">
+                <a:solidFill>
+                  <a:srgbClr val="FFFFFF"/>
+                </a:solidFill>
+                <a:latin typeface="Calibri"/>
+              </a:defRPr>
+            </a:pPr>
+            <a:r>
+              <a:t>1.514</a:t>
+            </a:r>
+          </a:p>
+        </p:txBody>
+      </p:sp>
+      <p:sp>
+        <p:nvSpPr>
+          <p:cNvPr id="13" name="Rectangle 12"/>
+          <p:cNvSpPr/>
+          <p:nvPr/>
+        </p:nvSpPr>
+        <p:spPr>
+          <a:xfrm>
+            <a:off x="5852160" y="1645920"/>
+            <a:ext cx="2286000" cy="1097280"/>
+          </a:xfrm>
+          <a:prstGeom prst="rect">
+            <a:avLst/>
+          </a:prstGeom>
+          <a:solidFill>
+            <a:srgbClr val="22223A"/>
+          </a:solidFill>
+          <a:ln>
+            <a:noFill/>
+          </a:ln>
+        </p:spPr>
+        <p:style>
+          <a:lnRef idx="1">
+            <a:schemeClr val="accent1"/>
+          </a:lnRef>
+          <a:fillRef idx="3">
+            <a:schemeClr val="accent1"/>
+          </a:fillRef>
+          <a:effectRef idx="2">
+            <a:schemeClr val="accent1"/>
+          </a:effectRef>
+          <a:fontRef idx="minor">
+            <a:schemeClr val="lt1"/>
+          </a:fontRef>
+        </p:style>
+        <p:txBody>
+          <a:bodyPr rtlCol="0" anchor="ctr"/>
+          <a:lstStyle/>
+          <a:p>
+            <a:pPr algn="ctr"/>
+          </a:p>
+        </p:txBody>
+      </p:sp>
+      <p:sp>
+        <p:nvSpPr>
+          <p:cNvPr id="14" name="Rectangle 13"/>
+          <p:cNvSpPr/>
+          <p:nvPr/>
+        </p:nvSpPr>
+        <p:spPr>
+          <a:xfrm>
+            <a:off x="5852160" y="1645920"/>
+            <a:ext cx="2286000" cy="45720"/>
+          </a:xfrm>
+          <a:prstGeom prst="rect">
+            <a:avLst/>
+          </a:prstGeom>
+          <a:solidFill>
+            <a:srgbClr val="2ECC71"/>
+          </a:solidFill>
+          <a:ln>
+            <a:noFill/>
+          </a:ln>
+        </p:spPr>
+        <p:style>
+          <a:lnRef idx="1">
+            <a:schemeClr val="accent1"/>
+          </a:lnRef>
+          <a:fillRef idx="3">
+            <a:schemeClr val="accent1"/>
+          </a:fillRef>
+          <a:effectRef idx="2">
+            <a:schemeClr val="accent1"/>
+          </a:effectRef>
+          <a:fontRef idx="minor">
+            <a:schemeClr val="lt1"/>
+          </a:fontRef>
+        </p:style>
+        <p:txBody>
+          <a:bodyPr rtlCol="0" anchor="ctr"/>
+          <a:lstStyle/>
+          <a:p>
+            <a:pPr algn="ctr"/>
+          </a:p>
+        </p:txBody>
+      </p:sp>
+      <p:sp>
+        <p:nvSpPr>
+          <p:cNvPr id="15" name="TextBox 14"/>
+          <p:cNvSpPr txBox="1"/>
+          <p:nvPr/>
+        </p:nvSpPr>
+        <p:spPr>
+          <a:xfrm>
+            <a:off x="5989320" y="1783080"/>
+            <a:ext cx="2011680" cy="320040"/>
+          </a:xfrm>
+          <a:prstGeom prst="rect">
+            <a:avLst/>
+          </a:prstGeom>
+          <a:noFill/>
+        </p:spPr>
+        <p:txBody>
+          <a:bodyPr wrap="square">
+            <a:spAutoFit/>
+          </a:bodyPr>
+          <a:lstStyle/>
+          <a:p>
+            <a:pPr algn="l">
+              <a:defRPr sz="1200" b="0" i="0">
+                <a:solidFill>
+                  <a:srgbClr val="CCCCCC"/>
+                </a:solidFill>
+                <a:latin typeface="Calibri"/>
+              </a:defRPr>
+            </a:pPr>
+            <a:r>
+              <a:t>Data Bersih</a:t>
+            </a:r>
+          </a:p>
+        </p:txBody>
+      </p:sp>
+      <p:sp>
+        <p:nvSpPr>
+          <p:cNvPr id="16" name="TextBox 15"/>
+          <p:cNvSpPr txBox="1"/>
+          <p:nvPr/>
+        </p:nvSpPr>
+        <p:spPr>
+          <a:xfrm>
+            <a:off x="5989320" y="2103120"/>
+            <a:ext cx="2011680" cy="548640"/>
+          </a:xfrm>
+          <a:prstGeom prst="rect">
+            <a:avLst/>
+          </a:prstGeom>
+          <a:noFill/>
+        </p:spPr>
+        <p:txBody>
+          <a:bodyPr wrap="square">
+            <a:spAutoFit/>
+          </a:bodyPr>
+          <a:lstStyle/>
+          <a:p>
+            <a:pPr algn="l">
+              <a:defRPr sz="2400" b="1" i="0">
+                <a:solidFill>
+                  <a:srgbClr val="FFFFFF"/>
+                </a:solidFill>
+                <a:latin typeface="Calibri"/>
+              </a:defRPr>
+            </a:pPr>
+            <a:r>
+              <a:t>1.322</a:t>
+            </a:r>
+          </a:p>
+        </p:txBody>
+      </p:sp>
+      <p:sp>
+        <p:nvSpPr>
+          <p:cNvPr id="17" name="Rectangle 16"/>
+          <p:cNvSpPr/>
+          <p:nvPr/>
+        </p:nvSpPr>
+        <p:spPr>
+          <a:xfrm>
+            <a:off x="8412480" y="1645920"/>
+            <a:ext cx="2286000" cy="1097280"/>
+          </a:xfrm>
+          <a:prstGeom prst="rect">
+            <a:avLst/>
+          </a:prstGeom>
+          <a:solidFill>
+            <a:srgbClr val="22223A"/>
+          </a:solidFill>
+          <a:ln>
+            <a:noFill/>
+          </a:ln>
+        </p:spPr>
+        <p:style>
+          <a:lnRef idx="1">
+            <a:schemeClr val="accent1"/>
+          </a:lnRef>
+          <a:fillRef idx="3">
+            <a:schemeClr val="accent1"/>
+          </a:fillRef>
+          <a:effectRef idx="2">
+            <a:schemeClr val="accent1"/>
+          </a:effectRef>
+          <a:fontRef idx="minor">
+            <a:schemeClr val="lt1"/>
+          </a:fontRef>
+        </p:style>
+        <p:txBody>
+          <a:bodyPr rtlCol="0" anchor="ctr"/>
+          <a:lstStyle/>
+          <a:p>
+            <a:pPr algn="ctr"/>
+          </a:p>
+        </p:txBody>
+      </p:sp>
+      <p:sp>
+        <p:nvSpPr>
+          <p:cNvPr id="18" name="Rectangle 17"/>
+          <p:cNvSpPr/>
+          <p:nvPr/>
+        </p:nvSpPr>
+        <p:spPr>
+          <a:xfrm>
+            <a:off x="8412480" y="1645920"/>
+            <a:ext cx="2286000" cy="45720"/>
+          </a:xfrm>
+          <a:prstGeom prst="rect">
+            <a:avLst/>
+          </a:prstGeom>
+          <a:solidFill>
+            <a:srgbClr val="FFD600"/>
+          </a:solidFill>
+          <a:ln>
+            <a:noFill/>
+          </a:ln>
+        </p:spPr>
+        <p:style>
+          <a:lnRef idx="1">
+            <a:schemeClr val="accent1"/>
+          </a:lnRef>
+          <a:fillRef idx="3">
+            <a:schemeClr val="accent1"/>
+          </a:fillRef>
+          <a:effectRef idx="2">
+            <a:schemeClr val="accent1"/>
+          </a:effectRef>
+          <a:fontRef idx="minor">
+            <a:schemeClr val="lt1"/>
+          </a:fontRef>
+        </p:style>
+        <p:txBody>
+          <a:bodyPr rtlCol="0" anchor="ctr"/>
+          <a:lstStyle/>
+          <a:p>
+            <a:pPr algn="ctr"/>
+          </a:p>
+        </p:txBody>
+      </p:sp>
+      <p:sp>
+        <p:nvSpPr>
+          <p:cNvPr id="19" name="TextBox 18"/>
+          <p:cNvSpPr txBox="1"/>
+          <p:nvPr/>
+        </p:nvSpPr>
+        <p:spPr>
+          <a:xfrm>
+            <a:off x="8549640" y="1783080"/>
+            <a:ext cx="2011680" cy="320040"/>
+          </a:xfrm>
+          <a:prstGeom prst="rect">
+            <a:avLst/>
+          </a:prstGeom>
+          <a:noFill/>
+        </p:spPr>
+        <p:txBody>
+          <a:bodyPr wrap="square">
+            <a:spAutoFit/>
+          </a:bodyPr>
+          <a:lstStyle/>
+          <a:p>
+            <a:pPr algn="l">
+              <a:defRPr sz="1200" b="0" i="0">
+                <a:solidFill>
+                  <a:srgbClr val="CCCCCC"/>
+                </a:solidFill>
+                <a:latin typeface="Calibri"/>
+              </a:defRPr>
+            </a:pPr>
+            <a:r>
+              <a:t>Atribut</a:t>
+            </a:r>
+          </a:p>
+        </p:txBody>
+      </p:sp>
+      <p:sp>
+        <p:nvSpPr>
+          <p:cNvPr id="20" name="TextBox 19"/>
+          <p:cNvSpPr txBox="1"/>
+          <p:nvPr/>
+        </p:nvSpPr>
+        <p:spPr>
+          <a:xfrm>
+            <a:off x="8549640" y="2103120"/>
+            <a:ext cx="2011680" cy="548640"/>
+          </a:xfrm>
+          <a:prstGeom prst="rect">
+            <a:avLst/>
+          </a:prstGeom>
+          <a:noFill/>
+        </p:spPr>
+        <p:txBody>
+          <a:bodyPr wrap="square">
+            <a:spAutoFit/>
+          </a:bodyPr>
+          <a:lstStyle/>
+          <a:p>
+            <a:pPr algn="l">
+              <a:defRPr sz="2400" b="1" i="0">
+                <a:solidFill>
+                  <a:srgbClr val="FFFFFF"/>
+                </a:solidFill>
+                <a:latin typeface="Calibri"/>
+              </a:defRPr>
+            </a:pPr>
+            <a:r>
+              <a:t>9 Kolom</a:t>
+            </a:r>
+          </a:p>
+        </p:txBody>
+      </p:sp>
+      <p:sp>
+        <p:nvSpPr>
+          <p:cNvPr id="21" name="TextBox 20"/>
+          <p:cNvSpPr txBox="1"/>
+          <p:nvPr/>
+        </p:nvSpPr>
+        <p:spPr>
+          <a:xfrm>
+            <a:off x="731520" y="3200400"/>
+            <a:ext cx="10515600" cy="457200"/>
+          </a:xfrm>
+          <a:prstGeom prst="rect">
+            <a:avLst/>
+          </a:prstGeom>
+          <a:noFill/>
+        </p:spPr>
+        <p:txBody>
+          <a:bodyPr wrap="square">
+            <a:spAutoFit/>
+          </a:bodyPr>
+          <a:lstStyle/>
+          <a:p>
+            <a:pPr algn="l">
+              <a:defRPr sz="1500" b="0" i="0">
+                <a:solidFill>
+                  <a:srgbClr val="FFFFFF"/>
+                </a:solidFill>
+                <a:latin typeface="Calibri"/>
+              </a:defRPr>
+            </a:pPr>
+            <a:r>
+              <a:t>•  Tools: Python requests + BeautifulSoup</a:t>
+            </a:r>
+          </a:p>
+        </p:txBody>
+      </p:sp>
+      <p:sp>
+        <p:nvSpPr>
+          <p:cNvPr id="22" name="TextBox 21"/>
+          <p:cNvSpPr txBox="1"/>
+          <p:nvPr/>
+        </p:nvSpPr>
+        <p:spPr>
+          <a:xfrm>
+            <a:off x="731520" y="3639312"/>
+            <a:ext cx="10515600" cy="457200"/>
+          </a:xfrm>
+          <a:prstGeom prst="rect">
+            <a:avLst/>
+          </a:prstGeom>
+          <a:noFill/>
+        </p:spPr>
+        <p:txBody>
+          <a:bodyPr wrap="square">
+            <a:spAutoFit/>
+          </a:bodyPr>
+          <a:lstStyle/>
+          <a:p>
+            <a:pPr algn="l">
+              <a:defRPr sz="1500" b="0" i="0">
+                <a:solidFill>
+                  <a:srgbClr val="FFFFFF"/>
+                </a:solidFill>
+                <a:latin typeface="Calibri"/>
+              </a:defRPr>
+            </a:pPr>
+            <a:r>
+              <a:t>•  Rate limiting &amp; user-agent rotation untuk menghormati akses website</a:t>
+            </a:r>
+          </a:p>
+        </p:txBody>
+      </p:sp>
+      <p:sp>
+        <p:nvSpPr>
+          <p:cNvPr id="23" name="TextBox 22"/>
+          <p:cNvSpPr txBox="1"/>
+          <p:nvPr/>
+        </p:nvSpPr>
+        <p:spPr>
+          <a:xfrm>
+            <a:off x="731520" y="4078224"/>
+            <a:ext cx="10515600" cy="457200"/>
+          </a:xfrm>
+          <a:prstGeom prst="rect">
+            <a:avLst/>
+          </a:prstGeom>
+          <a:noFill/>
+        </p:spPr>
+        <p:txBody>
+          <a:bodyPr wrap="square">
+            <a:spAutoFit/>
+          </a:bodyPr>
+          <a:lstStyle/>
+          <a:p>
+            <a:pPr algn="l">
+              <a:defRPr sz="1500" b="0" i="0">
+                <a:solidFill>
+                  <a:srgbClr val="FFFFFF"/>
+                </a:solidFill>
+                <a:latin typeface="Calibri"/>
+              </a:defRPr>
+            </a:pPr>
+            <a:r>
+              <a:t>•  Atribut: title, author, binding, in_stock, category, price, original_price, discount</a:t>
+            </a:r>
+          </a:p>
+        </p:txBody>
+      </p:sp>
+      <p:sp>
+        <p:nvSpPr>
+          <p:cNvPr id="24" name="TextBox 23"/>
+          <p:cNvSpPr txBox="1"/>
+          <p:nvPr/>
+        </p:nvSpPr>
+        <p:spPr>
+          <a:xfrm>
+            <a:off x="731520" y="4517136"/>
+            <a:ext cx="10515600" cy="457200"/>
+          </a:xfrm>
+          <a:prstGeom prst="rect">
+            <a:avLst/>
+          </a:prstGeom>
+          <a:noFill/>
+        </p:spPr>
+        <p:txBody>
+          <a:bodyPr wrap="square">
+            <a:spAutoFit/>
+          </a:bodyPr>
+          <a:lstStyle/>
+          <a:p>
+            <a:pPr algn="l">
+              <a:defRPr sz="1500" b="0" i="0">
+                <a:solidFill>
+                  <a:srgbClr val="FFFFFF"/>
+                </a:solidFill>
+                <a:latin typeface="Calibri"/>
+              </a:defRPr>
+            </a:pPr>
+            <a:r>
+              <a:t>•  8 kategori: Fiction, Business, Children's, Computer, Biographies, Arts, Cooking, Health</a:t>
+            </a:r>
+          </a:p>
+        </p:txBody>
+      </p:sp>
+      <p:sp>
+        <p:nvSpPr>
+          <p:cNvPr id="25" name="TextBox 24"/>
+          <p:cNvSpPr txBox="1"/>
+          <p:nvPr/>
+        </p:nvSpPr>
+        <p:spPr>
+          <a:xfrm>
+            <a:off x="731520" y="4956048"/>
+            <a:ext cx="10515600" cy="457200"/>
+          </a:xfrm>
+          <a:prstGeom prst="rect">
+            <a:avLst/>
+          </a:prstGeom>
+          <a:noFill/>
+        </p:spPr>
+        <p:txBody>
+          <a:bodyPr wrap="square">
+            <a:spAutoFit/>
+          </a:bodyPr>
+          <a:lstStyle/>
+          <a:p>
+            <a:pPr algn="l">
+              <a:defRPr sz="1500" b="0" i="0">
+                <a:solidFill>
+                  <a:srgbClr val="FFFFFF"/>
+                </a:solidFill>
+                <a:latin typeface="Calibri"/>
+              </a:defRPr>
+            </a:pPr>
+            <a:r>
+              <a:t>•  Data disimpan CSV → siap cleaning &amp; analisis</a:t>
+            </a:r>
+          </a:p>
+        </p:txBody>
+      </p:sp>
     </p:spTree>
   </p:cSld>
   <p:clrMapOvr>
@@ -7058,7 +5284,7 @@
               </a:defRPr>
             </a:pPr>
             <a:r>
-              <a:t>Data Acquisition: Web Scraping</a:t>
+              <a:t>Statistika Deskriptif &amp; Distribusi Data</a:t>
             </a:r>
           </a:p>
         </p:txBody>
@@ -7071,7 +5297,7 @@
         </p:nvSpPr>
         <p:spPr>
           <a:xfrm>
-            <a:off x="731520" y="1417320"/>
+            <a:off x="731520" y="1051560"/>
             <a:ext cx="1371600" cy="54864"/>
           </a:xfrm>
           <a:prstGeom prst="rect">
@@ -7108,50 +5334,14 @@
       </p:sp>
       <p:sp>
         <p:nvSpPr>
-          <p:cNvPr id="4" name="TextBox 3"/>
-          <p:cNvSpPr txBox="1"/>
-          <p:nvPr/>
-        </p:nvSpPr>
-        <p:spPr>
-          <a:xfrm>
-            <a:off x="731520" y="1097280"/>
-            <a:ext cx="10058400" cy="457200"/>
-          </a:xfrm>
-          <a:prstGeom prst="rect">
-            <a:avLst/>
-          </a:prstGeom>
-          <a:noFill/>
-        </p:spPr>
-        <p:txBody>
-          <a:bodyPr wrap="square">
-            <a:spAutoFit/>
-          </a:bodyPr>
-          <a:lstStyle/>
-          <a:p>
-            <a:pPr algn="l">
-              <a:defRPr sz="1600" b="0" i="1">
-                <a:solidFill>
-                  <a:srgbClr val="CCCCCC"/>
-                </a:solidFill>
-                <a:latin typeface="Calibri"/>
-              </a:defRPr>
-            </a:pPr>
-            <a:r>
-              <a:t>Mengumpulkan data dari Periplus.com</a:t>
-            </a:r>
-          </a:p>
-        </p:txBody>
-      </p:sp>
-      <p:sp>
-        <p:nvSpPr>
-          <p:cNvPr id="5" name="Rectangle 4"/>
+          <p:cNvPr id="4" name="Rectangle 3"/>
           <p:cNvSpPr/>
           <p:nvPr/>
         </p:nvSpPr>
         <p:spPr>
           <a:xfrm>
             <a:off x="731520" y="1645920"/>
-            <a:ext cx="2286000" cy="1097280"/>
+            <a:ext cx="2468880" cy="1097280"/>
           </a:xfrm>
           <a:prstGeom prst="rect">
             <a:avLst/>
@@ -7187,14 +5377,14 @@
       </p:sp>
       <p:sp>
         <p:nvSpPr>
-          <p:cNvPr id="6" name="Rectangle 5"/>
+          <p:cNvPr id="5" name="Rectangle 4"/>
           <p:cNvSpPr/>
           <p:nvPr/>
         </p:nvSpPr>
         <p:spPr>
           <a:xfrm>
             <a:off x="731520" y="1645920"/>
-            <a:ext cx="2286000" cy="45720"/>
+            <a:ext cx="2468880" cy="45720"/>
           </a:xfrm>
           <a:prstGeom prst="rect">
             <a:avLst/>
@@ -7230,50 +5420,50 @@
       </p:sp>
       <p:sp>
         <p:nvSpPr>
+          <p:cNvPr id="6" name="TextBox 5"/>
+          <p:cNvSpPr txBox="1"/>
+          <p:nvPr/>
+        </p:nvSpPr>
+        <p:spPr>
+          <a:xfrm>
+            <a:off x="868680" y="1783080"/>
+            <a:ext cx="2194560" cy="320040"/>
+          </a:xfrm>
+          <a:prstGeom prst="rect">
+            <a:avLst/>
+          </a:prstGeom>
+          <a:noFill/>
+        </p:spPr>
+        <p:txBody>
+          <a:bodyPr wrap="square">
+            <a:spAutoFit/>
+          </a:bodyPr>
+          <a:lstStyle/>
+          <a:p>
+            <a:pPr algn="l">
+              <a:defRPr sz="1200" b="0" i="0">
+                <a:solidFill>
+                  <a:srgbClr val="CCCCCC"/>
+                </a:solidFill>
+                <a:latin typeface="Calibri"/>
+              </a:defRPr>
+            </a:pPr>
+            <a:r>
+              <a:t>Mean Harga</a:t>
+            </a:r>
+          </a:p>
+        </p:txBody>
+      </p:sp>
+      <p:sp>
+        <p:nvSpPr>
           <p:cNvPr id="7" name="TextBox 6"/>
           <p:cNvSpPr txBox="1"/>
           <p:nvPr/>
         </p:nvSpPr>
         <p:spPr>
           <a:xfrm>
-            <a:off x="868680" y="1783080"/>
-            <a:ext cx="2011680" cy="365760"/>
-          </a:xfrm>
-          <a:prstGeom prst="rect">
-            <a:avLst/>
-          </a:prstGeom>
-          <a:noFill/>
-        </p:spPr>
-        <p:txBody>
-          <a:bodyPr wrap="square">
-            <a:spAutoFit/>
-          </a:bodyPr>
-          <a:lstStyle/>
-          <a:p>
-            <a:pPr algn="l">
-              <a:defRPr sz="1200" b="0" i="0">
-                <a:solidFill>
-                  <a:srgbClr val="CCCCCC"/>
-                </a:solidFill>
-                <a:latin typeface="Calibri"/>
-              </a:defRPr>
-            </a:pPr>
-            <a:r>
-              <a:t>Halaman Discrape</a:t>
-            </a:r>
-          </a:p>
-        </p:txBody>
-      </p:sp>
-      <p:sp>
-        <p:nvSpPr>
-          <p:cNvPr id="8" name="TextBox 7"/>
-          <p:cNvSpPr txBox="1"/>
-          <p:nvPr/>
-        </p:nvSpPr>
-        <p:spPr>
-          <a:xfrm>
             <a:off x="868680" y="2103120"/>
-            <a:ext cx="2011680" cy="548640"/>
+            <a:ext cx="2194560" cy="548640"/>
           </a:xfrm>
           <a:prstGeom prst="rect">
             <a:avLst/>
@@ -7295,21 +5485,21 @@
               </a:defRPr>
             </a:pPr>
             <a:r>
-              <a:t>8 Kategori</a:t>
-            </a:r>
-          </a:p>
-        </p:txBody>
-      </p:sp>
-      <p:sp>
-        <p:nvSpPr>
-          <p:cNvPr id="9" name="Rectangle 8"/>
+              <a:t>Rp 376.616</a:t>
+            </a:r>
+          </a:p>
+        </p:txBody>
+      </p:sp>
+      <p:sp>
+        <p:nvSpPr>
+          <p:cNvPr id="8" name="Rectangle 7"/>
           <p:cNvSpPr/>
           <p:nvPr/>
         </p:nvSpPr>
         <p:spPr>
           <a:xfrm>
-            <a:off x="3291840" y="1645920"/>
-            <a:ext cx="2286000" cy="1097280"/>
+            <a:off x="3474720" y="1645920"/>
+            <a:ext cx="2468880" cy="1097280"/>
           </a:xfrm>
           <a:prstGeom prst="rect">
             <a:avLst/>
@@ -7345,14 +5535,172 @@
       </p:sp>
       <p:sp>
         <p:nvSpPr>
-          <p:cNvPr id="10" name="Rectangle 9"/>
+          <p:cNvPr id="9" name="Rectangle 8"/>
           <p:cNvSpPr/>
           <p:nvPr/>
         </p:nvSpPr>
         <p:spPr>
           <a:xfrm>
-            <a:off x="3291840" y="1645920"/>
-            <a:ext cx="2286000" cy="45720"/>
+            <a:off x="3474720" y="1645920"/>
+            <a:ext cx="2468880" cy="45720"/>
+          </a:xfrm>
+          <a:prstGeom prst="rect">
+            <a:avLst/>
+          </a:prstGeom>
+          <a:solidFill>
+            <a:srgbClr val="2ECC71"/>
+          </a:solidFill>
+          <a:ln>
+            <a:noFill/>
+          </a:ln>
+        </p:spPr>
+        <p:style>
+          <a:lnRef idx="1">
+            <a:schemeClr val="accent1"/>
+          </a:lnRef>
+          <a:fillRef idx="3">
+            <a:schemeClr val="accent1"/>
+          </a:fillRef>
+          <a:effectRef idx="2">
+            <a:schemeClr val="accent1"/>
+          </a:effectRef>
+          <a:fontRef idx="minor">
+            <a:schemeClr val="lt1"/>
+          </a:fontRef>
+        </p:style>
+        <p:txBody>
+          <a:bodyPr rtlCol="0" anchor="ctr"/>
+          <a:lstStyle/>
+          <a:p>
+            <a:pPr algn="ctr"/>
+          </a:p>
+        </p:txBody>
+      </p:sp>
+      <p:sp>
+        <p:nvSpPr>
+          <p:cNvPr id="10" name="TextBox 9"/>
+          <p:cNvSpPr txBox="1"/>
+          <p:nvPr/>
+        </p:nvSpPr>
+        <p:spPr>
+          <a:xfrm>
+            <a:off x="3611880" y="1783080"/>
+            <a:ext cx="2194560" cy="320040"/>
+          </a:xfrm>
+          <a:prstGeom prst="rect">
+            <a:avLst/>
+          </a:prstGeom>
+          <a:noFill/>
+        </p:spPr>
+        <p:txBody>
+          <a:bodyPr wrap="square">
+            <a:spAutoFit/>
+          </a:bodyPr>
+          <a:lstStyle/>
+          <a:p>
+            <a:pPr algn="l">
+              <a:defRPr sz="1200" b="0" i="0">
+                <a:solidFill>
+                  <a:srgbClr val="CCCCCC"/>
+                </a:solidFill>
+                <a:latin typeface="Calibri"/>
+              </a:defRPr>
+            </a:pPr>
+            <a:r>
+              <a:t>Median</a:t>
+            </a:r>
+          </a:p>
+        </p:txBody>
+      </p:sp>
+      <p:sp>
+        <p:nvSpPr>
+          <p:cNvPr id="11" name="TextBox 10"/>
+          <p:cNvSpPr txBox="1"/>
+          <p:nvPr/>
+        </p:nvSpPr>
+        <p:spPr>
+          <a:xfrm>
+            <a:off x="3611880" y="2103120"/>
+            <a:ext cx="2194560" cy="548640"/>
+          </a:xfrm>
+          <a:prstGeom prst="rect">
+            <a:avLst/>
+          </a:prstGeom>
+          <a:noFill/>
+        </p:spPr>
+        <p:txBody>
+          <a:bodyPr wrap="square">
+            <a:spAutoFit/>
+          </a:bodyPr>
+          <a:lstStyle/>
+          <a:p>
+            <a:pPr algn="l">
+              <a:defRPr sz="2400" b="1" i="0">
+                <a:solidFill>
+                  <a:srgbClr val="FFFFFF"/>
+                </a:solidFill>
+                <a:latin typeface="Calibri"/>
+              </a:defRPr>
+            </a:pPr>
+            <a:r>
+              <a:t>Rp 299.000</a:t>
+            </a:r>
+          </a:p>
+        </p:txBody>
+      </p:sp>
+      <p:sp>
+        <p:nvSpPr>
+          <p:cNvPr id="12" name="Rectangle 11"/>
+          <p:cNvSpPr/>
+          <p:nvPr/>
+        </p:nvSpPr>
+        <p:spPr>
+          <a:xfrm>
+            <a:off x="6217920" y="1645920"/>
+            <a:ext cx="2468880" cy="1097280"/>
+          </a:xfrm>
+          <a:prstGeom prst="rect">
+            <a:avLst/>
+          </a:prstGeom>
+          <a:solidFill>
+            <a:srgbClr val="22223A"/>
+          </a:solidFill>
+          <a:ln>
+            <a:noFill/>
+          </a:ln>
+        </p:spPr>
+        <p:style>
+          <a:lnRef idx="1">
+            <a:schemeClr val="accent1"/>
+          </a:lnRef>
+          <a:fillRef idx="3">
+            <a:schemeClr val="accent1"/>
+          </a:fillRef>
+          <a:effectRef idx="2">
+            <a:schemeClr val="accent1"/>
+          </a:effectRef>
+          <a:fontRef idx="minor">
+            <a:schemeClr val="lt1"/>
+          </a:fontRef>
+        </p:style>
+        <p:txBody>
+          <a:bodyPr rtlCol="0" anchor="ctr"/>
+          <a:lstStyle/>
+          <a:p>
+            <a:pPr algn="ctr"/>
+          </a:p>
+        </p:txBody>
+      </p:sp>
+      <p:sp>
+        <p:nvSpPr>
+          <p:cNvPr id="13" name="Rectangle 12"/>
+          <p:cNvSpPr/>
+          <p:nvPr/>
+        </p:nvSpPr>
+        <p:spPr>
+          <a:xfrm>
+            <a:off x="6217920" y="1645920"/>
+            <a:ext cx="2468880" cy="45720"/>
           </a:xfrm>
           <a:prstGeom prst="rect">
             <a:avLst/>
@@ -7388,14 +5736,14 @@
       </p:sp>
       <p:sp>
         <p:nvSpPr>
-          <p:cNvPr id="11" name="TextBox 10"/>
-          <p:cNvSpPr txBox="1"/>
-          <p:nvPr/>
-        </p:nvSpPr>
-        <p:spPr>
-          <a:xfrm>
-            <a:off x="3429000" y="1783080"/>
-            <a:ext cx="2011680" cy="365760"/>
+          <p:cNvPr id="14" name="TextBox 13"/>
+          <p:cNvSpPr txBox="1"/>
+          <p:nvPr/>
+        </p:nvSpPr>
+        <p:spPr>
+          <a:xfrm>
+            <a:off x="6355080" y="1783080"/>
+            <a:ext cx="2194560" cy="320040"/>
           </a:xfrm>
           <a:prstGeom prst="rect">
             <a:avLst/>
@@ -7417,21 +5765,21 @@
               </a:defRPr>
             </a:pPr>
             <a:r>
-              <a:t>Data Mentah</a:t>
-            </a:r>
-          </a:p>
-        </p:txBody>
-      </p:sp>
-      <p:sp>
-        <p:nvSpPr>
-          <p:cNvPr id="12" name="TextBox 11"/>
-          <p:cNvSpPr txBox="1"/>
-          <p:nvPr/>
-        </p:nvSpPr>
-        <p:spPr>
-          <a:xfrm>
-            <a:off x="3429000" y="2103120"/>
-            <a:ext cx="2011680" cy="548640"/>
+              <a:t>Std. Dev</a:t>
+            </a:r>
+          </a:p>
+        </p:txBody>
+      </p:sp>
+      <p:sp>
+        <p:nvSpPr>
+          <p:cNvPr id="15" name="TextBox 14"/>
+          <p:cNvSpPr txBox="1"/>
+          <p:nvPr/>
+        </p:nvSpPr>
+        <p:spPr>
+          <a:xfrm>
+            <a:off x="6355080" y="2103120"/>
+            <a:ext cx="2194560" cy="548640"/>
           </a:xfrm>
           <a:prstGeom prst="rect">
             <a:avLst/>
@@ -7453,21 +5801,21 @@
               </a:defRPr>
             </a:pPr>
             <a:r>
-              <a:t>1.514 Rows</a:t>
-            </a:r>
-          </a:p>
-        </p:txBody>
-      </p:sp>
-      <p:sp>
-        <p:nvSpPr>
-          <p:cNvPr id="13" name="Rectangle 12"/>
+              <a:t>Rp 263.249</a:t>
+            </a:r>
+          </a:p>
+        </p:txBody>
+      </p:sp>
+      <p:sp>
+        <p:nvSpPr>
+          <p:cNvPr id="16" name="Rectangle 15"/>
           <p:cNvSpPr/>
           <p:nvPr/>
         </p:nvSpPr>
         <p:spPr>
           <a:xfrm>
-            <a:off x="5852160" y="1645920"/>
-            <a:ext cx="2286000" cy="1097280"/>
+            <a:off x="8961120" y="1645920"/>
+            <a:ext cx="2468880" cy="1097280"/>
           </a:xfrm>
           <a:prstGeom prst="rect">
             <a:avLst/>
@@ -7503,20 +5851,20 @@
       </p:sp>
       <p:sp>
         <p:nvSpPr>
-          <p:cNvPr id="14" name="Rectangle 13"/>
+          <p:cNvPr id="17" name="Rectangle 16"/>
           <p:cNvSpPr/>
           <p:nvPr/>
         </p:nvSpPr>
         <p:spPr>
           <a:xfrm>
-            <a:off x="5852160" y="1645920"/>
-            <a:ext cx="2286000" cy="45720"/>
+            <a:off x="8961120" y="1645920"/>
+            <a:ext cx="2468880" cy="45720"/>
           </a:xfrm>
           <a:prstGeom prst="rect">
             <a:avLst/>
           </a:prstGeom>
           <a:solidFill>
-            <a:srgbClr val="2ECC71"/>
+            <a:srgbClr val="E74C3C"/>
           </a:solidFill>
           <a:ln>
             <a:noFill/>
@@ -7546,14 +5894,14 @@
       </p:sp>
       <p:sp>
         <p:nvSpPr>
-          <p:cNvPr id="15" name="TextBox 14"/>
-          <p:cNvSpPr txBox="1"/>
-          <p:nvPr/>
-        </p:nvSpPr>
-        <p:spPr>
-          <a:xfrm>
-            <a:off x="5989320" y="1783080"/>
-            <a:ext cx="2011680" cy="365760"/>
+          <p:cNvPr id="18" name="TextBox 17"/>
+          <p:cNvSpPr txBox="1"/>
+          <p:nvPr/>
+        </p:nvSpPr>
+        <p:spPr>
+          <a:xfrm>
+            <a:off x="9098280" y="1783080"/>
+            <a:ext cx="2194560" cy="320040"/>
           </a:xfrm>
           <a:prstGeom prst="rect">
             <a:avLst/>
@@ -7575,21 +5923,21 @@
               </a:defRPr>
             </a:pPr>
             <a:r>
-              <a:t>Data Bersih</a:t>
-            </a:r>
-          </a:p>
-        </p:txBody>
-      </p:sp>
-      <p:sp>
-        <p:nvSpPr>
-          <p:cNvPr id="16" name="TextBox 15"/>
-          <p:cNvSpPr txBox="1"/>
-          <p:nvPr/>
-        </p:nvSpPr>
-        <p:spPr>
-          <a:xfrm>
-            <a:off x="5989320" y="2103120"/>
-            <a:ext cx="2011680" cy="548640"/>
+              <a:t>Range</a:t>
+            </a:r>
+          </a:p>
+        </p:txBody>
+      </p:sp>
+      <p:sp>
+        <p:nvSpPr>
+          <p:cNvPr id="19" name="TextBox 18"/>
+          <p:cNvSpPr txBox="1"/>
+          <p:nvPr/>
+        </p:nvSpPr>
+        <p:spPr>
+          <a:xfrm>
+            <a:off x="9098280" y="2103120"/>
+            <a:ext cx="2194560" cy="548640"/>
           </a:xfrm>
           <a:prstGeom prst="rect">
             <a:avLst/>
@@ -7611,313 +5959,59 @@
               </a:defRPr>
             </a:pPr>
             <a:r>
-              <a:t>1.322 Rows</a:t>
-            </a:r>
-          </a:p>
-        </p:txBody>
-      </p:sp>
-      <p:sp>
-        <p:nvSpPr>
-          <p:cNvPr id="17" name="Rectangle 16"/>
-          <p:cNvSpPr/>
-          <p:nvPr/>
-        </p:nvSpPr>
-        <p:spPr>
-          <a:xfrm>
-            <a:off x="8412480" y="1645920"/>
-            <a:ext cx="2286000" cy="1097280"/>
-          </a:xfrm>
-          <a:prstGeom prst="rect">
-            <a:avLst/>
-          </a:prstGeom>
-          <a:solidFill>
-            <a:srgbClr val="22223A"/>
-          </a:solidFill>
-          <a:ln>
-            <a:noFill/>
-          </a:ln>
-        </p:spPr>
-        <p:style>
-          <a:lnRef idx="1">
-            <a:schemeClr val="accent1"/>
-          </a:lnRef>
-          <a:fillRef idx="3">
-            <a:schemeClr val="accent1"/>
-          </a:fillRef>
-          <a:effectRef idx="2">
-            <a:schemeClr val="accent1"/>
-          </a:effectRef>
-          <a:fontRef idx="minor">
-            <a:schemeClr val="lt1"/>
-          </a:fontRef>
-        </p:style>
-        <p:txBody>
-          <a:bodyPr rtlCol="0" anchor="ctr"/>
-          <a:lstStyle/>
-          <a:p>
-            <a:pPr algn="ctr"/>
-          </a:p>
-        </p:txBody>
-      </p:sp>
-      <p:sp>
-        <p:nvSpPr>
-          <p:cNvPr id="18" name="Rectangle 17"/>
-          <p:cNvSpPr/>
-          <p:nvPr/>
-        </p:nvSpPr>
-        <p:spPr>
-          <a:xfrm>
-            <a:off x="8412480" y="1645920"/>
-            <a:ext cx="2286000" cy="45720"/>
-          </a:xfrm>
-          <a:prstGeom prst="rect">
-            <a:avLst/>
-          </a:prstGeom>
-          <a:solidFill>
-            <a:srgbClr val="FFD600"/>
-          </a:solidFill>
-          <a:ln>
-            <a:noFill/>
-          </a:ln>
-        </p:spPr>
-        <p:style>
-          <a:lnRef idx="1">
-            <a:schemeClr val="accent1"/>
-          </a:lnRef>
-          <a:fillRef idx="3">
-            <a:schemeClr val="accent1"/>
-          </a:fillRef>
-          <a:effectRef idx="2">
-            <a:schemeClr val="accent1"/>
-          </a:effectRef>
-          <a:fontRef idx="minor">
-            <a:schemeClr val="lt1"/>
-          </a:fontRef>
-        </p:style>
-        <p:txBody>
-          <a:bodyPr rtlCol="0" anchor="ctr"/>
-          <a:lstStyle/>
-          <a:p>
-            <a:pPr algn="ctr"/>
-          </a:p>
-        </p:txBody>
-      </p:sp>
-      <p:sp>
-        <p:nvSpPr>
-          <p:cNvPr id="19" name="TextBox 18"/>
-          <p:cNvSpPr txBox="1"/>
-          <p:nvPr/>
-        </p:nvSpPr>
-        <p:spPr>
-          <a:xfrm>
-            <a:off x="8549640" y="1783080"/>
-            <a:ext cx="2011680" cy="365760"/>
-          </a:xfrm>
-          <a:prstGeom prst="rect">
-            <a:avLst/>
-          </a:prstGeom>
-          <a:noFill/>
-        </p:spPr>
-        <p:txBody>
-          <a:bodyPr wrap="square">
-            <a:spAutoFit/>
-          </a:bodyPr>
-          <a:lstStyle/>
-          <a:p>
-            <a:pPr algn="l">
-              <a:defRPr sz="1200" b="0" i="0">
-                <a:solidFill>
-                  <a:srgbClr val="CCCCCC"/>
-                </a:solidFill>
-                <a:latin typeface="Calibri"/>
-              </a:defRPr>
-            </a:pPr>
-            <a:r>
-              <a:t>Atribut</a:t>
-            </a:r>
-          </a:p>
-        </p:txBody>
-      </p:sp>
-      <p:sp>
-        <p:nvSpPr>
-          <p:cNvPr id="20" name="TextBox 19"/>
-          <p:cNvSpPr txBox="1"/>
-          <p:nvPr/>
-        </p:nvSpPr>
-        <p:spPr>
-          <a:xfrm>
-            <a:off x="8549640" y="2103120"/>
-            <a:ext cx="2011680" cy="548640"/>
-          </a:xfrm>
-          <a:prstGeom prst="rect">
-            <a:avLst/>
-          </a:prstGeom>
-          <a:noFill/>
-        </p:spPr>
-        <p:txBody>
-          <a:bodyPr wrap="square">
-            <a:spAutoFit/>
-          </a:bodyPr>
-          <a:lstStyle/>
-          <a:p>
-            <a:pPr algn="l">
-              <a:defRPr sz="2400" b="1" i="0">
-                <a:solidFill>
-                  <a:srgbClr val="FFFFFF"/>
-                </a:solidFill>
-                <a:latin typeface="Calibri"/>
-              </a:defRPr>
-            </a:pPr>
-            <a:r>
-              <a:t>9 Kolom</a:t>
-            </a:r>
-          </a:p>
-        </p:txBody>
-      </p:sp>
-      <p:sp>
-        <p:nvSpPr>
-          <p:cNvPr id="21" name="TextBox 20"/>
-          <p:cNvSpPr txBox="1"/>
-          <p:nvPr/>
-        </p:nvSpPr>
-        <p:spPr>
-          <a:xfrm>
-            <a:off x="731520" y="3200400"/>
-            <a:ext cx="10515600" cy="457200"/>
-          </a:xfrm>
-          <a:prstGeom prst="rect">
-            <a:avLst/>
-          </a:prstGeom>
-          <a:noFill/>
-        </p:spPr>
-        <p:txBody>
-          <a:bodyPr wrap="square">
-            <a:spAutoFit/>
-          </a:bodyPr>
-          <a:lstStyle/>
-          <a:p>
-            <a:pPr algn="l">
-              <a:defRPr sz="1600" b="0" i="0">
-                <a:solidFill>
-                  <a:srgbClr val="FFFFFF"/>
-                </a:solidFill>
-                <a:latin typeface="Calibri"/>
-              </a:defRPr>
-            </a:pPr>
-            <a:r>
-              <a:t>•  Tools: Python requests + BeautifulSoup</a:t>
-            </a:r>
-          </a:p>
-        </p:txBody>
-      </p:sp>
-      <p:sp>
-        <p:nvSpPr>
-          <p:cNvPr id="22" name="TextBox 21"/>
-          <p:cNvSpPr txBox="1"/>
-          <p:nvPr/>
-        </p:nvSpPr>
-        <p:spPr>
-          <a:xfrm>
-            <a:off x="731520" y="3703320"/>
-            <a:ext cx="10515600" cy="457200"/>
-          </a:xfrm>
-          <a:prstGeom prst="rect">
-            <a:avLst/>
-          </a:prstGeom>
-          <a:noFill/>
-        </p:spPr>
-        <p:txBody>
-          <a:bodyPr wrap="square">
-            <a:spAutoFit/>
-          </a:bodyPr>
-          <a:lstStyle/>
-          <a:p>
-            <a:pPr algn="l">
-              <a:defRPr sz="1600" b="0" i="0">
-                <a:solidFill>
-                  <a:srgbClr val="FFFFFF"/>
-                </a:solidFill>
-                <a:latin typeface="Calibri"/>
-              </a:defRPr>
-            </a:pPr>
-            <a:r>
-              <a:t>•  Rate limiting &amp; user-agent rotation untuk menghormati kebijakan akses</a:t>
-            </a:r>
-          </a:p>
-        </p:txBody>
-      </p:sp>
-      <p:sp>
-        <p:nvSpPr>
-          <p:cNvPr id="23" name="TextBox 22"/>
-          <p:cNvSpPr txBox="1"/>
-          <p:nvPr/>
-        </p:nvSpPr>
-        <p:spPr>
-          <a:xfrm>
-            <a:off x="731520" y="4206240"/>
-            <a:ext cx="10515600" cy="457200"/>
-          </a:xfrm>
-          <a:prstGeom prst="rect">
-            <a:avLst/>
-          </a:prstGeom>
-          <a:noFill/>
-        </p:spPr>
-        <p:txBody>
-          <a:bodyPr wrap="square">
-            <a:spAutoFit/>
-          </a:bodyPr>
-          <a:lstStyle/>
-          <a:p>
-            <a:pPr algn="l">
-              <a:defRPr sz="1600" b="0" i="0">
-                <a:solidFill>
-                  <a:srgbClr val="FFFFFF"/>
-                </a:solidFill>
-                <a:latin typeface="Calibri"/>
-              </a:defRPr>
-            </a:pPr>
-            <a:r>
-              <a:t>•  Atribut: title, author, binding, in_stock, category, product_url, price, original_price, discount</a:t>
-            </a:r>
-          </a:p>
-        </p:txBody>
-      </p:sp>
-      <p:sp>
-        <p:nvSpPr>
-          <p:cNvPr id="24" name="TextBox 23"/>
-          <p:cNvSpPr txBox="1"/>
-          <p:nvPr/>
-        </p:nvSpPr>
-        <p:spPr>
-          <a:xfrm>
-            <a:off x="731520" y="4709160"/>
-            <a:ext cx="10515600" cy="457200"/>
-          </a:xfrm>
-          <a:prstGeom prst="rect">
-            <a:avLst/>
-          </a:prstGeom>
-          <a:noFill/>
-        </p:spPr>
-        <p:txBody>
-          <a:bodyPr wrap="square">
-            <a:spAutoFit/>
-          </a:bodyPr>
-          <a:lstStyle/>
-          <a:p>
-            <a:pPr algn="l">
-              <a:defRPr sz="1600" b="0" i="0">
-                <a:solidFill>
-                  <a:srgbClr val="FFFFFF"/>
-                </a:solidFill>
-                <a:latin typeface="Calibri"/>
-              </a:defRPr>
-            </a:pPr>
-            <a:r>
-              <a:t>•  Data disimpan dalam format CSV untuk reproducibility</a:t>
-            </a:r>
-          </a:p>
-        </p:txBody>
-      </p:sp>
+              <a:t>29K - 1.97M</a:t>
+            </a:r>
+          </a:p>
+        </p:txBody>
+      </p:sp>
+      <p:pic>
+        <p:nvPicPr>
+          <p:cNvPr id="20" name="Picture 19" descr="distribusi_kategori.png"/>
+          <p:cNvPicPr>
+            <a:picLocks noChangeAspect="1"/>
+          </p:cNvPicPr>
+          <p:nvPr/>
+        </p:nvPicPr>
+        <p:blipFill>
+          <a:blip r:embed="rId2"/>
+          <a:stretch>
+            <a:fillRect/>
+          </a:stretch>
+        </p:blipFill>
+        <p:spPr>
+          <a:xfrm>
+            <a:off x="274320" y="3017520"/>
+            <a:ext cx="5669280" cy="1965350"/>
+          </a:xfrm>
+          <a:prstGeom prst="rect">
+            <a:avLst/>
+          </a:prstGeom>
+        </p:spPr>
+      </p:pic>
+      <p:pic>
+        <p:nvPicPr>
+          <p:cNvPr id="21" name="Picture 20" descr="distribusi_harga.png"/>
+          <p:cNvPicPr>
+            <a:picLocks noChangeAspect="1"/>
+          </p:cNvPicPr>
+          <p:nvPr/>
+        </p:nvPicPr>
+        <p:blipFill>
+          <a:blip r:embed="rId3"/>
+          <a:stretch>
+            <a:fillRect/>
+          </a:stretch>
+        </p:blipFill>
+        <p:spPr>
+          <a:xfrm>
+            <a:off x="6217920" y="3017520"/>
+            <a:ext cx="5669280" cy="1987114"/>
+          </a:xfrm>
+          <a:prstGeom prst="rect">
+            <a:avLst/>
+          </a:prstGeom>
+        </p:spPr>
+      </p:pic>
     </p:spTree>
   </p:cSld>
   <p:clrMapOvr>
@@ -7975,7 +6069,7 @@
               </a:defRPr>
             </a:pPr>
             <a:r>
-              <a:t>Data Management &amp; Cleaning</a:t>
+              <a:t>Analisis Regresi Linier Berganda</a:t>
             </a:r>
           </a:p>
         </p:txBody>
@@ -7988,7 +6082,7 @@
         </p:nvSpPr>
         <p:spPr>
           <a:xfrm>
-            <a:off x="731520" y="1417320"/>
+            <a:off x="731520" y="1051560"/>
             <a:ext cx="1371600" cy="54864"/>
           </a:xfrm>
           <a:prstGeom prst="rect">
@@ -8031,22 +6125,22 @@
         </p:nvSpPr>
         <p:spPr>
           <a:xfrm>
-            <a:off x="731520" y="1097280"/>
-            <a:ext cx="10058400" cy="457200"/>
-          </a:xfrm>
-          <a:prstGeom prst="rect">
-            <a:avLst/>
-          </a:prstGeom>
-          <a:noFill/>
-        </p:spPr>
-        <p:txBody>
-          <a:bodyPr wrap="square">
-            <a:spAutoFit/>
-          </a:bodyPr>
-          <a:lstStyle/>
-          <a:p>
-            <a:pPr algn="l">
-              <a:defRPr sz="1600" b="0" i="1">
+            <a:off x="731520" y="1143000"/>
+            <a:ext cx="10058400" cy="365760"/>
+          </a:xfrm>
+          <a:prstGeom prst="rect">
+            <a:avLst/>
+          </a:prstGeom>
+          <a:noFill/>
+        </p:spPr>
+        <p:txBody>
+          <a:bodyPr wrap="square">
+            <a:spAutoFit/>
+          </a:bodyPr>
+          <a:lstStyle/>
+          <a:p>
+            <a:pPr algn="l">
+              <a:defRPr sz="1500" b="0" i="1">
                 <a:solidFill>
                   <a:srgbClr val="CCCCCC"/>
                 </a:solidFill>
@@ -8054,14 +6148,14 @@
               </a:defRPr>
             </a:pPr>
             <a:r>
-              <a:t>Dari data mentah ke data siap analisis</a:t>
+              <a:t>Prediksi harga jual bersih</a:t>
             </a:r>
           </a:p>
         </p:txBody>
       </p:sp>
       <p:pic>
         <p:nvPicPr>
-          <p:cNvPr id="5" name="Picture 4" descr="outlier_detection.png"/>
+          <p:cNvPr id="5" name="Picture 4" descr="regresi_linier.png"/>
           <p:cNvPicPr>
             <a:picLocks noChangeAspect="1"/>
           </p:cNvPicPr>
@@ -8075,8 +6169,8 @@
         </p:blipFill>
         <p:spPr>
           <a:xfrm>
-            <a:off x="5943600" y="1463040"/>
-            <a:ext cx="5303520" cy="1619838"/>
+            <a:off x="457200" y="1554480"/>
+            <a:ext cx="5029200" cy="1370231"/>
           </a:xfrm>
           <a:prstGeom prst="rect">
             <a:avLst/>
@@ -8085,28 +6179,150 @@
       </p:pic>
       <p:sp>
         <p:nvSpPr>
-          <p:cNvPr id="6" name="TextBox 5"/>
-          <p:cNvSpPr txBox="1"/>
-          <p:nvPr/>
-        </p:nvSpPr>
-        <p:spPr>
-          <a:xfrm>
-            <a:off x="731520" y="1645920"/>
-            <a:ext cx="10515600" cy="457200"/>
-          </a:xfrm>
-          <a:prstGeom prst="rect">
-            <a:avLst/>
-          </a:prstGeom>
-          <a:noFill/>
-        </p:spPr>
-        <p:txBody>
-          <a:bodyPr wrap="square">
-            <a:spAutoFit/>
-          </a:bodyPr>
-          <a:lstStyle/>
-          <a:p>
-            <a:pPr algn="l">
-              <a:defRPr sz="1500" b="0" i="0">
+          <p:cNvPr id="6" name="Rectangle 5"/>
+          <p:cNvSpPr/>
+          <p:nvPr/>
+        </p:nvSpPr>
+        <p:spPr>
+          <a:xfrm>
+            <a:off x="5943600" y="1645920"/>
+            <a:ext cx="2468880" cy="1097280"/>
+          </a:xfrm>
+          <a:prstGeom prst="rect">
+            <a:avLst/>
+          </a:prstGeom>
+          <a:solidFill>
+            <a:srgbClr val="22223A"/>
+          </a:solidFill>
+          <a:ln>
+            <a:noFill/>
+          </a:ln>
+        </p:spPr>
+        <p:style>
+          <a:lnRef idx="1">
+            <a:schemeClr val="accent1"/>
+          </a:lnRef>
+          <a:fillRef idx="3">
+            <a:schemeClr val="accent1"/>
+          </a:fillRef>
+          <a:effectRef idx="2">
+            <a:schemeClr val="accent1"/>
+          </a:effectRef>
+          <a:fontRef idx="minor">
+            <a:schemeClr val="lt1"/>
+          </a:fontRef>
+        </p:style>
+        <p:txBody>
+          <a:bodyPr rtlCol="0" anchor="ctr"/>
+          <a:lstStyle/>
+          <a:p>
+            <a:pPr algn="ctr"/>
+          </a:p>
+        </p:txBody>
+      </p:sp>
+      <p:sp>
+        <p:nvSpPr>
+          <p:cNvPr id="7" name="Rectangle 6"/>
+          <p:cNvSpPr/>
+          <p:nvPr/>
+        </p:nvSpPr>
+        <p:spPr>
+          <a:xfrm>
+            <a:off x="5943600" y="1645920"/>
+            <a:ext cx="2468880" cy="45720"/>
+          </a:xfrm>
+          <a:prstGeom prst="rect">
+            <a:avLst/>
+          </a:prstGeom>
+          <a:solidFill>
+            <a:srgbClr val="2ECC71"/>
+          </a:solidFill>
+          <a:ln>
+            <a:noFill/>
+          </a:ln>
+        </p:spPr>
+        <p:style>
+          <a:lnRef idx="1">
+            <a:schemeClr val="accent1"/>
+          </a:lnRef>
+          <a:fillRef idx="3">
+            <a:schemeClr val="accent1"/>
+          </a:fillRef>
+          <a:effectRef idx="2">
+            <a:schemeClr val="accent1"/>
+          </a:effectRef>
+          <a:fontRef idx="minor">
+            <a:schemeClr val="lt1"/>
+          </a:fontRef>
+        </p:style>
+        <p:txBody>
+          <a:bodyPr rtlCol="0" anchor="ctr"/>
+          <a:lstStyle/>
+          <a:p>
+            <a:pPr algn="ctr"/>
+          </a:p>
+        </p:txBody>
+      </p:sp>
+      <p:sp>
+        <p:nvSpPr>
+          <p:cNvPr id="8" name="TextBox 7"/>
+          <p:cNvSpPr txBox="1"/>
+          <p:nvPr/>
+        </p:nvSpPr>
+        <p:spPr>
+          <a:xfrm>
+            <a:off x="6080760" y="1783080"/>
+            <a:ext cx="2194560" cy="320040"/>
+          </a:xfrm>
+          <a:prstGeom prst="rect">
+            <a:avLst/>
+          </a:prstGeom>
+          <a:noFill/>
+        </p:spPr>
+        <p:txBody>
+          <a:bodyPr wrap="square">
+            <a:spAutoFit/>
+          </a:bodyPr>
+          <a:lstStyle/>
+          <a:p>
+            <a:pPr algn="l">
+              <a:defRPr sz="1200" b="0" i="0">
+                <a:solidFill>
+                  <a:srgbClr val="CCCCCC"/>
+                </a:solidFill>
+                <a:latin typeface="Calibri"/>
+              </a:defRPr>
+            </a:pPr>
+            <a:r>
+              <a:t>R² Score</a:t>
+            </a:r>
+          </a:p>
+        </p:txBody>
+      </p:sp>
+      <p:sp>
+        <p:nvSpPr>
+          <p:cNvPr id="9" name="TextBox 8"/>
+          <p:cNvSpPr txBox="1"/>
+          <p:nvPr/>
+        </p:nvSpPr>
+        <p:spPr>
+          <a:xfrm>
+            <a:off x="6080760" y="2103120"/>
+            <a:ext cx="2194560" cy="548640"/>
+          </a:xfrm>
+          <a:prstGeom prst="rect">
+            <a:avLst/>
+          </a:prstGeom>
+          <a:noFill/>
+        </p:spPr>
+        <p:txBody>
+          <a:bodyPr wrap="square">
+            <a:spAutoFit/>
+          </a:bodyPr>
+          <a:lstStyle/>
+          <a:p>
+            <a:pPr algn="l">
+              <a:defRPr sz="2400" b="1" i="0">
                 <a:solidFill>
                   <a:srgbClr val="FFFFFF"/>
                 </a:solidFill>
@@ -8114,35 +6330,157 @@
               </a:defRPr>
             </a:pPr>
             <a:r>
-              <a:t>•  Konversi tipe data: hapus simbol Rp &amp; titik ribuan → float64</a:t>
-            </a:r>
-          </a:p>
-        </p:txBody>
-      </p:sp>
-      <p:sp>
-        <p:nvSpPr>
-          <p:cNvPr id="7" name="TextBox 6"/>
-          <p:cNvSpPr txBox="1"/>
-          <p:nvPr/>
-        </p:nvSpPr>
-        <p:spPr>
-          <a:xfrm>
-            <a:off x="731520" y="2148840"/>
-            <a:ext cx="10515600" cy="457200"/>
-          </a:xfrm>
-          <a:prstGeom prst="rect">
-            <a:avLst/>
-          </a:prstGeom>
-          <a:noFill/>
-        </p:spPr>
-        <p:txBody>
-          <a:bodyPr wrap="square">
-            <a:spAutoFit/>
-          </a:bodyPr>
-          <a:lstStyle/>
-          <a:p>
-            <a:pPr algn="l">
-              <a:defRPr sz="1500" b="0" i="0">
+              <a:t>0,990</a:t>
+            </a:r>
+          </a:p>
+        </p:txBody>
+      </p:sp>
+      <p:sp>
+        <p:nvSpPr>
+          <p:cNvPr id="10" name="Rectangle 9"/>
+          <p:cNvSpPr/>
+          <p:nvPr/>
+        </p:nvSpPr>
+        <p:spPr>
+          <a:xfrm>
+            <a:off x="8686800" y="1645920"/>
+            <a:ext cx="2468880" cy="1097280"/>
+          </a:xfrm>
+          <a:prstGeom prst="rect">
+            <a:avLst/>
+          </a:prstGeom>
+          <a:solidFill>
+            <a:srgbClr val="22223A"/>
+          </a:solidFill>
+          <a:ln>
+            <a:noFill/>
+          </a:ln>
+        </p:spPr>
+        <p:style>
+          <a:lnRef idx="1">
+            <a:schemeClr val="accent1"/>
+          </a:lnRef>
+          <a:fillRef idx="3">
+            <a:schemeClr val="accent1"/>
+          </a:fillRef>
+          <a:effectRef idx="2">
+            <a:schemeClr val="accent1"/>
+          </a:effectRef>
+          <a:fontRef idx="minor">
+            <a:schemeClr val="lt1"/>
+          </a:fontRef>
+        </p:style>
+        <p:txBody>
+          <a:bodyPr rtlCol="0" anchor="ctr"/>
+          <a:lstStyle/>
+          <a:p>
+            <a:pPr algn="ctr"/>
+          </a:p>
+        </p:txBody>
+      </p:sp>
+      <p:sp>
+        <p:nvSpPr>
+          <p:cNvPr id="11" name="Rectangle 10"/>
+          <p:cNvSpPr/>
+          <p:nvPr/>
+        </p:nvSpPr>
+        <p:spPr>
+          <a:xfrm>
+            <a:off x="8686800" y="1645920"/>
+            <a:ext cx="2468880" cy="45720"/>
+          </a:xfrm>
+          <a:prstGeom prst="rect">
+            <a:avLst/>
+          </a:prstGeom>
+          <a:solidFill>
+            <a:srgbClr val="0096C7"/>
+          </a:solidFill>
+          <a:ln>
+            <a:noFill/>
+          </a:ln>
+        </p:spPr>
+        <p:style>
+          <a:lnRef idx="1">
+            <a:schemeClr val="accent1"/>
+          </a:lnRef>
+          <a:fillRef idx="3">
+            <a:schemeClr val="accent1"/>
+          </a:fillRef>
+          <a:effectRef idx="2">
+            <a:schemeClr val="accent1"/>
+          </a:effectRef>
+          <a:fontRef idx="minor">
+            <a:schemeClr val="lt1"/>
+          </a:fontRef>
+        </p:style>
+        <p:txBody>
+          <a:bodyPr rtlCol="0" anchor="ctr"/>
+          <a:lstStyle/>
+          <a:p>
+            <a:pPr algn="ctr"/>
+          </a:p>
+        </p:txBody>
+      </p:sp>
+      <p:sp>
+        <p:nvSpPr>
+          <p:cNvPr id="12" name="TextBox 11"/>
+          <p:cNvSpPr txBox="1"/>
+          <p:nvPr/>
+        </p:nvSpPr>
+        <p:spPr>
+          <a:xfrm>
+            <a:off x="8823960" y="1783080"/>
+            <a:ext cx="2194560" cy="320040"/>
+          </a:xfrm>
+          <a:prstGeom prst="rect">
+            <a:avLst/>
+          </a:prstGeom>
+          <a:noFill/>
+        </p:spPr>
+        <p:txBody>
+          <a:bodyPr wrap="square">
+            <a:spAutoFit/>
+          </a:bodyPr>
+          <a:lstStyle/>
+          <a:p>
+            <a:pPr algn="l">
+              <a:defRPr sz="1200" b="0" i="0">
+                <a:solidFill>
+                  <a:srgbClr val="CCCCCC"/>
+                </a:solidFill>
+                <a:latin typeface="Calibri"/>
+              </a:defRPr>
+            </a:pPr>
+            <a:r>
+              <a:t>Durbin-Watson</a:t>
+            </a:r>
+          </a:p>
+        </p:txBody>
+      </p:sp>
+      <p:sp>
+        <p:nvSpPr>
+          <p:cNvPr id="13" name="TextBox 12"/>
+          <p:cNvSpPr txBox="1"/>
+          <p:nvPr/>
+        </p:nvSpPr>
+        <p:spPr>
+          <a:xfrm>
+            <a:off x="8823960" y="2103120"/>
+            <a:ext cx="2194560" cy="548640"/>
+          </a:xfrm>
+          <a:prstGeom prst="rect">
+            <a:avLst/>
+          </a:prstGeom>
+          <a:noFill/>
+        </p:spPr>
+        <p:txBody>
+          <a:bodyPr wrap="square">
+            <a:spAutoFit/>
+          </a:bodyPr>
+          <a:lstStyle/>
+          <a:p>
+            <a:pPr algn="l">
+              <a:defRPr sz="2400" b="1" i="0">
                 <a:solidFill>
                   <a:srgbClr val="FFFFFF"/>
                 </a:solidFill>
@@ -8150,35 +6488,59 @@
               </a:defRPr>
             </a:pPr>
             <a:r>
-              <a:t>•  Standarisasi teks: kolom title &amp; author</a:t>
-            </a:r>
-          </a:p>
-        </p:txBody>
-      </p:sp>
-      <p:sp>
-        <p:nvSpPr>
-          <p:cNvPr id="8" name="TextBox 7"/>
-          <p:cNvSpPr txBox="1"/>
-          <p:nvPr/>
-        </p:nvSpPr>
-        <p:spPr>
-          <a:xfrm>
-            <a:off x="731520" y="2651760"/>
-            <a:ext cx="10515600" cy="457200"/>
-          </a:xfrm>
-          <a:prstGeom prst="rect">
-            <a:avLst/>
-          </a:prstGeom>
-          <a:noFill/>
-        </p:spPr>
-        <p:txBody>
-          <a:bodyPr wrap="square">
-            <a:spAutoFit/>
-          </a:bodyPr>
-          <a:lstStyle/>
-          <a:p>
-            <a:pPr algn="l">
-              <a:defRPr sz="1500" b="0" i="0">
+              <a:t>1,94</a:t>
+            </a:r>
+          </a:p>
+        </p:txBody>
+      </p:sp>
+      <p:pic>
+        <p:nvPicPr>
+          <p:cNvPr id="14" name="Picture 13" descr="regression_result.png"/>
+          <p:cNvPicPr>
+            <a:picLocks noChangeAspect="1"/>
+          </p:cNvPicPr>
+          <p:nvPr/>
+        </p:nvPicPr>
+        <p:blipFill>
+          <a:blip r:embed="rId3"/>
+          <a:stretch>
+            <a:fillRect/>
+          </a:stretch>
+        </p:blipFill>
+        <p:spPr>
+          <a:xfrm>
+            <a:off x="5943600" y="3017520"/>
+            <a:ext cx="5029200" cy="441089"/>
+          </a:xfrm>
+          <a:prstGeom prst="rect">
+            <a:avLst/>
+          </a:prstGeom>
+        </p:spPr>
+      </p:pic>
+      <p:sp>
+        <p:nvSpPr>
+          <p:cNvPr id="15" name="TextBox 14"/>
+          <p:cNvSpPr txBox="1"/>
+          <p:nvPr/>
+        </p:nvSpPr>
+        <p:spPr>
+          <a:xfrm>
+            <a:off x="5943600" y="4206240"/>
+            <a:ext cx="5029200" cy="365760"/>
+          </a:xfrm>
+          <a:prstGeom prst="rect">
+            <a:avLst/>
+          </a:prstGeom>
+          <a:noFill/>
+        </p:spPr>
+        <p:txBody>
+          <a:bodyPr wrap="square">
+            <a:spAutoFit/>
+          </a:bodyPr>
+          <a:lstStyle/>
+          <a:p>
+            <a:pPr algn="l">
+              <a:defRPr sz="1300" b="0" i="0">
                 <a:solidFill>
                   <a:srgbClr val="FFFFFF"/>
                 </a:solidFill>
@@ -8186,35 +6548,35 @@
               </a:defRPr>
             </a:pPr>
             <a:r>
-              <a:t>•  Hapus 192 rekaman duplikat &amp; invalid</a:t>
-            </a:r>
-          </a:p>
-        </p:txBody>
-      </p:sp>
-      <p:sp>
-        <p:nvSpPr>
-          <p:cNvPr id="9" name="TextBox 8"/>
-          <p:cNvSpPr txBox="1"/>
-          <p:nvPr/>
-        </p:nvSpPr>
-        <p:spPr>
-          <a:xfrm>
-            <a:off x="731520" y="3154680"/>
-            <a:ext cx="10515600" cy="457200"/>
-          </a:xfrm>
-          <a:prstGeom prst="rect">
-            <a:avLst/>
-          </a:prstGeom>
-          <a:noFill/>
-        </p:spPr>
-        <p:txBody>
-          <a:bodyPr wrap="square">
-            <a:spAutoFit/>
-          </a:bodyPr>
-          <a:lstStyle/>
-          <a:p>
-            <a:pPr algn="l">
-              <a:defRPr sz="1500" b="0" i="0">
+              <a:t>→  +Rp 1.000 harga asli → +Rp 964 harga jual</a:t>
+            </a:r>
+          </a:p>
+        </p:txBody>
+      </p:sp>
+      <p:sp>
+        <p:nvSpPr>
+          <p:cNvPr id="16" name="TextBox 15"/>
+          <p:cNvSpPr txBox="1"/>
+          <p:nvPr/>
+        </p:nvSpPr>
+        <p:spPr>
+          <a:xfrm>
+            <a:off x="5943600" y="4617720"/>
+            <a:ext cx="5029200" cy="365760"/>
+          </a:xfrm>
+          <a:prstGeom prst="rect">
+            <a:avLst/>
+          </a:prstGeom>
+          <a:noFill/>
+        </p:spPr>
+        <p:txBody>
+          <a:bodyPr wrap="square">
+            <a:spAutoFit/>
+          </a:bodyPr>
+          <a:lstStyle/>
+          <a:p>
+            <a:pPr algn="l">
+              <a:defRPr sz="1300" b="0" i="0">
                 <a:solidFill>
                   <a:srgbClr val="FFFFFF"/>
                 </a:solidFill>
@@ -8222,35 +6584,35 @@
               </a:defRPr>
             </a:pPr>
             <a:r>
-              <a:t>•  Deteksi outlier: metode IQR (flagged, tidak dihapus)</a:t>
-            </a:r>
-          </a:p>
-        </p:txBody>
-      </p:sp>
-      <p:sp>
-        <p:nvSpPr>
-          <p:cNvPr id="10" name="TextBox 9"/>
-          <p:cNvSpPr txBox="1"/>
-          <p:nvPr/>
-        </p:nvSpPr>
-        <p:spPr>
-          <a:xfrm>
-            <a:off x="731520" y="3657600"/>
-            <a:ext cx="10515600" cy="457200"/>
-          </a:xfrm>
-          <a:prstGeom prst="rect">
-            <a:avLst/>
-          </a:prstGeom>
-          <a:noFill/>
-        </p:spPr>
-        <p:txBody>
-          <a:bodyPr wrap="square">
-            <a:spAutoFit/>
-          </a:bodyPr>
-          <a:lstStyle/>
-          <a:p>
-            <a:pPr algn="l">
-              <a:defRPr sz="1500" b="0" i="0">
+              <a:t>→  +1% diskon → -Rp 3.756 harga jual</a:t>
+            </a:r>
+          </a:p>
+        </p:txBody>
+      </p:sp>
+      <p:sp>
+        <p:nvSpPr>
+          <p:cNvPr id="17" name="TextBox 16"/>
+          <p:cNvSpPr txBox="1"/>
+          <p:nvPr/>
+        </p:nvSpPr>
+        <p:spPr>
+          <a:xfrm>
+            <a:off x="5943600" y="5029200"/>
+            <a:ext cx="5029200" cy="365760"/>
+          </a:xfrm>
+          <a:prstGeom prst="rect">
+            <a:avLst/>
+          </a:prstGeom>
+          <a:noFill/>
+        </p:spPr>
+        <p:txBody>
+          <a:bodyPr wrap="square">
+            <a:spAutoFit/>
+          </a:bodyPr>
+          <a:lstStyle/>
+          <a:p>
+            <a:pPr algn="l">
+              <a:defRPr sz="1300" b="0" i="0">
                 <a:solidFill>
                   <a:srgbClr val="FFFFFF"/>
                 </a:solidFill>
@@ -8258,35 +6620,35 @@
               </a:defRPr>
             </a:pPr>
             <a:r>
-              <a:t>•  Penanganan missing values: forward fill &amp; median imputation</a:t>
-            </a:r>
-          </a:p>
-        </p:txBody>
-      </p:sp>
-      <p:sp>
-        <p:nvSpPr>
-          <p:cNvPr id="11" name="TextBox 10"/>
-          <p:cNvSpPr txBox="1"/>
-          <p:nvPr/>
-        </p:nvSpPr>
-        <p:spPr>
-          <a:xfrm>
-            <a:off x="731520" y="4160520"/>
-            <a:ext cx="10515600" cy="457200"/>
-          </a:xfrm>
-          <a:prstGeom prst="rect">
-            <a:avLst/>
-          </a:prstGeom>
-          <a:noFill/>
-        </p:spPr>
-        <p:txBody>
-          <a:bodyPr wrap="square">
-            <a:spAutoFit/>
-          </a:bodyPr>
-          <a:lstStyle/>
-          <a:p>
-            <a:pPr algn="l">
-              <a:defRPr sz="1500" b="0" i="0">
+              <a:t>→  Konstanta Rp 14.971 (base markup)</a:t>
+            </a:r>
+          </a:p>
+        </p:txBody>
+      </p:sp>
+      <p:sp>
+        <p:nvSpPr>
+          <p:cNvPr id="18" name="TextBox 17"/>
+          <p:cNvSpPr txBox="1"/>
+          <p:nvPr/>
+        </p:nvSpPr>
+        <p:spPr>
+          <a:xfrm>
+            <a:off x="5943600" y="5440680"/>
+            <a:ext cx="5029200" cy="365760"/>
+          </a:xfrm>
+          <a:prstGeom prst="rect">
+            <a:avLst/>
+          </a:prstGeom>
+          <a:noFill/>
+        </p:spPr>
+        <p:txBody>
+          <a:bodyPr wrap="square">
+            <a:spAutoFit/>
+          </a:bodyPr>
+          <a:lstStyle/>
+          <a:p>
+            <a:pPr algn="l">
+              <a:defRPr sz="1300" b="0" i="0">
                 <a:solidFill>
                   <a:srgbClr val="FFFFFF"/>
                 </a:solidFill>
@@ -8294,7 +6656,7 @@
               </a:defRPr>
             </a:pPr>
             <a:r>
-              <a:t>•  Hasil: 1.322 baris data bersih tanpa null/NaN</a:t>
+              <a:t>→  Residual normal, tidak ada autokorelasi</a:t>
             </a:r>
           </a:p>
         </p:txBody>
@@ -8356,7 +6718,7 @@
               </a:defRPr>
             </a:pPr>
             <a:r>
-              <a:t>Distribusi Data</a:t>
+              <a:t>Interpretasi Model Regresi</a:t>
             </a:r>
           </a:p>
         </p:txBody>
@@ -8369,7 +6731,7 @@
         </p:nvSpPr>
         <p:spPr>
           <a:xfrm>
-            <a:off x="731520" y="1417320"/>
+            <a:off x="731520" y="1051560"/>
             <a:ext cx="1371600" cy="54864"/>
           </a:xfrm>
           <a:prstGeom prst="rect">
@@ -8412,22 +6774,22 @@
         </p:nvSpPr>
         <p:spPr>
           <a:xfrm>
-            <a:off x="731520" y="1097280"/>
-            <a:ext cx="10058400" cy="457200"/>
-          </a:xfrm>
-          <a:prstGeom prst="rect">
-            <a:avLst/>
-          </a:prstGeom>
-          <a:noFill/>
-        </p:spPr>
-        <p:txBody>
-          <a:bodyPr wrap="square">
-            <a:spAutoFit/>
-          </a:bodyPr>
-          <a:lstStyle/>
-          <a:p>
-            <a:pPr algn="l">
-              <a:defRPr sz="1600" b="0" i="1">
+            <a:off x="731520" y="1143000"/>
+            <a:ext cx="10058400" cy="365760"/>
+          </a:xfrm>
+          <a:prstGeom prst="rect">
+            <a:avLst/>
+          </a:prstGeom>
+          <a:noFill/>
+        </p:spPr>
+        <p:txBody>
+          <a:bodyPr wrap="square">
+            <a:spAutoFit/>
+          </a:bodyPr>
+          <a:lstStyle/>
+          <a:p>
+            <a:pPr algn="l">
+              <a:defRPr sz="1500" b="0" i="1">
                 <a:solidFill>
                   <a:srgbClr val="CCCCCC"/>
                 </a:solidFill>
@@ -8435,59 +6797,227 @@
               </a:defRPr>
             </a:pPr>
             <a:r>
-              <a:t>Kategori &amp; harga produk</a:t>
-            </a:r>
-          </a:p>
-        </p:txBody>
-      </p:sp>
-      <p:pic>
-        <p:nvPicPr>
-          <p:cNvPr id="5" name="Picture 4" descr="distribusi_kategori.png"/>
-          <p:cNvPicPr>
-            <a:picLocks noChangeAspect="1"/>
-          </p:cNvPicPr>
-          <p:nvPr/>
-        </p:nvPicPr>
-        <p:blipFill>
-          <a:blip r:embed="rId2"/>
-          <a:stretch>
-            <a:fillRect/>
-          </a:stretch>
-        </p:blipFill>
-        <p:spPr>
-          <a:xfrm>
-            <a:off x="274320" y="1463040"/>
-            <a:ext cx="5669280" cy="1965350"/>
-          </a:xfrm>
-          <a:prstGeom prst="rect">
-            <a:avLst/>
-          </a:prstGeom>
-        </p:spPr>
-      </p:pic>
-      <p:pic>
-        <p:nvPicPr>
-          <p:cNvPr id="6" name="Picture 5" descr="distribusi_harga.png"/>
-          <p:cNvPicPr>
-            <a:picLocks noChangeAspect="1"/>
-          </p:cNvPicPr>
-          <p:nvPr/>
-        </p:nvPicPr>
-        <p:blipFill>
-          <a:blip r:embed="rId3"/>
-          <a:stretch>
-            <a:fillRect/>
-          </a:stretch>
-        </p:blipFill>
-        <p:spPr>
-          <a:xfrm>
-            <a:off x="6217920" y="1463040"/>
-            <a:ext cx="5669280" cy="1987114"/>
-          </a:xfrm>
-          <a:prstGeom prst="rect">
-            <a:avLst/>
-          </a:prstGeom>
-        </p:spPr>
-      </p:pic>
+              <a:t>Apa artinya buat bisnis?</a:t>
+            </a:r>
+          </a:p>
+        </p:txBody>
+      </p:sp>
+      <p:sp>
+        <p:nvSpPr>
+          <p:cNvPr id="5" name="TextBox 4"/>
+          <p:cNvSpPr txBox="1"/>
+          <p:nvPr/>
+        </p:nvSpPr>
+        <p:spPr>
+          <a:xfrm>
+            <a:off x="731520" y="1645920"/>
+            <a:ext cx="10515600" cy="457200"/>
+          </a:xfrm>
+          <a:prstGeom prst="rect">
+            <a:avLst/>
+          </a:prstGeom>
+          <a:noFill/>
+        </p:spPr>
+        <p:txBody>
+          <a:bodyPr wrap="square">
+            <a:spAutoFit/>
+          </a:bodyPr>
+          <a:lstStyle/>
+          <a:p>
+            <a:pPr algn="l">
+              <a:defRPr sz="1700" b="0" i="0">
+                <a:solidFill>
+                  <a:srgbClr val="FFFFFF"/>
+                </a:solidFill>
+                <a:latin typeface="Calibri"/>
+              </a:defRPr>
+            </a:pPr>
+            <a:r>
+              <a:t>•  99,0% variansi harga jual bisa diprediksi dari harga asli + diskon</a:t>
+            </a:r>
+          </a:p>
+        </p:txBody>
+      </p:sp>
+      <p:sp>
+        <p:nvSpPr>
+          <p:cNvPr id="6" name="TextBox 5"/>
+          <p:cNvSpPr txBox="1"/>
+          <p:nvPr/>
+        </p:nvSpPr>
+        <p:spPr>
+          <a:xfrm>
+            <a:off x="731520" y="2194560"/>
+            <a:ext cx="10515600" cy="457200"/>
+          </a:xfrm>
+          <a:prstGeom prst="rect">
+            <a:avLst/>
+          </a:prstGeom>
+          <a:noFill/>
+        </p:spPr>
+        <p:txBody>
+          <a:bodyPr wrap="square">
+            <a:spAutoFit/>
+          </a:bodyPr>
+          <a:lstStyle/>
+          <a:p>
+            <a:pPr algn="l">
+              <a:defRPr sz="1700" b="0" i="0">
+                <a:solidFill>
+                  <a:srgbClr val="FFFFFF"/>
+                </a:solidFill>
+                <a:latin typeface="Calibri"/>
+              </a:defRPr>
+            </a:pPr>
+            <a:r>
+              <a:t>•  Harga asli penerbit = faktor dominan penetapan harga Periplus</a:t>
+            </a:r>
+          </a:p>
+        </p:txBody>
+      </p:sp>
+      <p:sp>
+        <p:nvSpPr>
+          <p:cNvPr id="7" name="TextBox 6"/>
+          <p:cNvSpPr txBox="1"/>
+          <p:nvPr/>
+        </p:nvSpPr>
+        <p:spPr>
+          <a:xfrm>
+            <a:off x="731520" y="2743200"/>
+            <a:ext cx="10515600" cy="457200"/>
+          </a:xfrm>
+          <a:prstGeom prst="rect">
+            <a:avLst/>
+          </a:prstGeom>
+          <a:noFill/>
+        </p:spPr>
+        <p:txBody>
+          <a:bodyPr wrap="square">
+            <a:spAutoFit/>
+          </a:bodyPr>
+          <a:lstStyle/>
+          <a:p>
+            <a:pPr algn="l">
+              <a:defRPr sz="1700" b="0" i="0">
+                <a:solidFill>
+                  <a:srgbClr val="FFFFFF"/>
+                </a:solidFill>
+                <a:latin typeface="Calibri"/>
+              </a:defRPr>
+            </a:pPr>
+            <a:r>
+              <a:t>•  Diskon menurunkan harga secara signifikan: tiap 1% diskon = -Rp 3.756</a:t>
+            </a:r>
+          </a:p>
+        </p:txBody>
+      </p:sp>
+      <p:sp>
+        <p:nvSpPr>
+          <p:cNvPr id="8" name="TextBox 7"/>
+          <p:cNvSpPr txBox="1"/>
+          <p:nvPr/>
+        </p:nvSpPr>
+        <p:spPr>
+          <a:xfrm>
+            <a:off x="731520" y="3291840"/>
+            <a:ext cx="10515600" cy="457200"/>
+          </a:xfrm>
+          <a:prstGeom prst="rect">
+            <a:avLst/>
+          </a:prstGeom>
+          <a:noFill/>
+        </p:spPr>
+        <p:txBody>
+          <a:bodyPr wrap="square">
+            <a:spAutoFit/>
+          </a:bodyPr>
+          <a:lstStyle/>
+          <a:p>
+            <a:pPr algn="l">
+              <a:defRPr sz="1700" b="0" i="0">
+                <a:solidFill>
+                  <a:srgbClr val="FFFFFF"/>
+                </a:solidFill>
+                <a:latin typeface="Calibri"/>
+              </a:defRPr>
+            </a:pPr>
+            <a:r>
+              <a:t>•  Konstanta Rp 14.971 = base markup Periplus di atas harga penerbit</a:t>
+            </a:r>
+          </a:p>
+        </p:txBody>
+      </p:sp>
+      <p:sp>
+        <p:nvSpPr>
+          <p:cNvPr id="9" name="TextBox 8"/>
+          <p:cNvSpPr txBox="1"/>
+          <p:nvPr/>
+        </p:nvSpPr>
+        <p:spPr>
+          <a:xfrm>
+            <a:off x="731520" y="3840480"/>
+            <a:ext cx="10515600" cy="457200"/>
+          </a:xfrm>
+          <a:prstGeom prst="rect">
+            <a:avLst/>
+          </a:prstGeom>
+          <a:noFill/>
+        </p:spPr>
+        <p:txBody>
+          <a:bodyPr wrap="square">
+            <a:spAutoFit/>
+          </a:bodyPr>
+          <a:lstStyle/>
+          <a:p>
+            <a:pPr algn="l">
+              <a:defRPr sz="1700" b="0" i="0">
+                <a:solidFill>
+                  <a:srgbClr val="FFFFFF"/>
+                </a:solidFill>
+                <a:latin typeface="Calibri"/>
+              </a:defRPr>
+            </a:pPr>
+            <a:r>
+              <a:t>•  Model bisa dipakai simulasi: "kalau diskon 20%, harga jadi berapa?"</a:t>
+            </a:r>
+          </a:p>
+        </p:txBody>
+      </p:sp>
+      <p:sp>
+        <p:nvSpPr>
+          <p:cNvPr id="10" name="TextBox 9"/>
+          <p:cNvSpPr txBox="1"/>
+          <p:nvPr/>
+        </p:nvSpPr>
+        <p:spPr>
+          <a:xfrm>
+            <a:off x="731520" y="4389120"/>
+            <a:ext cx="10515600" cy="457200"/>
+          </a:xfrm>
+          <a:prstGeom prst="rect">
+            <a:avLst/>
+          </a:prstGeom>
+          <a:noFill/>
+        </p:spPr>
+        <p:txBody>
+          <a:bodyPr wrap="square">
+            <a:spAutoFit/>
+          </a:bodyPr>
+          <a:lstStyle/>
+          <a:p>
+            <a:pPr algn="l">
+              <a:defRPr sz="1700" b="0" i="0">
+                <a:solidFill>
+                  <a:srgbClr val="FFFFFF"/>
+                </a:solidFill>
+                <a:latin typeface="Calibri"/>
+              </a:defRPr>
+            </a:pPr>
+            <a:r>
+              <a:t>•  Durbin-Watson 1,94 → residual independen, model reliable</a:t>
+            </a:r>
+          </a:p>
+        </p:txBody>
+      </p:sp>
     </p:spTree>
   </p:cSld>
   <p:clrMapOvr>
@@ -8545,7 +7075,7 @@
               </a:defRPr>
             </a:pPr>
             <a:r>
-              <a:t>Analisis Korelasi</a:t>
+              <a:t>K-Means Clustering</a:t>
             </a:r>
           </a:p>
         </p:txBody>
@@ -8558,7 +7088,7 @@
         </p:nvSpPr>
         <p:spPr>
           <a:xfrm>
-            <a:off x="731520" y="1417320"/>
+            <a:off x="731520" y="1051560"/>
             <a:ext cx="1371600" cy="54864"/>
           </a:xfrm>
           <a:prstGeom prst="rect">
@@ -8601,22 +7131,22 @@
         </p:nvSpPr>
         <p:spPr>
           <a:xfrm>
-            <a:off x="731520" y="1097280"/>
-            <a:ext cx="10058400" cy="457200"/>
-          </a:xfrm>
-          <a:prstGeom prst="rect">
-            <a:avLst/>
-          </a:prstGeom>
-          <a:noFill/>
-        </p:spPr>
-        <p:txBody>
-          <a:bodyPr wrap="square">
-            <a:spAutoFit/>
-          </a:bodyPr>
-          <a:lstStyle/>
-          <a:p>
-            <a:pPr algn="l">
-              <a:defRPr sz="1600" b="0" i="1">
+            <a:off x="731520" y="1143000"/>
+            <a:ext cx="10058400" cy="365760"/>
+          </a:xfrm>
+          <a:prstGeom prst="rect">
+            <a:avLst/>
+          </a:prstGeom>
+          <a:noFill/>
+        </p:spPr>
+        <p:txBody>
+          <a:bodyPr wrap="square">
+            <a:spAutoFit/>
+          </a:bodyPr>
+          <a:lstStyle/>
+          <a:p>
+            <a:pPr algn="l">
+              <a:defRPr sz="1500" b="0" i="1">
                 <a:solidFill>
                   <a:srgbClr val="CCCCCC"/>
                 </a:solidFill>
@@ -8624,14 +7154,14 @@
               </a:defRPr>
             </a:pPr>
             <a:r>
-              <a:t>Heatmap &amp; scatter plot</a:t>
+              <a:t>Segmentasi katalog produk menjadi 3 kluster</a:t>
             </a:r>
           </a:p>
         </p:txBody>
       </p:sp>
       <p:pic>
         <p:nvPicPr>
-          <p:cNvPr id="5" name="Picture 4" descr="korelasi_pearson.png"/>
+          <p:cNvPr id="5" name="Picture 4" descr="kmeans_clustering.png"/>
           <p:cNvPicPr>
             <a:picLocks noChangeAspect="1"/>
           </p:cNvPicPr>
@@ -8646,7 +7176,7 @@
         <p:spPr>
           <a:xfrm>
             <a:off x="274320" y="1463040"/>
-            <a:ext cx="5669280" cy="4927610"/>
+            <a:ext cx="5669280" cy="2029683"/>
           </a:xfrm>
           <a:prstGeom prst="rect">
             <a:avLst/>
@@ -8655,7 +7185,7 @@
       </p:pic>
       <p:pic>
         <p:nvPicPr>
-          <p:cNvPr id="6" name="Picture 5" descr="scatter_korelasi.png"/>
+          <p:cNvPr id="6" name="Picture 5" descr="elbow_silhouette.png"/>
           <p:cNvPicPr>
             <a:picLocks noChangeAspect="1"/>
           </p:cNvPicPr>
@@ -8670,13 +7200,49 @@
         <p:spPr>
           <a:xfrm>
             <a:off x="6217920" y="1463040"/>
-            <a:ext cx="5669280" cy="1541739"/>
+            <a:ext cx="5669280" cy="1987114"/>
           </a:xfrm>
           <a:prstGeom prst="rect">
             <a:avLst/>
           </a:prstGeom>
         </p:spPr>
       </p:pic>
+      <p:sp>
+        <p:nvSpPr>
+          <p:cNvPr id="7" name="TextBox 6"/>
+          <p:cNvSpPr txBox="1"/>
+          <p:nvPr/>
+        </p:nvSpPr>
+        <p:spPr>
+          <a:xfrm>
+            <a:off x="731520" y="6217920"/>
+            <a:ext cx="4572000" cy="365760"/>
+          </a:xfrm>
+          <a:prstGeom prst="rect">
+            <a:avLst/>
+          </a:prstGeom>
+          <a:noFill/>
+        </p:spPr>
+        <p:txBody>
+          <a:bodyPr wrap="square">
+            <a:spAutoFit/>
+          </a:bodyPr>
+          <a:lstStyle/>
+          <a:p>
+            <a:pPr algn="l">
+              <a:defRPr sz="1600" b="1" i="0">
+                <a:solidFill>
+                  <a:srgbClr val="2ECC71"/>
+                </a:solidFill>
+                <a:latin typeface="Calibri"/>
+              </a:defRPr>
+            </a:pPr>
+            <a:r>
+              <a:t>Silhouette Score: 0,63</a:t>
+            </a:r>
+          </a:p>
+        </p:txBody>
+      </p:sp>
     </p:spTree>
   </p:cSld>
   <p:clrMapOvr>
@@ -8734,7 +7300,7 @@
               </a:defRPr>
             </a:pPr>
             <a:r>
-              <a:t>Model Regresi Linier Berganda</a:t>
+              <a:t>Detail 3 Kluster</a:t>
             </a:r>
           </a:p>
         </p:txBody>
@@ -8747,7 +7313,7 @@
         </p:nvSpPr>
         <p:spPr>
           <a:xfrm>
-            <a:off x="731520" y="1417320"/>
+            <a:off x="731520" y="1051560"/>
             <a:ext cx="1371600" cy="54864"/>
           </a:xfrm>
           <a:prstGeom prst="rect">
@@ -8790,22 +7356,22 @@
         </p:nvSpPr>
         <p:spPr>
           <a:xfrm>
-            <a:off x="731520" y="1097280"/>
-            <a:ext cx="10058400" cy="457200"/>
-          </a:xfrm>
-          <a:prstGeom prst="rect">
-            <a:avLst/>
-          </a:prstGeom>
-          <a:noFill/>
-        </p:spPr>
-        <p:txBody>
-          <a:bodyPr wrap="square">
-            <a:spAutoFit/>
-          </a:bodyPr>
-          <a:lstStyle/>
-          <a:p>
-            <a:pPr algn="l">
-              <a:defRPr sz="1600" b="0" i="1">
+            <a:off x="731520" y="1143000"/>
+            <a:ext cx="10058400" cy="365760"/>
+          </a:xfrm>
+          <a:prstGeom prst="rect">
+            <a:avLst/>
+          </a:prstGeom>
+          <a:noFill/>
+        </p:spPr>
+        <p:txBody>
+          <a:bodyPr wrap="square">
+            <a:spAutoFit/>
+          </a:bodyPr>
+          <a:lstStyle/>
+          <a:p>
+            <a:pPr algn="l">
+              <a:defRPr sz="1500" b="0" i="1">
                 <a:solidFill>
                   <a:srgbClr val="CCCCCC"/>
                 </a:solidFill>
@@ -8813,45 +7379,21 @@
               </a:defRPr>
             </a:pPr>
             <a:r>
-              <a:t>Prediksi harga jual bersih</a:t>
-            </a:r>
-          </a:p>
-        </p:txBody>
-      </p:sp>
-      <p:pic>
-        <p:nvPicPr>
-          <p:cNvPr id="5" name="Picture 4" descr="regresi_linier.png"/>
-          <p:cNvPicPr>
-            <a:picLocks noChangeAspect="1"/>
-          </p:cNvPicPr>
-          <p:nvPr/>
-        </p:nvPicPr>
-        <p:blipFill>
-          <a:blip r:embed="rId2"/>
-          <a:stretch>
-            <a:fillRect/>
-          </a:stretch>
-        </p:blipFill>
-        <p:spPr>
-          <a:xfrm>
-            <a:off x="457200" y="1554480"/>
-            <a:ext cx="5029200" cy="1370231"/>
-          </a:xfrm>
-          <a:prstGeom prst="rect">
-            <a:avLst/>
-          </a:prstGeom>
-        </p:spPr>
-      </p:pic>
-      <p:sp>
-        <p:nvSpPr>
-          <p:cNvPr id="6" name="Rectangle 5"/>
+              <a:t>Karakteristik setiap segmen pasar</a:t>
+            </a:r>
+          </a:p>
+        </p:txBody>
+      </p:sp>
+      <p:sp>
+        <p:nvSpPr>
+          <p:cNvPr id="5" name="Rectangle 4"/>
           <p:cNvSpPr/>
           <p:nvPr/>
         </p:nvSpPr>
         <p:spPr>
           <a:xfrm>
-            <a:off x="5943600" y="1645920"/>
-            <a:ext cx="2468880" cy="1097280"/>
+            <a:off x="457200" y="1645920"/>
+            <a:ext cx="3474720" cy="4389120"/>
           </a:xfrm>
           <a:prstGeom prst="rect">
             <a:avLst/>
@@ -8887,20 +7429,20 @@
       </p:sp>
       <p:sp>
         <p:nvSpPr>
-          <p:cNvPr id="7" name="Rectangle 6"/>
+          <p:cNvPr id="6" name="Rectangle 5"/>
           <p:cNvSpPr/>
           <p:nvPr/>
         </p:nvSpPr>
         <p:spPr>
           <a:xfrm>
-            <a:off x="5943600" y="1645920"/>
-            <a:ext cx="2468880" cy="45720"/>
+            <a:off x="457200" y="1645920"/>
+            <a:ext cx="3474720" cy="73152"/>
           </a:xfrm>
           <a:prstGeom prst="rect">
             <a:avLst/>
           </a:prstGeom>
           <a:solidFill>
-            <a:srgbClr val="2ECC71"/>
+            <a:srgbClr val="F39424"/>
           </a:solidFill>
           <a:ln>
             <a:noFill/>
@@ -8930,28 +7472,136 @@
       </p:sp>
       <p:sp>
         <p:nvSpPr>
+          <p:cNvPr id="7" name="TextBox 6"/>
+          <p:cNvSpPr txBox="1"/>
+          <p:nvPr/>
+        </p:nvSpPr>
+        <p:spPr>
+          <a:xfrm>
+            <a:off x="640080" y="1920240"/>
+            <a:ext cx="3108960" cy="365760"/>
+          </a:xfrm>
+          <a:prstGeom prst="rect">
+            <a:avLst/>
+          </a:prstGeom>
+          <a:noFill/>
+        </p:spPr>
+        <p:txBody>
+          <a:bodyPr wrap="square">
+            <a:spAutoFit/>
+          </a:bodyPr>
+          <a:lstStyle/>
+          <a:p>
+            <a:pPr algn="l">
+              <a:defRPr sz="2000" b="1" i="0">
+                <a:solidFill>
+                  <a:srgbClr val="F39424"/>
+                </a:solidFill>
+                <a:latin typeface="Calibri"/>
+              </a:defRPr>
+            </a:pPr>
+            <a:r>
+              <a:t>Budget &amp; Promo</a:t>
+            </a:r>
+          </a:p>
+        </p:txBody>
+      </p:sp>
+      <p:sp>
+        <p:nvSpPr>
           <p:cNvPr id="8" name="TextBox 7"/>
           <p:cNvSpPr txBox="1"/>
           <p:nvPr/>
         </p:nvSpPr>
         <p:spPr>
           <a:xfrm>
-            <a:off x="6080760" y="1783080"/>
-            <a:ext cx="2194560" cy="365760"/>
-          </a:xfrm>
-          <a:prstGeom prst="rect">
-            <a:avLst/>
-          </a:prstGeom>
-          <a:noFill/>
-        </p:spPr>
-        <p:txBody>
-          <a:bodyPr wrap="square">
-            <a:spAutoFit/>
-          </a:bodyPr>
-          <a:lstStyle/>
-          <a:p>
-            <a:pPr algn="l">
-              <a:defRPr sz="1200" b="0" i="0">
+            <a:off x="640080" y="2468880"/>
+            <a:ext cx="3108960" cy="274320"/>
+          </a:xfrm>
+          <a:prstGeom prst="rect">
+            <a:avLst/>
+          </a:prstGeom>
+          <a:noFill/>
+        </p:spPr>
+        <p:txBody>
+          <a:bodyPr wrap="square">
+            <a:spAutoFit/>
+          </a:bodyPr>
+          <a:lstStyle/>
+          <a:p>
+            <a:pPr algn="l">
+              <a:defRPr sz="1500" b="0" i="0">
+                <a:solidFill>
+                  <a:srgbClr val="FFFFFF"/>
+                </a:solidFill>
+                <a:latin typeface="Calibri"/>
+              </a:defRPr>
+            </a:pPr>
+            <a:r>
+              <a:t>197 (14,9%)</a:t>
+            </a:r>
+          </a:p>
+        </p:txBody>
+      </p:sp>
+      <p:sp>
+        <p:nvSpPr>
+          <p:cNvPr id="9" name="TextBox 8"/>
+          <p:cNvSpPr txBox="1"/>
+          <p:nvPr/>
+        </p:nvSpPr>
+        <p:spPr>
+          <a:xfrm>
+            <a:off x="640080" y="2834640"/>
+            <a:ext cx="3108960" cy="274320"/>
+          </a:xfrm>
+          <a:prstGeom prst="rect">
+            <a:avLst/>
+          </a:prstGeom>
+          <a:noFill/>
+        </p:spPr>
+        <p:txBody>
+          <a:bodyPr wrap="square">
+            <a:spAutoFit/>
+          </a:bodyPr>
+          <a:lstStyle/>
+          <a:p>
+            <a:pPr algn="l">
+              <a:defRPr sz="1500" b="1" i="0">
+                <a:solidFill>
+                  <a:srgbClr val="FFFFFF"/>
+                </a:solidFill>
+                <a:latin typeface="Calibri"/>
+              </a:defRPr>
+            </a:pPr>
+            <a:r>
+              <a:t>Avg: Rp 196.722</a:t>
+            </a:r>
+          </a:p>
+        </p:txBody>
+      </p:sp>
+      <p:sp>
+        <p:nvSpPr>
+          <p:cNvPr id="10" name="TextBox 9"/>
+          <p:cNvSpPr txBox="1"/>
+          <p:nvPr/>
+        </p:nvSpPr>
+        <p:spPr>
+          <a:xfrm>
+            <a:off x="640080" y="3200400"/>
+            <a:ext cx="3108960" cy="274320"/>
+          </a:xfrm>
+          <a:prstGeom prst="rect">
+            <a:avLst/>
+          </a:prstGeom>
+          <a:noFill/>
+        </p:spPr>
+        <p:txBody>
+          <a:bodyPr wrap="square">
+            <a:spAutoFit/>
+          </a:bodyPr>
+          <a:lstStyle/>
+          <a:p>
+            <a:pPr algn="l">
+              <a:defRPr sz="1400" b="0" i="0">
                 <a:solidFill>
                   <a:srgbClr val="CCCCCC"/>
                 </a:solidFill>
@@ -8959,57 +7609,61 @@
               </a:defRPr>
             </a:pPr>
             <a:r>
-              <a:t>R² Score</a:t>
-            </a:r>
-          </a:p>
-        </p:txBody>
-      </p:sp>
-      <p:sp>
-        <p:nvSpPr>
-          <p:cNvPr id="9" name="TextBox 8"/>
-          <p:cNvSpPr txBox="1"/>
-          <p:nvPr/>
-        </p:nvSpPr>
-        <p:spPr>
-          <a:xfrm>
-            <a:off x="6080760" y="2103120"/>
-            <a:ext cx="2194560" cy="548640"/>
-          </a:xfrm>
-          <a:prstGeom prst="rect">
-            <a:avLst/>
-          </a:prstGeom>
-          <a:noFill/>
-        </p:spPr>
-        <p:txBody>
-          <a:bodyPr wrap="square">
-            <a:spAutoFit/>
-          </a:bodyPr>
-          <a:lstStyle/>
-          <a:p>
-            <a:pPr algn="l">
-              <a:defRPr sz="2400" b="1" i="0">
-                <a:solidFill>
-                  <a:srgbClr val="FFFFFF"/>
-                </a:solidFill>
-                <a:latin typeface="Calibri"/>
-              </a:defRPr>
-            </a:pPr>
-            <a:r>
-              <a:t>0,990</a:t>
-            </a:r>
-          </a:p>
-        </p:txBody>
-      </p:sp>
-      <p:sp>
-        <p:nvSpPr>
-          <p:cNvPr id="10" name="Rectangle 9"/>
+              <a:t>Diskon 44,3%</a:t>
+            </a:r>
+          </a:p>
+        </p:txBody>
+      </p:sp>
+      <p:sp>
+        <p:nvSpPr>
+          <p:cNvPr id="11" name="TextBox 10"/>
+          <p:cNvSpPr txBox="1"/>
+          <p:nvPr/>
+        </p:nvSpPr>
+        <p:spPr>
+          <a:xfrm>
+            <a:off x="640080" y="3840480"/>
+            <a:ext cx="3108960" cy="1828800"/>
+          </a:xfrm>
+          <a:prstGeom prst="rect">
+            <a:avLst/>
+          </a:prstGeom>
+          <a:noFill/>
+        </p:spPr>
+        <p:txBody>
+          <a:bodyPr wrap="square">
+            <a:spAutoFit/>
+          </a:bodyPr>
+          <a:lstStyle/>
+          <a:p>
+            <a:pPr algn="l">
+              <a:defRPr sz="1300" b="0" i="0">
+                <a:solidFill>
+                  <a:srgbClr val="CCCCCC"/>
+                </a:solidFill>
+                <a:latin typeface="Calibri"/>
+              </a:defRPr>
+            </a:pPr>
+            <a:r>
+              <a:t>Buku populer dalam diskon agresif</a:t>
+            </a:r>
+            <a:br/>
+            <a:r>
+              <a:t>Strategi: high-volume, low-margin</a:t>
+            </a:r>
+          </a:p>
+        </p:txBody>
+      </p:sp>
+      <p:sp>
+        <p:nvSpPr>
+          <p:cNvPr id="12" name="Rectangle 11"/>
           <p:cNvSpPr/>
           <p:nvPr/>
         </p:nvSpPr>
         <p:spPr>
           <a:xfrm>
-            <a:off x="8686800" y="1645920"/>
-            <a:ext cx="2468880" cy="1097280"/>
+            <a:off x="4297680" y="1645920"/>
+            <a:ext cx="3474720" cy="4389120"/>
           </a:xfrm>
           <a:prstGeom prst="rect">
             <a:avLst/>
@@ -9045,14 +7699,14 @@
       </p:sp>
       <p:sp>
         <p:nvSpPr>
-          <p:cNvPr id="11" name="Rectangle 10"/>
+          <p:cNvPr id="13" name="Rectangle 12"/>
           <p:cNvSpPr/>
           <p:nvPr/>
         </p:nvSpPr>
         <p:spPr>
           <a:xfrm>
-            <a:off x="8686800" y="1645920"/>
-            <a:ext cx="2468880" cy="45720"/>
+            <a:off x="4297680" y="1645920"/>
+            <a:ext cx="3474720" cy="73152"/>
           </a:xfrm>
           <a:prstGeom prst="rect">
             <a:avLst/>
@@ -9088,28 +7742,136 @@
       </p:sp>
       <p:sp>
         <p:nvSpPr>
-          <p:cNvPr id="12" name="TextBox 11"/>
-          <p:cNvSpPr txBox="1"/>
-          <p:nvPr/>
-        </p:nvSpPr>
-        <p:spPr>
-          <a:xfrm>
-            <a:off x="8823960" y="1783080"/>
-            <a:ext cx="2194560" cy="365760"/>
-          </a:xfrm>
-          <a:prstGeom prst="rect">
-            <a:avLst/>
-          </a:prstGeom>
-          <a:noFill/>
-        </p:spPr>
-        <p:txBody>
-          <a:bodyPr wrap="square">
-            <a:spAutoFit/>
-          </a:bodyPr>
-          <a:lstStyle/>
-          <a:p>
-            <a:pPr algn="l">
-              <a:defRPr sz="1200" b="0" i="0">
+          <p:cNvPr id="14" name="TextBox 13"/>
+          <p:cNvSpPr txBox="1"/>
+          <p:nvPr/>
+        </p:nvSpPr>
+        <p:spPr>
+          <a:xfrm>
+            <a:off x="4480560" y="1920240"/>
+            <a:ext cx="3108960" cy="365760"/>
+          </a:xfrm>
+          <a:prstGeom prst="rect">
+            <a:avLst/>
+          </a:prstGeom>
+          <a:noFill/>
+        </p:spPr>
+        <p:txBody>
+          <a:bodyPr wrap="square">
+            <a:spAutoFit/>
+          </a:bodyPr>
+          <a:lstStyle/>
+          <a:p>
+            <a:pPr algn="l">
+              <a:defRPr sz="2000" b="1" i="0">
+                <a:solidFill>
+                  <a:srgbClr val="0096C7"/>
+                </a:solidFill>
+                <a:latin typeface="Calibri"/>
+              </a:defRPr>
+            </a:pPr>
+            <a:r>
+              <a:t>Standard Regular</a:t>
+            </a:r>
+          </a:p>
+        </p:txBody>
+      </p:sp>
+      <p:sp>
+        <p:nvSpPr>
+          <p:cNvPr id="15" name="TextBox 14"/>
+          <p:cNvSpPr txBox="1"/>
+          <p:nvPr/>
+        </p:nvSpPr>
+        <p:spPr>
+          <a:xfrm>
+            <a:off x="4480560" y="2468880"/>
+            <a:ext cx="3108960" cy="274320"/>
+          </a:xfrm>
+          <a:prstGeom prst="rect">
+            <a:avLst/>
+          </a:prstGeom>
+          <a:noFill/>
+        </p:spPr>
+        <p:txBody>
+          <a:bodyPr wrap="square">
+            <a:spAutoFit/>
+          </a:bodyPr>
+          <a:lstStyle/>
+          <a:p>
+            <a:pPr algn="l">
+              <a:defRPr sz="1500" b="0" i="0">
+                <a:solidFill>
+                  <a:srgbClr val="FFFFFF"/>
+                </a:solidFill>
+                <a:latin typeface="Calibri"/>
+              </a:defRPr>
+            </a:pPr>
+            <a:r>
+              <a:t>1.013 (76,6%)</a:t>
+            </a:r>
+          </a:p>
+        </p:txBody>
+      </p:sp>
+      <p:sp>
+        <p:nvSpPr>
+          <p:cNvPr id="16" name="TextBox 15"/>
+          <p:cNvSpPr txBox="1"/>
+          <p:nvPr/>
+        </p:nvSpPr>
+        <p:spPr>
+          <a:xfrm>
+            <a:off x="4480560" y="2834640"/>
+            <a:ext cx="3108960" cy="274320"/>
+          </a:xfrm>
+          <a:prstGeom prst="rect">
+            <a:avLst/>
+          </a:prstGeom>
+          <a:noFill/>
+        </p:spPr>
+        <p:txBody>
+          <a:bodyPr wrap="square">
+            <a:spAutoFit/>
+          </a:bodyPr>
+          <a:lstStyle/>
+          <a:p>
+            <a:pPr algn="l">
+              <a:defRPr sz="1500" b="1" i="0">
+                <a:solidFill>
+                  <a:srgbClr val="FFFFFF"/>
+                </a:solidFill>
+                <a:latin typeface="Calibri"/>
+              </a:defRPr>
+            </a:pPr>
+            <a:r>
+              <a:t>Avg: Rp 336.256</a:t>
+            </a:r>
+          </a:p>
+        </p:txBody>
+      </p:sp>
+      <p:sp>
+        <p:nvSpPr>
+          <p:cNvPr id="17" name="TextBox 16"/>
+          <p:cNvSpPr txBox="1"/>
+          <p:nvPr/>
+        </p:nvSpPr>
+        <p:spPr>
+          <a:xfrm>
+            <a:off x="4480560" y="3200400"/>
+            <a:ext cx="3108960" cy="274320"/>
+          </a:xfrm>
+          <a:prstGeom prst="rect">
+            <a:avLst/>
+          </a:prstGeom>
+          <a:noFill/>
+        </p:spPr>
+        <p:txBody>
+          <a:bodyPr wrap="square">
+            <a:spAutoFit/>
+          </a:bodyPr>
+          <a:lstStyle/>
+          <a:p>
+            <a:pPr algn="l">
+              <a:defRPr sz="1400" b="0" i="0">
                 <a:solidFill>
                   <a:srgbClr val="CCCCCC"/>
                 </a:solidFill>
@@ -9117,35 +7879,197 @@
               </a:defRPr>
             </a:pPr>
             <a:r>
-              <a:t>Durbin-Watson</a:t>
-            </a:r>
-          </a:p>
-        </p:txBody>
-      </p:sp>
-      <p:sp>
-        <p:nvSpPr>
-          <p:cNvPr id="13" name="TextBox 12"/>
-          <p:cNvSpPr txBox="1"/>
-          <p:nvPr/>
-        </p:nvSpPr>
-        <p:spPr>
-          <a:xfrm>
-            <a:off x="8823960" y="2103120"/>
-            <a:ext cx="2194560" cy="548640"/>
-          </a:xfrm>
-          <a:prstGeom prst="rect">
-            <a:avLst/>
-          </a:prstGeom>
-          <a:noFill/>
-        </p:spPr>
-        <p:txBody>
-          <a:bodyPr wrap="square">
-            <a:spAutoFit/>
-          </a:bodyPr>
-          <a:lstStyle/>
-          <a:p>
-            <a:pPr algn="l">
-              <a:defRPr sz="2400" b="1" i="0">
+              <a:t>Diskon 1,5%</a:t>
+            </a:r>
+          </a:p>
+        </p:txBody>
+      </p:sp>
+      <p:sp>
+        <p:nvSpPr>
+          <p:cNvPr id="18" name="TextBox 17"/>
+          <p:cNvSpPr txBox="1"/>
+          <p:nvPr/>
+        </p:nvSpPr>
+        <p:spPr>
+          <a:xfrm>
+            <a:off x="4480560" y="3840480"/>
+            <a:ext cx="3108960" cy="1828800"/>
+          </a:xfrm>
+          <a:prstGeom prst="rect">
+            <a:avLst/>
+          </a:prstGeom>
+          <a:noFill/>
+        </p:spPr>
+        <p:txBody>
+          <a:bodyPr wrap="square">
+            <a:spAutoFit/>
+          </a:bodyPr>
+          <a:lstStyle/>
+          <a:p>
+            <a:pPr algn="l">
+              <a:defRPr sz="1300" b="0" i="0">
+                <a:solidFill>
+                  <a:srgbClr val="CCCCCC"/>
+                </a:solidFill>
+                <a:latin typeface="Calibri"/>
+              </a:defRPr>
+            </a:pPr>
+            <a:r>
+              <a:t>Tulang punggung pendapatan</a:t>
+            </a:r>
+            <a:br/>
+            <a:r>
+              <a:t>Novel, bisnis, referensi reguler</a:t>
+            </a:r>
+          </a:p>
+        </p:txBody>
+      </p:sp>
+      <p:sp>
+        <p:nvSpPr>
+          <p:cNvPr id="19" name="Rectangle 18"/>
+          <p:cNvSpPr/>
+          <p:nvPr/>
+        </p:nvSpPr>
+        <p:spPr>
+          <a:xfrm>
+            <a:off x="8138160" y="1645920"/>
+            <a:ext cx="3474720" cy="4389120"/>
+          </a:xfrm>
+          <a:prstGeom prst="rect">
+            <a:avLst/>
+          </a:prstGeom>
+          <a:solidFill>
+            <a:srgbClr val="22223A"/>
+          </a:solidFill>
+          <a:ln>
+            <a:noFill/>
+          </a:ln>
+        </p:spPr>
+        <p:style>
+          <a:lnRef idx="1">
+            <a:schemeClr val="accent1"/>
+          </a:lnRef>
+          <a:fillRef idx="3">
+            <a:schemeClr val="accent1"/>
+          </a:fillRef>
+          <a:effectRef idx="2">
+            <a:schemeClr val="accent1"/>
+          </a:effectRef>
+          <a:fontRef idx="minor">
+            <a:schemeClr val="lt1"/>
+          </a:fontRef>
+        </p:style>
+        <p:txBody>
+          <a:bodyPr rtlCol="0" anchor="ctr"/>
+          <a:lstStyle/>
+          <a:p>
+            <a:pPr algn="ctr"/>
+          </a:p>
+        </p:txBody>
+      </p:sp>
+      <p:sp>
+        <p:nvSpPr>
+          <p:cNvPr id="20" name="Rectangle 19"/>
+          <p:cNvSpPr/>
+          <p:nvPr/>
+        </p:nvSpPr>
+        <p:spPr>
+          <a:xfrm>
+            <a:off x="8138160" y="1645920"/>
+            <a:ext cx="3474720" cy="73152"/>
+          </a:xfrm>
+          <a:prstGeom prst="rect">
+            <a:avLst/>
+          </a:prstGeom>
+          <a:solidFill>
+            <a:srgbClr val="FFD600"/>
+          </a:solidFill>
+          <a:ln>
+            <a:noFill/>
+          </a:ln>
+        </p:spPr>
+        <p:style>
+          <a:lnRef idx="1">
+            <a:schemeClr val="accent1"/>
+          </a:lnRef>
+          <a:fillRef idx="3">
+            <a:schemeClr val="accent1"/>
+          </a:fillRef>
+          <a:effectRef idx="2">
+            <a:schemeClr val="accent1"/>
+          </a:effectRef>
+          <a:fontRef idx="minor">
+            <a:schemeClr val="lt1"/>
+          </a:fontRef>
+        </p:style>
+        <p:txBody>
+          <a:bodyPr rtlCol="0" anchor="ctr"/>
+          <a:lstStyle/>
+          <a:p>
+            <a:pPr algn="ctr"/>
+          </a:p>
+        </p:txBody>
+      </p:sp>
+      <p:sp>
+        <p:nvSpPr>
+          <p:cNvPr id="21" name="TextBox 20"/>
+          <p:cNvSpPr txBox="1"/>
+          <p:nvPr/>
+        </p:nvSpPr>
+        <p:spPr>
+          <a:xfrm>
+            <a:off x="8321040" y="1920240"/>
+            <a:ext cx="3108960" cy="365760"/>
+          </a:xfrm>
+          <a:prstGeom prst="rect">
+            <a:avLst/>
+          </a:prstGeom>
+          <a:noFill/>
+        </p:spPr>
+        <p:txBody>
+          <a:bodyPr wrap="square">
+            <a:spAutoFit/>
+          </a:bodyPr>
+          <a:lstStyle/>
+          <a:p>
+            <a:pPr algn="l">
+              <a:defRPr sz="2000" b="1" i="0">
+                <a:solidFill>
+                  <a:srgbClr val="FFD600"/>
+                </a:solidFill>
+                <a:latin typeface="Calibri"/>
+              </a:defRPr>
+            </a:pPr>
+            <a:r>
+              <a:t>Premium Collector</a:t>
+            </a:r>
+          </a:p>
+        </p:txBody>
+      </p:sp>
+      <p:sp>
+        <p:nvSpPr>
+          <p:cNvPr id="22" name="TextBox 21"/>
+          <p:cNvSpPr txBox="1"/>
+          <p:nvPr/>
+        </p:nvSpPr>
+        <p:spPr>
+          <a:xfrm>
+            <a:off x="8321040" y="2468880"/>
+            <a:ext cx="3108960" cy="274320"/>
+          </a:xfrm>
+          <a:prstGeom prst="rect">
+            <a:avLst/>
+          </a:prstGeom>
+          <a:noFill/>
+        </p:spPr>
+        <p:txBody>
+          <a:bodyPr wrap="square">
+            <a:spAutoFit/>
+          </a:bodyPr>
+          <a:lstStyle/>
+          <a:p>
+            <a:pPr algn="l">
+              <a:defRPr sz="1500" b="0" i="0">
                 <a:solidFill>
                   <a:srgbClr val="FFFFFF"/>
                 </a:solidFill>
@@ -9153,45 +8077,93 @@
               </a:defRPr>
             </a:pPr>
             <a:r>
-              <a:t>1,94</a:t>
-            </a:r>
-          </a:p>
-        </p:txBody>
-      </p:sp>
-      <p:pic>
-        <p:nvPicPr>
-          <p:cNvPr id="14" name="Picture 13" descr="regression_result.png"/>
-          <p:cNvPicPr>
-            <a:picLocks noChangeAspect="1"/>
-          </p:cNvPicPr>
-          <p:nvPr/>
-        </p:nvPicPr>
-        <p:blipFill>
-          <a:blip r:embed="rId3"/>
-          <a:stretch>
-            <a:fillRect/>
-          </a:stretch>
-        </p:blipFill>
-        <p:spPr>
-          <a:xfrm>
-            <a:off x="5943600" y="3017520"/>
-            <a:ext cx="5029200" cy="441089"/>
-          </a:xfrm>
-          <a:prstGeom prst="rect">
-            <a:avLst/>
-          </a:prstGeom>
-        </p:spPr>
-      </p:pic>
-      <p:sp>
-        <p:nvSpPr>
-          <p:cNvPr id="15" name="TextBox 14"/>
-          <p:cNvSpPr txBox="1"/>
-          <p:nvPr/>
-        </p:nvSpPr>
-        <p:spPr>
-          <a:xfrm>
-            <a:off x="5943600" y="4114800"/>
-            <a:ext cx="5029200" cy="411480"/>
+              <a:t>112 (8,5%)</a:t>
+            </a:r>
+          </a:p>
+        </p:txBody>
+      </p:sp>
+      <p:sp>
+        <p:nvSpPr>
+          <p:cNvPr id="23" name="TextBox 22"/>
+          <p:cNvSpPr txBox="1"/>
+          <p:nvPr/>
+        </p:nvSpPr>
+        <p:spPr>
+          <a:xfrm>
+            <a:off x="8321040" y="2834640"/>
+            <a:ext cx="3108960" cy="274320"/>
+          </a:xfrm>
+          <a:prstGeom prst="rect">
+            <a:avLst/>
+          </a:prstGeom>
+          <a:noFill/>
+        </p:spPr>
+        <p:txBody>
+          <a:bodyPr wrap="square">
+            <a:spAutoFit/>
+          </a:bodyPr>
+          <a:lstStyle/>
+          <a:p>
+            <a:pPr algn="l">
+              <a:defRPr sz="1500" b="1" i="0">
+                <a:solidFill>
+                  <a:srgbClr val="FFFFFF"/>
+                </a:solidFill>
+                <a:latin typeface="Calibri"/>
+              </a:defRPr>
+            </a:pPr>
+            <a:r>
+              <a:t>Avg: Rp 1.058.080</a:t>
+            </a:r>
+          </a:p>
+        </p:txBody>
+      </p:sp>
+      <p:sp>
+        <p:nvSpPr>
+          <p:cNvPr id="24" name="TextBox 23"/>
+          <p:cNvSpPr txBox="1"/>
+          <p:nvPr/>
+        </p:nvSpPr>
+        <p:spPr>
+          <a:xfrm>
+            <a:off x="8321040" y="3200400"/>
+            <a:ext cx="3108960" cy="274320"/>
+          </a:xfrm>
+          <a:prstGeom prst="rect">
+            <a:avLst/>
+          </a:prstGeom>
+          <a:noFill/>
+        </p:spPr>
+        <p:txBody>
+          <a:bodyPr wrap="square">
+            <a:spAutoFit/>
+          </a:bodyPr>
+          <a:lstStyle/>
+          <a:p>
+            <a:pPr algn="l">
+              <a:defRPr sz="1400" b="0" i="0">
+                <a:solidFill>
+                  <a:srgbClr val="CCCCCC"/>
+                </a:solidFill>
+                <a:latin typeface="Calibri"/>
+              </a:defRPr>
+            </a:pPr>
+            <a:r>
+              <a:t>Diskon 0,4%</a:t>
+            </a:r>
+          </a:p>
+        </p:txBody>
+      </p:sp>
+      <p:sp>
+        <p:nvSpPr>
+          <p:cNvPr id="25" name="TextBox 24"/>
+          <p:cNvSpPr txBox="1"/>
+          <p:nvPr/>
+        </p:nvSpPr>
+        <p:spPr>
+          <a:xfrm>
+            <a:off x="8321040" y="3840480"/>
+            <a:ext cx="3108960" cy="1828800"/>
           </a:xfrm>
           <a:prstGeom prst="rect">
             <a:avLst/>
@@ -9207,121 +8179,17 @@
             <a:pPr algn="l">
               <a:defRPr sz="1300" b="0" i="0">
                 <a:solidFill>
-                  <a:srgbClr val="FFFFFF"/>
-                </a:solidFill>
-                <a:latin typeface="Calibri"/>
-              </a:defRPr>
-            </a:pPr>
-            <a:r>
-              <a:t>→  +Rp 1.000 harga asli → +Rp 964 harga jual</a:t>
-            </a:r>
-          </a:p>
-        </p:txBody>
-      </p:sp>
-      <p:sp>
-        <p:nvSpPr>
-          <p:cNvPr id="16" name="TextBox 15"/>
-          <p:cNvSpPr txBox="1"/>
-          <p:nvPr/>
-        </p:nvSpPr>
-        <p:spPr>
-          <a:xfrm>
-            <a:off x="5943600" y="4553712"/>
-            <a:ext cx="5029200" cy="411480"/>
-          </a:xfrm>
-          <a:prstGeom prst="rect">
-            <a:avLst/>
-          </a:prstGeom>
-          <a:noFill/>
-        </p:spPr>
-        <p:txBody>
-          <a:bodyPr wrap="square">
-            <a:spAutoFit/>
-          </a:bodyPr>
-          <a:lstStyle/>
-          <a:p>
-            <a:pPr algn="l">
-              <a:defRPr sz="1300" b="0" i="0">
-                <a:solidFill>
-                  <a:srgbClr val="FFFFFF"/>
-                </a:solidFill>
-                <a:latin typeface="Calibri"/>
-              </a:defRPr>
-            </a:pPr>
-            <a:r>
-              <a:t>→  +1% diskon → -Rp 3.756 harga jual</a:t>
-            </a:r>
-          </a:p>
-        </p:txBody>
-      </p:sp>
-      <p:sp>
-        <p:nvSpPr>
-          <p:cNvPr id="17" name="TextBox 16"/>
-          <p:cNvSpPr txBox="1"/>
-          <p:nvPr/>
-        </p:nvSpPr>
-        <p:spPr>
-          <a:xfrm>
-            <a:off x="5943600" y="4992624"/>
-            <a:ext cx="5029200" cy="411480"/>
-          </a:xfrm>
-          <a:prstGeom prst="rect">
-            <a:avLst/>
-          </a:prstGeom>
-          <a:noFill/>
-        </p:spPr>
-        <p:txBody>
-          <a:bodyPr wrap="square">
-            <a:spAutoFit/>
-          </a:bodyPr>
-          <a:lstStyle/>
-          <a:p>
-            <a:pPr algn="l">
-              <a:defRPr sz="1300" b="0" i="0">
-                <a:solidFill>
-                  <a:srgbClr val="FFFFFF"/>
-                </a:solidFill>
-                <a:latin typeface="Calibri"/>
-              </a:defRPr>
-            </a:pPr>
-            <a:r>
-              <a:t>→  Konstanta Rp 14.971 (base markup)</a:t>
-            </a:r>
-          </a:p>
-        </p:txBody>
-      </p:sp>
-      <p:sp>
-        <p:nvSpPr>
-          <p:cNvPr id="18" name="TextBox 17"/>
-          <p:cNvSpPr txBox="1"/>
-          <p:nvPr/>
-        </p:nvSpPr>
-        <p:spPr>
-          <a:xfrm>
-            <a:off x="5943600" y="5431536"/>
-            <a:ext cx="5029200" cy="411480"/>
-          </a:xfrm>
-          <a:prstGeom prst="rect">
-            <a:avLst/>
-          </a:prstGeom>
-          <a:noFill/>
-        </p:spPr>
-        <p:txBody>
-          <a:bodyPr wrap="square">
-            <a:spAutoFit/>
-          </a:bodyPr>
-          <a:lstStyle/>
-          <a:p>
-            <a:pPr algn="l">
-              <a:defRPr sz="1300" b="0" i="0">
-                <a:solidFill>
-                  <a:srgbClr val="FFFFFF"/>
-                </a:solidFill>
-                <a:latin typeface="Calibri"/>
-              </a:defRPr>
-            </a:pPr>
-            <a:r>
-              <a:t>→  Residual normal, tidak ada autokorelasi</a:t>
+                  <a:srgbClr val="CCCCCC"/>
+                </a:solidFill>
+                <a:latin typeface="Calibri"/>
+              </a:defRPr>
+            </a:pPr>
+            <a:r>
+              <a:t>Ensiklopedia, edisi kolektor langka</a:t>
+            </a:r>
+            <a:br/>
+            <a:r>
+              <a:t>Strategi: low-volume, high-margin</a:t>
             </a:r>
           </a:p>
         </p:txBody>
@@ -9383,7 +8251,7 @@
               </a:defRPr>
             </a:pPr>
             <a:r>
-              <a:t>K-Means Clustering</a:t>
+              <a:t>Business Insights &amp; Rekomendasi</a:t>
             </a:r>
           </a:p>
         </p:txBody>
@@ -9396,7 +8264,7 @@
         </p:nvSpPr>
         <p:spPr>
           <a:xfrm>
-            <a:off x="731520" y="1417320"/>
+            <a:off x="731520" y="1051560"/>
             <a:ext cx="1371600" cy="54864"/>
           </a:xfrm>
           <a:prstGeom prst="rect">
@@ -9439,22 +8307,22 @@
         </p:nvSpPr>
         <p:spPr>
           <a:xfrm>
-            <a:off x="731520" y="1097280"/>
-            <a:ext cx="10058400" cy="457200"/>
-          </a:xfrm>
-          <a:prstGeom prst="rect">
-            <a:avLst/>
-          </a:prstGeom>
-          <a:noFill/>
-        </p:spPr>
-        <p:txBody>
-          <a:bodyPr wrap="square">
-            <a:spAutoFit/>
-          </a:bodyPr>
-          <a:lstStyle/>
-          <a:p>
-            <a:pPr algn="l">
-              <a:defRPr sz="1600" b="0" i="1">
+            <a:off x="731520" y="1143000"/>
+            <a:ext cx="10058400" cy="365760"/>
+          </a:xfrm>
+          <a:prstGeom prst="rect">
+            <a:avLst/>
+          </a:prstGeom>
+          <a:noFill/>
+        </p:spPr>
+        <p:txBody>
+          <a:bodyPr wrap="square">
+            <a:spAutoFit/>
+          </a:bodyPr>
+          <a:lstStyle/>
+          <a:p>
+            <a:pPr algn="l">
+              <a:defRPr sz="1500" b="0" i="1">
                 <a:solidFill>
                   <a:srgbClr val="CCCCCC"/>
                 </a:solidFill>
@@ -9462,59 +8330,83 @@
               </a:defRPr>
             </a:pPr>
             <a:r>
-              <a:t>Segmentasi produk menjadi 3 kluster</a:t>
-            </a:r>
-          </a:p>
-        </p:txBody>
-      </p:sp>
-      <p:pic>
-        <p:nvPicPr>
-          <p:cNvPr id="5" name="Picture 4" descr="kmeans_clustering.png"/>
-          <p:cNvPicPr>
-            <a:picLocks noChangeAspect="1"/>
-          </p:cNvPicPr>
-          <p:nvPr/>
-        </p:nvPicPr>
-        <p:blipFill>
-          <a:blip r:embed="rId2"/>
-          <a:stretch>
-            <a:fillRect/>
-          </a:stretch>
-        </p:blipFill>
-        <p:spPr>
-          <a:xfrm>
-            <a:off x="274320" y="1463040"/>
-            <a:ext cx="5669280" cy="2029683"/>
-          </a:xfrm>
-          <a:prstGeom prst="rect">
-            <a:avLst/>
-          </a:prstGeom>
-        </p:spPr>
-      </p:pic>
-      <p:pic>
-        <p:nvPicPr>
-          <p:cNvPr id="6" name="Picture 5" descr="elbow_silhouette.png"/>
-          <p:cNvPicPr>
-            <a:picLocks noChangeAspect="1"/>
-          </p:cNvPicPr>
-          <p:nvPr/>
-        </p:nvPicPr>
-        <p:blipFill>
-          <a:blip r:embed="rId3"/>
-          <a:stretch>
-            <a:fillRect/>
-          </a:stretch>
-        </p:blipFill>
-        <p:spPr>
-          <a:xfrm>
-            <a:off x="6217920" y="1463040"/>
-            <a:ext cx="5669280" cy="1987114"/>
-          </a:xfrm>
-          <a:prstGeom prst="rect">
-            <a:avLst/>
-          </a:prstGeom>
-        </p:spPr>
-      </p:pic>
+              <a:t>Nilai bisnis dari hasil analisis</a:t>
+            </a:r>
+          </a:p>
+        </p:txBody>
+      </p:sp>
+      <p:sp>
+        <p:nvSpPr>
+          <p:cNvPr id="5" name="TextBox 4"/>
+          <p:cNvSpPr txBox="1"/>
+          <p:nvPr/>
+        </p:nvSpPr>
+        <p:spPr>
+          <a:xfrm>
+            <a:off x="731520" y="1645920"/>
+            <a:ext cx="5029200" cy="365760"/>
+          </a:xfrm>
+          <a:prstGeom prst="rect">
+            <a:avLst/>
+          </a:prstGeom>
+          <a:noFill/>
+        </p:spPr>
+        <p:txBody>
+          <a:bodyPr wrap="square">
+            <a:spAutoFit/>
+          </a:bodyPr>
+          <a:lstStyle/>
+          <a:p>
+            <a:pPr algn="l">
+              <a:defRPr sz="2000" b="1" i="0">
+                <a:solidFill>
+                  <a:srgbClr val="2ECC71"/>
+                </a:solidFill>
+                <a:latin typeface="Calibri"/>
+              </a:defRPr>
+            </a:pPr>
+            <a:r>
+              <a:t>Bagi Konsumen</a:t>
+            </a:r>
+          </a:p>
+        </p:txBody>
+      </p:sp>
+      <p:sp>
+        <p:nvSpPr>
+          <p:cNvPr id="6" name="TextBox 5"/>
+          <p:cNvSpPr txBox="1"/>
+          <p:nvPr/>
+        </p:nvSpPr>
+        <p:spPr>
+          <a:xfrm>
+            <a:off x="731520" y="2194560"/>
+            <a:ext cx="5029200" cy="411480"/>
+          </a:xfrm>
+          <a:prstGeom prst="rect">
+            <a:avLst/>
+          </a:prstGeom>
+          <a:noFill/>
+        </p:spPr>
+        <p:txBody>
+          <a:bodyPr wrap="square">
+            <a:spAutoFit/>
+          </a:bodyPr>
+          <a:lstStyle/>
+          <a:p>
+            <a:pPr algn="l">
+              <a:defRPr sz="1400" b="0" i="0">
+                <a:solidFill>
+                  <a:srgbClr val="FFFFFF"/>
+                </a:solidFill>
+                <a:latin typeface="Calibri"/>
+              </a:defRPr>
+            </a:pPr>
+            <a:r>
+              <a:t>→  Identifikasi promo terbaik via kluster Budget &amp; Promo</a:t>
+            </a:r>
+          </a:p>
+        </p:txBody>
+      </p:sp>
       <p:sp>
         <p:nvSpPr>
           <p:cNvPr id="7" name="TextBox 6"/>
@@ -9523,30 +8415,354 @@
         </p:nvSpPr>
         <p:spPr>
           <a:xfrm>
-            <a:off x="731520" y="6217920"/>
-            <a:ext cx="4572000" cy="365760"/>
-          </a:xfrm>
-          <a:prstGeom prst="rect">
-            <a:avLst/>
-          </a:prstGeom>
-          <a:noFill/>
-        </p:spPr>
-        <p:txBody>
-          <a:bodyPr wrap="square">
-            <a:spAutoFit/>
-          </a:bodyPr>
-          <a:lstStyle/>
-          <a:p>
-            <a:pPr algn="l">
-              <a:defRPr sz="1600" b="1" i="0">
-                <a:solidFill>
-                  <a:srgbClr val="2ECC71"/>
-                </a:solidFill>
-                <a:latin typeface="Calibri"/>
-              </a:defRPr>
-            </a:pPr>
-            <a:r>
-              <a:t>Silhouette Score: 0,63</a:t>
+            <a:off x="731520" y="2651760"/>
+            <a:ext cx="5029200" cy="411480"/>
+          </a:xfrm>
+          <a:prstGeom prst="rect">
+            <a:avLst/>
+          </a:prstGeom>
+          <a:noFill/>
+        </p:spPr>
+        <p:txBody>
+          <a:bodyPr wrap="square">
+            <a:spAutoFit/>
+          </a:bodyPr>
+          <a:lstStyle/>
+          <a:p>
+            <a:pPr algn="l">
+              <a:defRPr sz="1400" b="0" i="0">
+                <a:solidFill>
+                  <a:srgbClr val="FFFFFF"/>
+                </a:solidFill>
+                <a:latin typeface="Calibri"/>
+              </a:defRPr>
+            </a:pPr>
+            <a:r>
+              <a:t>→  Rekomendasi personal berbasis segmentasi harga</a:t>
+            </a:r>
+          </a:p>
+        </p:txBody>
+      </p:sp>
+      <p:sp>
+        <p:nvSpPr>
+          <p:cNvPr id="8" name="TextBox 7"/>
+          <p:cNvSpPr txBox="1"/>
+          <p:nvPr/>
+        </p:nvSpPr>
+        <p:spPr>
+          <a:xfrm>
+            <a:off x="731520" y="3108960"/>
+            <a:ext cx="5029200" cy="411480"/>
+          </a:xfrm>
+          <a:prstGeom prst="rect">
+            <a:avLst/>
+          </a:prstGeom>
+          <a:noFill/>
+        </p:spPr>
+        <p:txBody>
+          <a:bodyPr wrap="square">
+            <a:spAutoFit/>
+          </a:bodyPr>
+          <a:lstStyle/>
+          <a:p>
+            <a:pPr algn="l">
+              <a:defRPr sz="1400" b="0" i="0">
+                <a:solidFill>
+                  <a:srgbClr val="FFFFFF"/>
+                </a:solidFill>
+                <a:latin typeface="Calibri"/>
+              </a:defRPr>
+            </a:pPr>
+            <a:r>
+              <a:t>→  Prediksi rentang harga wajar per kategori</a:t>
+            </a:r>
+          </a:p>
+        </p:txBody>
+      </p:sp>
+      <p:sp>
+        <p:nvSpPr>
+          <p:cNvPr id="9" name="TextBox 8"/>
+          <p:cNvSpPr txBox="1"/>
+          <p:nvPr/>
+        </p:nvSpPr>
+        <p:spPr>
+          <a:xfrm>
+            <a:off x="6400800" y="1645920"/>
+            <a:ext cx="5029200" cy="365760"/>
+          </a:xfrm>
+          <a:prstGeom prst="rect">
+            <a:avLst/>
+          </a:prstGeom>
+          <a:noFill/>
+        </p:spPr>
+        <p:txBody>
+          <a:bodyPr wrap="square">
+            <a:spAutoFit/>
+          </a:bodyPr>
+          <a:lstStyle/>
+          <a:p>
+            <a:pPr algn="l">
+              <a:defRPr sz="2000" b="1" i="0">
+                <a:solidFill>
+                  <a:srgbClr val="0096C7"/>
+                </a:solidFill>
+                <a:latin typeface="Calibri"/>
+              </a:defRPr>
+            </a:pPr>
+            <a:r>
+              <a:t>Bagi Pengelola E-Commerce</a:t>
+            </a:r>
+          </a:p>
+        </p:txBody>
+      </p:sp>
+      <p:sp>
+        <p:nvSpPr>
+          <p:cNvPr id="10" name="TextBox 9"/>
+          <p:cNvSpPr txBox="1"/>
+          <p:nvPr/>
+        </p:nvSpPr>
+        <p:spPr>
+          <a:xfrm>
+            <a:off x="6400800" y="2194560"/>
+            <a:ext cx="5029200" cy="411480"/>
+          </a:xfrm>
+          <a:prstGeom prst="rect">
+            <a:avLst/>
+          </a:prstGeom>
+          <a:noFill/>
+        </p:spPr>
+        <p:txBody>
+          <a:bodyPr wrap="square">
+            <a:spAutoFit/>
+          </a:bodyPr>
+          <a:lstStyle/>
+          <a:p>
+            <a:pPr algn="l">
+              <a:defRPr sz="1400" b="0" i="0">
+                <a:solidFill>
+                  <a:srgbClr val="FFFFFF"/>
+                </a:solidFill>
+                <a:latin typeface="Calibri"/>
+              </a:defRPr>
+            </a:pPr>
+            <a:r>
+              <a:t>→  Efisiensi inventaris &amp; optimasi reorder point</a:t>
+            </a:r>
+          </a:p>
+        </p:txBody>
+      </p:sp>
+      <p:sp>
+        <p:nvSpPr>
+          <p:cNvPr id="11" name="TextBox 10"/>
+          <p:cNvSpPr txBox="1"/>
+          <p:nvPr/>
+        </p:nvSpPr>
+        <p:spPr>
+          <a:xfrm>
+            <a:off x="6400800" y="2651760"/>
+            <a:ext cx="5029200" cy="411480"/>
+          </a:xfrm>
+          <a:prstGeom prst="rect">
+            <a:avLst/>
+          </a:prstGeom>
+          <a:noFill/>
+        </p:spPr>
+        <p:txBody>
+          <a:bodyPr wrap="square">
+            <a:spAutoFit/>
+          </a:bodyPr>
+          <a:lstStyle/>
+          <a:p>
+            <a:pPr algn="l">
+              <a:defRPr sz="1400" b="0" i="0">
+                <a:solidFill>
+                  <a:srgbClr val="FFFFFF"/>
+                </a:solidFill>
+                <a:latin typeface="Calibri"/>
+              </a:defRPr>
+            </a:pPr>
+            <a:r>
+              <a:t>→  Dynamic pricing berbasis model regresi</a:t>
+            </a:r>
+          </a:p>
+        </p:txBody>
+      </p:sp>
+      <p:sp>
+        <p:nvSpPr>
+          <p:cNvPr id="12" name="TextBox 11"/>
+          <p:cNvSpPr txBox="1"/>
+          <p:nvPr/>
+        </p:nvSpPr>
+        <p:spPr>
+          <a:xfrm>
+            <a:off x="6400800" y="3108960"/>
+            <a:ext cx="5029200" cy="411480"/>
+          </a:xfrm>
+          <a:prstGeom prst="rect">
+            <a:avLst/>
+          </a:prstGeom>
+          <a:noFill/>
+        </p:spPr>
+        <p:txBody>
+          <a:bodyPr wrap="square">
+            <a:spAutoFit/>
+          </a:bodyPr>
+          <a:lstStyle/>
+          <a:p>
+            <a:pPr algn="l">
+              <a:defRPr sz="1400" b="0" i="0">
+                <a:solidFill>
+                  <a:srgbClr val="FFFFFF"/>
+                </a:solidFill>
+                <a:latin typeface="Calibri"/>
+              </a:defRPr>
+            </a:pPr>
+            <a:r>
+              <a:t>→  Targeted marketing per segmen kluster</a:t>
+            </a:r>
+          </a:p>
+        </p:txBody>
+      </p:sp>
+      <p:sp>
+        <p:nvSpPr>
+          <p:cNvPr id="13" name="TextBox 12"/>
+          <p:cNvSpPr txBox="1"/>
+          <p:nvPr/>
+        </p:nvSpPr>
+        <p:spPr>
+          <a:xfrm>
+            <a:off x="731520" y="4114800"/>
+            <a:ext cx="10058400" cy="365760"/>
+          </a:xfrm>
+          <a:prstGeom prst="rect">
+            <a:avLst/>
+          </a:prstGeom>
+          <a:noFill/>
+        </p:spPr>
+        <p:txBody>
+          <a:bodyPr wrap="square">
+            <a:spAutoFit/>
+          </a:bodyPr>
+          <a:lstStyle/>
+          <a:p>
+            <a:pPr algn="l">
+              <a:defRPr sz="1800" b="1" i="0">
+                <a:solidFill>
+                  <a:srgbClr val="FFD600"/>
+                </a:solidFill>
+                <a:latin typeface="Calibri"/>
+              </a:defRPr>
+            </a:pPr>
+            <a:r>
+              <a:t>Ringkasan Hasil Utama</a:t>
+            </a:r>
+          </a:p>
+        </p:txBody>
+      </p:sp>
+      <p:sp>
+        <p:nvSpPr>
+          <p:cNvPr id="14" name="TextBox 13"/>
+          <p:cNvSpPr txBox="1"/>
+          <p:nvPr/>
+        </p:nvSpPr>
+        <p:spPr>
+          <a:xfrm>
+            <a:off x="731520" y="4663440"/>
+            <a:ext cx="10058400" cy="411480"/>
+          </a:xfrm>
+          <a:prstGeom prst="rect">
+            <a:avLst/>
+          </a:prstGeom>
+          <a:noFill/>
+        </p:spPr>
+        <p:txBody>
+          <a:bodyPr wrap="square">
+            <a:spAutoFit/>
+          </a:bodyPr>
+          <a:lstStyle/>
+          <a:p>
+            <a:pPr algn="l">
+              <a:defRPr sz="1500" b="0" i="0">
+                <a:solidFill>
+                  <a:srgbClr val="FFFFFF"/>
+                </a:solidFill>
+                <a:latin typeface="Calibri"/>
+              </a:defRPr>
+            </a:pPr>
+            <a:r>
+              <a:t>✓  Regresi R² = 0,990 → harga bisa diprediksi dengan presisi tinggi</a:t>
+            </a:r>
+          </a:p>
+        </p:txBody>
+      </p:sp>
+      <p:sp>
+        <p:nvSpPr>
+          <p:cNvPr id="15" name="TextBox 14"/>
+          <p:cNvSpPr txBox="1"/>
+          <p:nvPr/>
+        </p:nvSpPr>
+        <p:spPr>
+          <a:xfrm>
+            <a:off x="731520" y="5120640"/>
+            <a:ext cx="10058400" cy="411480"/>
+          </a:xfrm>
+          <a:prstGeom prst="rect">
+            <a:avLst/>
+          </a:prstGeom>
+          <a:noFill/>
+        </p:spPr>
+        <p:txBody>
+          <a:bodyPr wrap="square">
+            <a:spAutoFit/>
+          </a:bodyPr>
+          <a:lstStyle/>
+          <a:p>
+            <a:pPr algn="l">
+              <a:defRPr sz="1500" b="0" i="0">
+                <a:solidFill>
+                  <a:srgbClr val="FFFFFF"/>
+                </a:solidFill>
+                <a:latin typeface="Calibri"/>
+              </a:defRPr>
+            </a:pPr>
+            <a:r>
+              <a:t>✓  3 kluster strategis memungkinkan strategi pemasaran yang berbeda per segmen</a:t>
+            </a:r>
+          </a:p>
+        </p:txBody>
+      </p:sp>
+      <p:sp>
+        <p:nvSpPr>
+          <p:cNvPr id="16" name="TextBox 15"/>
+          <p:cNvSpPr txBox="1"/>
+          <p:nvPr/>
+        </p:nvSpPr>
+        <p:spPr>
+          <a:xfrm>
+            <a:off x="731520" y="5577840"/>
+            <a:ext cx="10058400" cy="411480"/>
+          </a:xfrm>
+          <a:prstGeom prst="rect">
+            <a:avLst/>
+          </a:prstGeom>
+          <a:noFill/>
+        </p:spPr>
+        <p:txBody>
+          <a:bodyPr wrap="square">
+            <a:spAutoFit/>
+          </a:bodyPr>
+          <a:lstStyle/>
+          <a:p>
+            <a:pPr algn="l">
+              <a:defRPr sz="1500" b="0" i="0">
+                <a:solidFill>
+                  <a:srgbClr val="FFFFFF"/>
+                </a:solidFill>
+                <a:latin typeface="Calibri"/>
+              </a:defRPr>
+            </a:pPr>
+            <a:r>
+              <a:t>✓  Model siap diimplementasikan untuk decision support system e-commerce</a:t>
             </a:r>
           </a:p>
         </p:txBody>
